--- a/skills/dsh-academic-ppt/references/templates/limitations.pptx
+++ b/skills/dsh-academic-ppt/references/templates/limitations.pptx
@@ -948,8 +948,15 @@
 全部文本为填写指引，图表值是合成演示值，不是任何研究结果。使用前替换论文、数据、原图与来源。
 内容职责：失败条件；错误发生在哪一步；对结论的影响。
 建议讲述时间只是排练起点，按实际内容调整。
+原图来源：T1
+示例图
+响应曲线；合成演示值
+https://github.com/YuZhou0311/dsh-academic-ppt
+原创排版教学示例 v0.3.0
+MIT; all plotted values are synthetic
+完整原图，无裁切
 参考文献（完整题名）
-T1 · Full article title: connecting decision models, experimental evidence and independent validation in crop cultivation · 期刊与卷页（替换） · 2026 · 待替换 · 书目占位，非真实文献</a:t>
+T1 · Full article title: connecting decision models, experimental evidence and independent validation in crop cultivation · 期刊与卷页（替换） · 2026 · 书目占位；图表均为合成示例 · 书目占位，非真实文献</a:t>
             </a:r>
             <a:endParaRPr lang="en-US" dirty="0"/>
           </a:p>
@@ -1042,7 +1049,7 @@
 内容职责：输入条件变化；机制失配；可支持的迁移结论。
 建议讲述时间只是排练起点，按实际内容调整。
 参考文献（完整题名）
-T1 · Full article title: connecting decision models, experimental evidence and independent validation in crop cultivation · 期刊与卷页（替换） · 2026 · 待替换 · 书目占位，非真实文献</a:t>
+T1 · Full article title: connecting decision models, experimental evidence and independent validation in crop cultivation · 期刊与卷页（替换） · 2026 · 书目占位；图表均为合成示例 · 书目占位，非真实文献</a:t>
             </a:r>
             <a:endParaRPr lang="en-US" dirty="0"/>
           </a:p>
@@ -1135,7 +1142,7 @@
 内容职责：偏倚来源；排查与敏感性分析。
 建议讲述时间只是排练起点，按实际内容调整。
 参考文献（完整题名）
-T1 · Full article title: connecting decision models, experimental evidence and independent validation in crop cultivation · 期刊与卷页（替换） · 2026 · 待替换 · 书目占位，非真实文献</a:t>
+T1 · Full article title: connecting decision models, experimental evidence and independent validation in crop cultivation · 期刊与卷页（替换） · 2026 · 书目占位；图表均为合成示例 · 书目占位，非真实文献</a:t>
             </a:r>
             <a:endParaRPr lang="en-US" dirty="0"/>
           </a:p>
@@ -1223,12 +1230,12 @@
           <a:p>
             <a:r>
               <a:rPr lang="en-US" dirty="0"/>
-              <a:t>本页为原创学术版式模板，ID limitations-validity-audit。逐项对应威胁、证据与处理，避免笼统的局限清单。
+              <a:t>本页为原创学术版式模板，ID limitations-validity-audit。通栏表对齐威胁、证据与验证；其下两块说明限定范围，结论紧跟实际内容高度。
 全部文本为填写指引，图表值是合成演示值，不是任何研究结果。使用前替换论文、数据、原图与来源。
 内容职责：内部效度；外部效度。
 建议讲述时间只是排练起点，按实际内容调整。
 参考文献（完整题名）
-T1 · Full article title: connecting decision models, experimental evidence and independent validation in crop cultivation · 期刊与卷页（替换） · 2026 · 待替换 · 书目占位，非真实文献</a:t>
+T1 · Full article title: connecting decision models, experimental evidence and independent validation in crop cultivation · 期刊与卷页（替换） · 2026 · 书目占位；图表均为合成示例 · 书目占位，非真实文献</a:t>
             </a:r>
             <a:endParaRPr lang="en-US" dirty="0"/>
           </a:p>
@@ -1321,7 +1328,7 @@
 内容职责：风险触发条件；人工与计算代价；剩余风险。
 建议讲述时间只是排练起点，按实际内容调整。
 参考文献（完整题名）
-T1 · Full article title: connecting decision models, experimental evidence and independent validation in crop cultivation · 期刊与卷页（替换） · 2026 · 待替换 · 书目占位，非真实文献</a:t>
+T1 · Full article title: connecting decision models, experimental evidence and independent validation in crop cultivation · 期刊与卷页（替换） · 2026 · 书目占位；图表均为合成示例 · 书目占位，非真实文献</a:t>
             </a:r>
             <a:endParaRPr lang="en-US" dirty="0"/>
           </a:p>
@@ -1414,7 +1421,7 @@
 内容职责：已公开材料；缺失与重建条件。
 建议讲述时间只是排练起点，按实际内容调整。
 参考文献（完整题名）
-T1 · Full article title: connecting decision models, experimental evidence and independent validation in crop cultivation · 期刊与卷页（替换） · 2026 · 待替换 · 书目占位，非真实文献</a:t>
+T1 · Full article title: connecting decision models, experimental evidence and independent validation in crop cultivation · 期刊与卷页（替换） · 2026 · 书目占位；图表均为合成示例 · 书目占位，非真实文献</a:t>
             </a:r>
             <a:endParaRPr lang="en-US" dirty="0"/>
           </a:p>
@@ -1858,14 +1865,14 @@
       </p:sp>
       <p:sp>
         <p:nvSpPr>
-          <p:cNvPr id="4" name="T37/kicker"/>
-          <p:cNvSpPr/>
-          <p:nvPr/>
-        </p:nvSpPr>
-        <p:spPr>
-          <a:xfrm>
-            <a:off x="457200" y="152400"/>
-            <a:ext cx="11277600" cy="190500"/>
+          <p:cNvPr id="4" name="T37/title"/>
+          <p:cNvSpPr/>
+          <p:nvPr/>
+        </p:nvSpPr>
+        <p:spPr>
+          <a:xfrm>
+            <a:off x="457200" y="209550"/>
+            <a:ext cx="11277600" cy="438150"/>
           </a:xfrm>
           <a:prstGeom prst="rect">
             <a:avLst/>
@@ -1879,83 +1886,64 @@
           <a:p>
             <a:pPr algn="l" indent="0" marL="0">
               <a:lnSpc>
-                <a:spcPts val="1320"/>
-              </a:lnSpc>
-              <a:buNone/>
-            </a:pPr>
-            <a:r>
-              <a:rPr lang="zh-CN" altLang="en-US" sz="1200" dirty="0">
-                <a:solidFill>
-                  <a:srgbClr val="515B68"/>
-                </a:solidFill>
-                <a:latin typeface="Noto Sans CJK SC" pitchFamily="34" charset="0"/>
-                <a:ea typeface="Noto Sans CJK SC" pitchFamily="34" charset="-122"/>
-                <a:cs typeface="Noto Sans CJK SC" pitchFamily="34" charset="-120"/>
-              </a:rPr>
-              <a:t>结构模板 / 占位说明与合成数据</a:t>
-            </a:r>
-            <a:endParaRPr lang="zh-CN" sz="1200" dirty="0"/>
+                <a:spcPts val="3360"/>
+              </a:lnSpc>
+              <a:buNone/>
+            </a:pPr>
+            <a:r>
+              <a:rPr lang="zh-CN" altLang="en-US" sz="3000" b="1" dirty="0">
+                <a:solidFill>
+                  <a:srgbClr val="1C2430"/>
+                </a:solidFill>
+                <a:latin typeface="Noto Sans CJK SC" pitchFamily="34" charset="0"/>
+                <a:ea typeface="Noto Sans CJK SC" pitchFamily="34" charset="-122"/>
+                <a:cs typeface="Noto Sans CJK SC" pitchFamily="34" charset="-120"/>
+              </a:rPr>
+              <a:t>失败案例的逐步定位</a:t>
+            </a:r>
+            <a:endParaRPr lang="zh-CN" sz="3000" dirty="0"/>
           </a:p>
         </p:txBody>
       </p:sp>
       <p:sp>
         <p:nvSpPr>
-          <p:cNvPr id="5" name="T37/title"/>
-          <p:cNvSpPr/>
-          <p:nvPr/>
-        </p:nvSpPr>
-        <p:spPr>
-          <a:xfrm>
-            <a:off x="457200" y="381000"/>
-            <a:ext cx="11277600" cy="400050"/>
-          </a:xfrm>
-          <a:prstGeom prst="rect">
-            <a:avLst/>
-          </a:prstGeom>
-          <a:noFill/>
-          <a:ln/>
-        </p:spPr>
-        <p:txBody>
-          <a:bodyPr wrap="none" lIns="0" tIns="0" rIns="0" bIns="0" rtlCol="0" anchor="t"/>
-          <a:lstStyle/>
-          <a:p>
-            <a:pPr algn="l" indent="0" marL="0">
-              <a:lnSpc>
-                <a:spcPts val="2856"/>
-              </a:lnSpc>
-              <a:buNone/>
-            </a:pPr>
-            <a:r>
-              <a:rPr lang="zh-CN" altLang="en-US" sz="2550" b="1" dirty="0">
-                <a:solidFill>
-                  <a:srgbClr val="1C2430"/>
-                </a:solidFill>
-                <a:latin typeface="Noto Sans CJK SC" pitchFamily="34" charset="0"/>
-                <a:ea typeface="Noto Sans CJK SC" pitchFamily="34" charset="-122"/>
-                <a:cs typeface="Noto Sans CJK SC" pitchFamily="34" charset="-120"/>
-              </a:rPr>
-              <a:t>失败案例的逐步定位</a:t>
-            </a:r>
-            <a:endParaRPr lang="zh-CN" sz="2550" dirty="0"/>
-          </a:p>
-        </p:txBody>
-      </p:sp>
-      <p:sp>
-        <p:nvSpPr>
-          <p:cNvPr id="6" name="T37/header-rule"/>
-          <p:cNvSpPr/>
-          <p:nvPr/>
-        </p:nvSpPr>
-        <p:spPr>
-          <a:xfrm>
-            <a:off x="457200" y="876300"/>
+          <p:cNvPr id="5" name="T37/header-rule"/>
+          <p:cNvSpPr/>
+          <p:nvPr/>
+        </p:nvSpPr>
+        <p:spPr>
+          <a:xfrm>
+            <a:off x="457200" y="752475"/>
             <a:ext cx="11277600" cy="0"/>
           </a:xfrm>
           <a:prstGeom prst="line">
             <a:avLst/>
           </a:prstGeom>
           <a:noFill/>
-          <a:ln w="11430">
+          <a:ln w="10478">
+            <a:solidFill>
+              <a:srgbClr val="BEC8D4"/>
+            </a:solidFill>
+            <a:prstDash val="solid"/>
+          </a:ln>
+        </p:spPr>
+      </p:sp>
+      <p:sp>
+        <p:nvSpPr>
+          <p:cNvPr id="6" name="T37/header-accent"/>
+          <p:cNvSpPr/>
+          <p:nvPr/>
+        </p:nvSpPr>
+        <p:spPr>
+          <a:xfrm>
+            <a:off x="457200" y="752475"/>
+            <a:ext cx="704850" cy="0"/>
+          </a:xfrm>
+          <a:prstGeom prst="line">
+            <a:avLst/>
+          </a:prstGeom>
+          <a:noFill/>
+          <a:ln w="28575">
             <a:solidFill>
               <a:srgbClr val="173C70"/>
             </a:solidFill>
@@ -1971,8 +1959,8 @@
         </p:nvSpPr>
         <p:spPr>
           <a:xfrm>
-            <a:off x="457200" y="1466850"/>
-            <a:ext cx="5943600" cy="4305300"/>
+            <a:off x="457200" y="1281494"/>
+            <a:ext cx="5943600" cy="4475321"/>
           </a:xfrm>
           <a:prstGeom prst="rect">
             <a:avLst/>
@@ -1996,14 +1984,14 @@
         </p:nvSpPr>
         <p:spPr>
           <a:xfrm>
-            <a:off x="571500" y="1352550"/>
-            <a:ext cx="2324100" cy="323850"/>
+            <a:off x="571500" y="1167194"/>
+            <a:ext cx="2590800" cy="342900"/>
           </a:xfrm>
           <a:prstGeom prst="rect">
             <a:avLst/>
           </a:prstGeom>
           <a:solidFill>
-            <a:srgbClr val="173C70"/>
+            <a:srgbClr val="A24736"/>
           </a:solidFill>
           <a:ln w="12700">
             <a:solidFill>
@@ -2023,8 +2011,8 @@
         </p:nvSpPr>
         <p:spPr>
           <a:xfrm>
-            <a:off x="676275" y="1381125"/>
-            <a:ext cx="2114550" cy="276225"/>
+            <a:off x="676275" y="1195769"/>
+            <a:ext cx="2381250" cy="285750"/>
           </a:xfrm>
           <a:prstGeom prst="rect">
             <a:avLst/>
@@ -2038,12 +2026,12 @@
           <a:p>
             <a:pPr algn="l" indent="0" marL="0">
               <a:lnSpc>
-                <a:spcPts val="2070"/>
-              </a:lnSpc>
-              <a:buNone/>
-            </a:pPr>
-            <a:r>
-              <a:rPr lang="zh-CN" altLang="en-US" sz="1800" b="1" dirty="0">
+                <a:spcPts val="2242"/>
+              </a:lnSpc>
+              <a:buNone/>
+            </a:pPr>
+            <a:r>
+              <a:rPr lang="zh-CN" altLang="en-US" sz="1950" b="1" dirty="0">
                 <a:solidFill>
                   <a:srgbClr val="FFFFFF"/>
                 </a:solidFill>
@@ -2053,7 +2041,7 @@
               </a:rPr>
               <a:t>失败输入及输出记录</a:t>
             </a:r>
-            <a:endParaRPr lang="zh-CN" sz="1800" dirty="0"/>
+            <a:endParaRPr lang="zh-CN" sz="1950" dirty="0"/>
           </a:p>
         </p:txBody>
       </p:sp>
@@ -2065,8 +2053,8 @@
         </p:nvSpPr>
         <p:spPr>
           <a:xfrm>
-            <a:off x="457200" y="5905500"/>
-            <a:ext cx="5943600" cy="266700"/>
+            <a:off x="457200" y="5895213"/>
+            <a:ext cx="5943600" cy="276987"/>
           </a:xfrm>
           <a:prstGeom prst="rect">
             <a:avLst/>
@@ -2107,8 +2095,8 @@
         </p:nvSpPr>
         <p:spPr>
           <a:xfrm>
-            <a:off x="590550" y="1790700"/>
-            <a:ext cx="5676900" cy="3810000"/>
+            <a:off x="1012977" y="1641253"/>
+            <a:ext cx="4832046" cy="3575495"/>
           </a:xfrm>
           <a:prstGeom prst="rect">
             <a:avLst/>
@@ -2116,19 +2104,24 @@
           <a:solidFill>
             <a:srgbClr val="FFFFFF"/>
           </a:solidFill>
-          <a:ln w="12700">
-            <a:solidFill>
-              <a:srgbClr val="FFFFFF">
-                <a:alpha val="0"/>
+          <a:ln w="7620">
+            <a:solidFill>
+              <a:srgbClr val="CCD4DD"/>
+            </a:solidFill>
+            <a:prstDash val="solid"/>
+          </a:ln>
+          <a:effectLst>
+            <a:outerShdw sx="100000" sy="100000" kx="0" ky="0" algn="bl" rotWithShape="0" blurRad="28575" dist="19050" dir="5400000">
+              <a:srgbClr val="263B50">
+                <a:alpha val="12000"/>
               </a:srgbClr>
-            </a:solidFill>
-            <a:prstDash val="solid"/>
-          </a:ln>
+            </a:outerShdw>
+          </a:effectLst>
         </p:spPr>
       </p:sp>
       <p:pic>
         <p:nvPicPr>
-          <p:cNvPr id="12" name="T37/figure:0:image" descr="T1 · 示例图 · 响应曲线；合成演示值">    </p:cNvPr>
+          <p:cNvPr id="12" name="T37/figure:0:image" descr="A/B 为条件；合成数据">    </p:cNvPr>
           <p:cNvPicPr>
             <a:picLocks noChangeAspect="1"/>
           </p:cNvPicPr>
@@ -2142,8 +2135,8 @@
         </p:blipFill>
         <p:spPr>
           <a:xfrm>
-            <a:off x="590550" y="1821180"/>
-            <a:ext cx="5676900" cy="3406140"/>
+            <a:off x="1041552" y="1669828"/>
+            <a:ext cx="4774896" cy="3518345"/>
           </a:xfrm>
           <a:prstGeom prst="rect">
             <a:avLst/>
@@ -2158,7 +2151,7 @@
         </p:nvSpPr>
         <p:spPr>
           <a:xfrm>
-            <a:off x="590550" y="5343525"/>
+            <a:off x="590550" y="5321522"/>
             <a:ext cx="5676900" cy="257175"/>
           </a:xfrm>
           <a:prstGeom prst="rect">
@@ -2186,7 +2179,7 @@
                 <a:ea typeface="Noto Sans CJK SC" pitchFamily="34" charset="-122"/>
                 <a:cs typeface="Noto Sans CJK SC" pitchFamily="34" charset="-120"/>
               </a:rPr>
-              <a:t>T1 · 示例图 · 响应曲线；合成演示值</a:t>
+              <a:t>A/B 为条件；合成数据</a:t>
             </a:r>
             <a:endParaRPr lang="zh-CN" sz="1350" dirty="0"/>
           </a:p>
@@ -2200,7 +2193,7 @@
         </p:nvSpPr>
         <p:spPr>
           <a:xfrm>
-            <a:off x="6743700" y="2724150"/>
+            <a:off x="6743700" y="2591467"/>
             <a:ext cx="4991100" cy="0"/>
           </a:xfrm>
           <a:prstGeom prst="line">
@@ -2223,14 +2216,14 @@
         </p:nvSpPr>
         <p:spPr>
           <a:xfrm>
-            <a:off x="6743700" y="1409700"/>
+            <a:off x="6743700" y="1225772"/>
             <a:ext cx="47625" cy="295275"/>
           </a:xfrm>
           <a:prstGeom prst="rect">
             <a:avLst/>
           </a:prstGeom>
           <a:solidFill>
-            <a:srgbClr val="903543"/>
+            <a:srgbClr val="A24736"/>
           </a:solidFill>
           <a:ln w="12700">
             <a:solidFill>
@@ -2250,7 +2243,7 @@
         </p:nvSpPr>
         <p:spPr>
           <a:xfrm>
-            <a:off x="6896100" y="1409700"/>
+            <a:off x="6896100" y="1225772"/>
             <a:ext cx="4838700" cy="304800"/>
           </a:xfrm>
           <a:prstGeom prst="rect">
@@ -2265,14 +2258,14 @@
           <a:p>
             <a:pPr algn="l" indent="0" marL="0">
               <a:lnSpc>
-                <a:spcPts val="2070"/>
-              </a:lnSpc>
-              <a:buNone/>
-            </a:pPr>
-            <a:r>
-              <a:rPr lang="zh-CN" altLang="en-US" sz="1800" b="1" dirty="0">
-                <a:solidFill>
-                  <a:srgbClr val="903543"/>
+                <a:spcPts val="2242"/>
+              </a:lnSpc>
+              <a:buNone/>
+            </a:pPr>
+            <a:r>
+              <a:rPr lang="zh-CN" altLang="en-US" sz="1950" b="1" dirty="0">
+                <a:solidFill>
+                  <a:srgbClr val="A24736"/>
                 </a:solidFill>
                 <a:latin typeface="Noto Sans CJK SC" pitchFamily="34" charset="0"/>
                 <a:ea typeface="Noto Sans CJK SC" pitchFamily="34" charset="-122"/>
@@ -2280,7 +2273,7 @@
               </a:rPr>
               <a:t>失败条件</a:t>
             </a:r>
-            <a:endParaRPr lang="zh-CN" sz="1800" dirty="0"/>
+            <a:endParaRPr lang="zh-CN" sz="1950" dirty="0"/>
           </a:p>
         </p:txBody>
       </p:sp>
@@ -2292,8 +2285,8 @@
         </p:nvSpPr>
         <p:spPr>
           <a:xfrm>
-            <a:off x="6896100" y="1828800"/>
-            <a:ext cx="4838700" cy="800100"/>
+            <a:off x="6896100" y="1644872"/>
+            <a:ext cx="4838700" cy="851345"/>
           </a:xfrm>
           <a:prstGeom prst="rect">
             <a:avLst/>
@@ -2307,12 +2300,12 @@
           <a:p>
             <a:pPr algn="l" indent="0" marL="0">
               <a:lnSpc>
-                <a:spcPts val="2139"/>
-              </a:lnSpc>
-              <a:buNone/>
-            </a:pPr>
-            <a:r>
-              <a:rPr lang="zh-CN" altLang="en-US" sz="1725" dirty="0">
+                <a:spcPts val="2232"/>
+              </a:lnSpc>
+              <a:buNone/>
+            </a:pPr>
+            <a:r>
+              <a:rPr lang="zh-CN" altLang="en-US" sz="1800" dirty="0">
                 <a:solidFill>
                   <a:srgbClr val="1C2430"/>
                 </a:solidFill>
@@ -2320,19 +2313,33 @@
                 <a:ea typeface="Noto Sans CJK SC" pitchFamily="34" charset="-122"/>
                 <a:cs typeface="Noto Sans CJK SC" pitchFamily="34" charset="-120"/>
               </a:rPr>
-              <a:t>填写可复现的输入、环境与触发点</a:t>
-            </a:r>
-            <a:endParaRPr lang="zh-CN" sz="1725" dirty="0"/>
-          </a:p>
-          <a:p>
+              <a:t>填写可复现的</a:t>
+            </a:r>
             <a:pPr algn="l" indent="0" marL="0">
               <a:lnSpc>
-                <a:spcPts val="2139"/>
-              </a:lnSpc>
-              <a:buNone/>
-            </a:pPr>
-            <a:r>
-              <a:rPr lang="zh-CN" altLang="en-US" sz="1725" dirty="0">
+                <a:spcPts val="2232"/>
+              </a:lnSpc>
+              <a:buNone/>
+            </a:pPr>
+            <a:r>
+              <a:rPr lang="zh-CN" altLang="en-US" sz="1800" b="1" dirty="0">
+                <a:solidFill>
+                  <a:srgbClr val="A24736"/>
+                </a:solidFill>
+                <a:latin typeface="Noto Sans CJK SC" pitchFamily="34" charset="0"/>
+                <a:ea typeface="Noto Sans CJK SC" pitchFamily="34" charset="-122"/>
+                <a:cs typeface="Noto Sans CJK SC" pitchFamily="34" charset="-120"/>
+              </a:rPr>
+              <a:t>输入</a:t>
+            </a:r>
+            <a:pPr algn="l" indent="0" marL="0">
+              <a:lnSpc>
+                <a:spcPts val="2232"/>
+              </a:lnSpc>
+              <a:buNone/>
+            </a:pPr>
+            <a:r>
+              <a:rPr lang="zh-CN" altLang="en-US" sz="1800" dirty="0">
                 <a:solidFill>
                   <a:srgbClr val="1C2430"/>
                 </a:solidFill>
@@ -2340,9 +2347,29 @@
                 <a:ea typeface="Noto Sans CJK SC" pitchFamily="34" charset="-122"/>
                 <a:cs typeface="Noto Sans CJK SC" pitchFamily="34" charset="-120"/>
               </a:rPr>
+              <a:t>、环境与触发点</a:t>
+            </a:r>
+            <a:endParaRPr lang="zh-CN" sz="1800" dirty="0"/>
+          </a:p>
+          <a:p>
+            <a:pPr algn="l" indent="0" marL="0">
+              <a:lnSpc>
+                <a:spcPts val="2232"/>
+              </a:lnSpc>
+              <a:buNone/>
+            </a:pPr>
+            <a:r>
+              <a:rPr lang="zh-CN" altLang="en-US" sz="1800" dirty="0">
+                <a:solidFill>
+                  <a:srgbClr val="1C2430"/>
+                </a:solidFill>
+                <a:latin typeface="Noto Sans CJK SC" pitchFamily="34" charset="0"/>
+                <a:ea typeface="Noto Sans CJK SC" pitchFamily="34" charset="-122"/>
+                <a:cs typeface="Noto Sans CJK SC" pitchFamily="34" charset="-120"/>
+              </a:rPr>
               <a:t>给出出现失败的任务分母</a:t>
             </a:r>
-            <a:endParaRPr lang="zh-CN" sz="1725" dirty="0"/>
+            <a:endParaRPr lang="zh-CN" sz="1800" dirty="0"/>
           </a:p>
         </p:txBody>
       </p:sp>
@@ -2354,8 +2381,8 @@
         </p:nvSpPr>
         <p:spPr>
           <a:xfrm>
-            <a:off x="6743700" y="3086100"/>
-            <a:ext cx="4991100" cy="1257300"/>
+            <a:off x="6743700" y="2963037"/>
+            <a:ext cx="4991100" cy="1310069"/>
           </a:xfrm>
           <a:prstGeom prst="rect">
             <a:avLst/>
@@ -2379,14 +2406,14 @@
         </p:nvSpPr>
         <p:spPr>
           <a:xfrm>
-            <a:off x="6858000" y="2971800"/>
-            <a:ext cx="2095500" cy="320040"/>
+            <a:off x="6858000" y="2848737"/>
+            <a:ext cx="2247900" cy="342900"/>
           </a:xfrm>
           <a:prstGeom prst="rect">
             <a:avLst/>
           </a:prstGeom>
           <a:solidFill>
-            <a:srgbClr val="173C70"/>
+            <a:srgbClr val="235E96"/>
           </a:solidFill>
           <a:ln w="12700">
             <a:solidFill>
@@ -2406,8 +2433,8 @@
         </p:nvSpPr>
         <p:spPr>
           <a:xfrm>
-            <a:off x="6962775" y="3000375"/>
-            <a:ext cx="1885950" cy="262890"/>
+            <a:off x="6962775" y="2877312"/>
+            <a:ext cx="2038350" cy="285750"/>
           </a:xfrm>
           <a:prstGeom prst="rect">
             <a:avLst/>
@@ -2421,12 +2448,12 @@
           <a:p>
             <a:pPr algn="l" indent="0" marL="0">
               <a:lnSpc>
-                <a:spcPts val="2070"/>
-              </a:lnSpc>
-              <a:buNone/>
-            </a:pPr>
-            <a:r>
-              <a:rPr lang="zh-CN" altLang="en-US" sz="1800" b="1" dirty="0">
+                <a:spcPts val="2242"/>
+              </a:lnSpc>
+              <a:buNone/>
+            </a:pPr>
+            <a:r>
+              <a:rPr lang="zh-CN" altLang="en-US" sz="1950" b="1" dirty="0">
                 <a:solidFill>
                   <a:srgbClr val="FFFFFF"/>
                 </a:solidFill>
@@ -2436,7 +2463,7 @@
               </a:rPr>
               <a:t>错误发生在哪一步</a:t>
             </a:r>
-            <a:endParaRPr lang="zh-CN" sz="1800" dirty="0"/>
+            <a:endParaRPr lang="zh-CN" sz="1950" dirty="0"/>
           </a:p>
         </p:txBody>
       </p:sp>
@@ -2448,8 +2475,8 @@
         </p:nvSpPr>
         <p:spPr>
           <a:xfrm>
-            <a:off x="6877050" y="3434715"/>
-            <a:ext cx="4724400" cy="813435"/>
+            <a:off x="6877050" y="3334512"/>
+            <a:ext cx="4724400" cy="843344"/>
           </a:xfrm>
           <a:prstGeom prst="rect">
             <a:avLst/>
@@ -2463,12 +2490,29 @@
           <a:p>
             <a:pPr algn="l" indent="0" marL="0">
               <a:lnSpc>
-                <a:spcPts val="2139"/>
-              </a:lnSpc>
-              <a:buNone/>
-            </a:pPr>
-            <a:r>
-              <a:rPr lang="zh-CN" altLang="en-US" sz="1725" dirty="0">
+                <a:spcPts val="2232"/>
+              </a:lnSpc>
+              <a:buNone/>
+            </a:pPr>
+            <a:r>
+              <a:rPr lang="zh-CN" altLang="en-US" sz="1800" b="1" dirty="0">
+                <a:solidFill>
+                  <a:srgbClr val="235E96"/>
+                </a:solidFill>
+                <a:latin typeface="Noto Sans CJK SC" pitchFamily="34" charset="0"/>
+                <a:ea typeface="Noto Sans CJK SC" pitchFamily="34" charset="-122"/>
+                <a:cs typeface="Noto Sans CJK SC" pitchFamily="34" charset="-120"/>
+              </a:rPr>
+              <a:t>对照</a:t>
+            </a:r>
+            <a:pPr algn="l" indent="0" marL="0">
+              <a:lnSpc>
+                <a:spcPts val="2232"/>
+              </a:lnSpc>
+              <a:buNone/>
+            </a:pPr>
+            <a:r>
+              <a:rPr lang="zh-CN" altLang="en-US" sz="1800" dirty="0">
                 <a:solidFill>
                   <a:srgbClr val="1C2430"/>
                 </a:solidFill>
@@ -2476,19 +2520,19 @@
                 <a:ea typeface="Noto Sans CJK SC" pitchFamily="34" charset="-122"/>
                 <a:cs typeface="Noto Sans CJK SC" pitchFamily="34" charset="-120"/>
               </a:rPr>
-              <a:t>对照日志定位第一个错误环节</a:t>
-            </a:r>
-            <a:endParaRPr lang="zh-CN" sz="1725" dirty="0"/>
+              <a:t>日志定位第一个错误环节</a:t>
+            </a:r>
+            <a:endParaRPr lang="zh-CN" sz="1800" dirty="0"/>
           </a:p>
           <a:p>
             <a:pPr algn="l" indent="0" marL="0">
               <a:lnSpc>
-                <a:spcPts val="2139"/>
-              </a:lnSpc>
-              <a:buNone/>
-            </a:pPr>
-            <a:r>
-              <a:rPr lang="zh-CN" altLang="en-US" sz="1725" dirty="0">
+                <a:spcPts val="2232"/>
+              </a:lnSpc>
+              <a:buNone/>
+            </a:pPr>
+            <a:r>
+              <a:rPr lang="zh-CN" altLang="en-US" sz="1800" dirty="0">
                 <a:solidFill>
                   <a:srgbClr val="1C2430"/>
                 </a:solidFill>
@@ -2498,7 +2542,7 @@
               </a:rPr>
               <a:t>区分原始错误和后续传播</a:t>
             </a:r>
-            <a:endParaRPr lang="zh-CN" sz="1725" dirty="0"/>
+            <a:endParaRPr lang="zh-CN" sz="1800" dirty="0"/>
           </a:p>
         </p:txBody>
       </p:sp>
@@ -2510,7 +2554,7 @@
         </p:nvSpPr>
         <p:spPr>
           <a:xfrm>
-            <a:off x="6743700" y="4953000"/>
+            <a:off x="6743700" y="4892231"/>
             <a:ext cx="4991100" cy="0"/>
           </a:xfrm>
           <a:prstGeom prst="line">
@@ -2533,7 +2577,7 @@
         </p:nvSpPr>
         <p:spPr>
           <a:xfrm>
-            <a:off x="6743700" y="4953000"/>
+            <a:off x="6743700" y="4892231"/>
             <a:ext cx="342900" cy="0"/>
           </a:xfrm>
           <a:prstGeom prst="line">
@@ -2542,7 +2586,7 @@
           <a:noFill/>
           <a:ln w="17145">
             <a:solidFill>
-              <a:srgbClr val="173C70"/>
+              <a:srgbClr val="146C63"/>
             </a:solidFill>
             <a:prstDash val="solid"/>
           </a:ln>
@@ -2556,7 +2600,7 @@
         </p:nvSpPr>
         <p:spPr>
           <a:xfrm>
-            <a:off x="6743700" y="4610100"/>
+            <a:off x="6743700" y="4549331"/>
             <a:ext cx="4991100" cy="323850"/>
           </a:xfrm>
           <a:prstGeom prst="rect">
@@ -2571,14 +2615,14 @@
           <a:p>
             <a:pPr algn="l" indent="0" marL="0">
               <a:lnSpc>
-                <a:spcPts val="2156"/>
-              </a:lnSpc>
-              <a:buNone/>
-            </a:pPr>
-            <a:r>
-              <a:rPr lang="zh-CN" altLang="en-US" sz="1875" b="1" dirty="0">
-                <a:solidFill>
-                  <a:srgbClr val="173C70"/>
+                <a:spcPts val="2242"/>
+              </a:lnSpc>
+              <a:buNone/>
+            </a:pPr>
+            <a:r>
+              <a:rPr lang="zh-CN" altLang="en-US" sz="1950" b="1" dirty="0">
+                <a:solidFill>
+                  <a:srgbClr val="146C63"/>
                 </a:solidFill>
                 <a:latin typeface="Noto Sans CJK SC" pitchFamily="34" charset="0"/>
                 <a:ea typeface="Noto Sans CJK SC" pitchFamily="34" charset="-122"/>
@@ -2586,7 +2630,7 @@
               </a:rPr>
               <a:t>对结论的影响</a:t>
             </a:r>
-            <a:endParaRPr lang="zh-CN" sz="1875" dirty="0"/>
+            <a:endParaRPr lang="zh-CN" sz="1950" dirty="0"/>
           </a:p>
         </p:txBody>
       </p:sp>
@@ -2598,8 +2642,8 @@
         </p:nvSpPr>
         <p:spPr>
           <a:xfrm>
-            <a:off x="6743700" y="5086350"/>
-            <a:ext cx="4991100" cy="857250"/>
+            <a:off x="6743700" y="5025581"/>
+            <a:ext cx="4991100" cy="910781"/>
           </a:xfrm>
           <a:prstGeom prst="rect">
             <a:avLst/>
@@ -2688,7 +2732,7 @@
                 <a:ea typeface="Noto Sans CJK SC" pitchFamily="34" charset="-122"/>
                 <a:cs typeface="Noto Sans CJK SC" pitchFamily="34" charset="-120"/>
               </a:rPr>
-              <a:t>T1 · 2026 · 待替换</a:t>
+              <a:t>T1 · 2026 · 书目占位；图表均为合成示例</a:t>
             </a:r>
             <a:endParaRPr lang="zh-CN" sz="1125" dirty="0"/>
           </a:p>
@@ -2797,14 +2841,14 @@
       </p:sp>
       <p:sp>
         <p:nvSpPr>
-          <p:cNvPr id="4" name="T38/kicker"/>
-          <p:cNvSpPr/>
-          <p:nvPr/>
-        </p:nvSpPr>
-        <p:spPr>
-          <a:xfrm>
-            <a:off x="457200" y="152400"/>
-            <a:ext cx="11277600" cy="190500"/>
+          <p:cNvPr id="4" name="T38/title"/>
+          <p:cNvSpPr/>
+          <p:nvPr/>
+        </p:nvSpPr>
+        <p:spPr>
+          <a:xfrm>
+            <a:off x="457200" y="209550"/>
+            <a:ext cx="11277600" cy="438150"/>
           </a:xfrm>
           <a:prstGeom prst="rect">
             <a:avLst/>
@@ -2818,83 +2862,64 @@
           <a:p>
             <a:pPr algn="l" indent="0" marL="0">
               <a:lnSpc>
-                <a:spcPts val="1320"/>
-              </a:lnSpc>
-              <a:buNone/>
-            </a:pPr>
-            <a:r>
-              <a:rPr lang="zh-CN" altLang="en-US" sz="1200" dirty="0">
-                <a:solidFill>
-                  <a:srgbClr val="515B68"/>
-                </a:solidFill>
-                <a:latin typeface="Noto Sans CJK SC" pitchFamily="34" charset="0"/>
-                <a:ea typeface="Noto Sans CJK SC" pitchFamily="34" charset="-122"/>
-                <a:cs typeface="Noto Sans CJK SC" pitchFamily="34" charset="-120"/>
-              </a:rPr>
-              <a:t>结构模板 / 占位说明与合成数据</a:t>
-            </a:r>
-            <a:endParaRPr lang="zh-CN" sz="1200" dirty="0"/>
+                <a:spcPts val="3360"/>
+              </a:lnSpc>
+              <a:buNone/>
+            </a:pPr>
+            <a:r>
+              <a:rPr lang="zh-CN" altLang="en-US" sz="3000" b="1" dirty="0">
+                <a:solidFill>
+                  <a:srgbClr val="1C2430"/>
+                </a:solidFill>
+                <a:latin typeface="Noto Sans CJK SC" pitchFamily="34" charset="0"/>
+                <a:ea typeface="Noto Sans CJK SC" pitchFamily="34" charset="-122"/>
+                <a:cs typeface="Noto Sans CJK SC" pitchFamily="34" charset="-120"/>
+              </a:rPr>
+              <a:t>分布变化与迁移边界</a:t>
+            </a:r>
+            <a:endParaRPr lang="zh-CN" sz="3000" dirty="0"/>
           </a:p>
         </p:txBody>
       </p:sp>
       <p:sp>
         <p:nvSpPr>
-          <p:cNvPr id="5" name="T38/title"/>
-          <p:cNvSpPr/>
-          <p:nvPr/>
-        </p:nvSpPr>
-        <p:spPr>
-          <a:xfrm>
-            <a:off x="457200" y="381000"/>
-            <a:ext cx="11277600" cy="400050"/>
-          </a:xfrm>
-          <a:prstGeom prst="rect">
-            <a:avLst/>
-          </a:prstGeom>
-          <a:noFill/>
-          <a:ln/>
-        </p:spPr>
-        <p:txBody>
-          <a:bodyPr wrap="none" lIns="0" tIns="0" rIns="0" bIns="0" rtlCol="0" anchor="t"/>
-          <a:lstStyle/>
-          <a:p>
-            <a:pPr algn="l" indent="0" marL="0">
-              <a:lnSpc>
-                <a:spcPts val="2856"/>
-              </a:lnSpc>
-              <a:buNone/>
-            </a:pPr>
-            <a:r>
-              <a:rPr lang="zh-CN" altLang="en-US" sz="2550" b="1" dirty="0">
-                <a:solidFill>
-                  <a:srgbClr val="1C2430"/>
-                </a:solidFill>
-                <a:latin typeface="Noto Sans CJK SC" pitchFamily="34" charset="0"/>
-                <a:ea typeface="Noto Sans CJK SC" pitchFamily="34" charset="-122"/>
-                <a:cs typeface="Noto Sans CJK SC" pitchFamily="34" charset="-120"/>
-              </a:rPr>
-              <a:t>分布变化与迁移边界</a:t>
-            </a:r>
-            <a:endParaRPr lang="zh-CN" sz="2550" dirty="0"/>
-          </a:p>
-        </p:txBody>
-      </p:sp>
-      <p:sp>
-        <p:nvSpPr>
-          <p:cNvPr id="6" name="T38/header-rule"/>
-          <p:cNvSpPr/>
-          <p:nvPr/>
-        </p:nvSpPr>
-        <p:spPr>
-          <a:xfrm>
-            <a:off x="457200" y="876300"/>
+          <p:cNvPr id="5" name="T38/header-rule"/>
+          <p:cNvSpPr/>
+          <p:nvPr/>
+        </p:nvSpPr>
+        <p:spPr>
+          <a:xfrm>
+            <a:off x="457200" y="752475"/>
             <a:ext cx="11277600" cy="0"/>
           </a:xfrm>
           <a:prstGeom prst="line">
             <a:avLst/>
           </a:prstGeom>
           <a:noFill/>
-          <a:ln w="11430">
+          <a:ln w="10478">
+            <a:solidFill>
+              <a:srgbClr val="BEC8D4"/>
+            </a:solidFill>
+            <a:prstDash val="solid"/>
+          </a:ln>
+        </p:spPr>
+      </p:sp>
+      <p:sp>
+        <p:nvSpPr>
+          <p:cNvPr id="6" name="T38/header-accent"/>
+          <p:cNvSpPr/>
+          <p:nvPr/>
+        </p:nvSpPr>
+        <p:spPr>
+          <a:xfrm>
+            <a:off x="457200" y="752475"/>
+            <a:ext cx="704850" cy="0"/>
+          </a:xfrm>
+          <a:prstGeom prst="line">
+            <a:avLst/>
+          </a:prstGeom>
+          <a:noFill/>
+          <a:ln w="28575">
             <a:solidFill>
               <a:srgbClr val="173C70"/>
             </a:solidFill>
@@ -2909,8 +2934,8 @@
           <p:nvPr/>
         </p:nvGraphicFramePr>
         <p:xfrm>
-          <a:off x="457200" y="1390650"/>
-          <a:ext cx="7448550" cy="3295650"/>
+          <a:off x="457200" y="1206722"/>
+          <a:ext cx="7448550" cy="3422428"/>
         </p:xfrm>
         <a:graphic xmlns:a="http://schemas.openxmlformats.org/drawingml/2006/main">
           <a:graphicData uri="http://schemas.openxmlformats.org/drawingml/2006/chart">
@@ -2926,8 +2951,8 @@
         </p:nvSpPr>
         <p:spPr>
           <a:xfrm>
-            <a:off x="8229600" y="1390650"/>
-            <a:ext cx="3505200" cy="2095500"/>
+            <a:off x="8229600" y="1206722"/>
+            <a:ext cx="3505200" cy="2176082"/>
           </a:xfrm>
           <a:prstGeom prst="rect">
             <a:avLst/>
@@ -2951,14 +2976,14 @@
         </p:nvSpPr>
         <p:spPr>
           <a:xfrm>
-            <a:off x="8239125" y="1400175"/>
+            <a:off x="8239125" y="1216247"/>
             <a:ext cx="3486150" cy="371475"/>
           </a:xfrm>
           <a:prstGeom prst="rect">
             <a:avLst/>
           </a:prstGeom>
           <a:solidFill>
-            <a:srgbClr val="EEF3F8"/>
+            <a:srgbClr val="F0F3F6"/>
           </a:solidFill>
           <a:ln w="12700">
             <a:solidFill>
@@ -2978,7 +3003,7 @@
         </p:nvSpPr>
         <p:spPr>
           <a:xfrm>
-            <a:off x="8229600" y="1771650"/>
+            <a:off x="8229600" y="1587722"/>
             <a:ext cx="3505200" cy="0"/>
           </a:xfrm>
           <a:prstGeom prst="line">
@@ -3001,8 +3026,8 @@
         </p:nvSpPr>
         <p:spPr>
           <a:xfrm>
-            <a:off x="8353425" y="1447800"/>
-            <a:ext cx="3257550" cy="276225"/>
+            <a:off x="8353425" y="1254347"/>
+            <a:ext cx="3257550" cy="295275"/>
           </a:xfrm>
           <a:prstGeom prst="rect">
             <a:avLst/>
@@ -3016,14 +3041,14 @@
           <a:p>
             <a:pPr algn="l" indent="0" marL="0">
               <a:lnSpc>
-                <a:spcPts val="2070"/>
-              </a:lnSpc>
-              <a:buNone/>
-            </a:pPr>
-            <a:r>
-              <a:rPr lang="zh-CN" altLang="en-US" sz="1800" b="1" dirty="0">
-                <a:solidFill>
-                  <a:srgbClr val="173C70"/>
+                <a:spcPts val="2242"/>
+              </a:lnSpc>
+              <a:buNone/>
+            </a:pPr>
+            <a:r>
+              <a:rPr lang="zh-CN" altLang="en-US" sz="1950" b="1" dirty="0">
+                <a:solidFill>
+                  <a:srgbClr val="536A7A"/>
                 </a:solidFill>
                 <a:latin typeface="Noto Sans CJK SC" pitchFamily="34" charset="0"/>
                 <a:ea typeface="Noto Sans CJK SC" pitchFamily="34" charset="-122"/>
@@ -3031,7 +3056,7 @@
               </a:rPr>
               <a:t>输入条件变化</a:t>
             </a:r>
-            <a:endParaRPr lang="zh-CN" sz="1800" dirty="0"/>
+            <a:endParaRPr lang="zh-CN" sz="1950" dirty="0"/>
           </a:p>
         </p:txBody>
       </p:sp>
@@ -3043,8 +3068,8 @@
         </p:nvSpPr>
         <p:spPr>
           <a:xfrm>
-            <a:off x="8362950" y="1885950"/>
-            <a:ext cx="3238500" cy="1504950"/>
+            <a:off x="8362950" y="1692497"/>
+            <a:ext cx="3238500" cy="1595056"/>
           </a:xfrm>
           <a:prstGeom prst="rect">
             <a:avLst/>
@@ -3058,12 +3083,12 @@
           <a:p>
             <a:pPr algn="l" indent="0" marL="0">
               <a:lnSpc>
-                <a:spcPts val="2139"/>
-              </a:lnSpc>
-              <a:buNone/>
-            </a:pPr>
-            <a:r>
-              <a:rPr lang="zh-CN" altLang="en-US" sz="1725" dirty="0">
+                <a:spcPts val="2232"/>
+              </a:lnSpc>
+              <a:buNone/>
+            </a:pPr>
+            <a:r>
+              <a:rPr lang="zh-CN" altLang="en-US" sz="1800" dirty="0">
                 <a:solidFill>
                   <a:srgbClr val="1C2430"/>
                 </a:solidFill>
@@ -3073,17 +3098,17 @@
               </a:rPr>
               <a:t>对齐训练和测试的变量范围</a:t>
             </a:r>
-            <a:endParaRPr lang="zh-CN" sz="1725" dirty="0"/>
+            <a:endParaRPr lang="zh-CN" sz="1800" dirty="0"/>
           </a:p>
           <a:p>
             <a:pPr algn="l" indent="0" marL="0">
               <a:lnSpc>
-                <a:spcPts val="2139"/>
-              </a:lnSpc>
-              <a:buNone/>
-            </a:pPr>
-            <a:r>
-              <a:rPr lang="zh-CN" altLang="en-US" sz="1725" dirty="0">
+                <a:spcPts val="2232"/>
+              </a:lnSpc>
+              <a:buNone/>
+            </a:pPr>
+            <a:r>
+              <a:rPr lang="zh-CN" altLang="en-US" sz="1800" dirty="0">
                 <a:solidFill>
                   <a:srgbClr val="1C2430"/>
                 </a:solidFill>
@@ -3093,7 +3118,7 @@
               </a:rPr>
               <a:t>用同一尺度表示发生变化的条件</a:t>
             </a:r>
-            <a:endParaRPr lang="zh-CN" sz="1725" dirty="0"/>
+            <a:endParaRPr lang="zh-CN" sz="1800" dirty="0"/>
           </a:p>
         </p:txBody>
       </p:sp>
@@ -3105,8 +3130,8 @@
         </p:nvSpPr>
         <p:spPr>
           <a:xfrm>
-            <a:off x="8229600" y="3829050"/>
-            <a:ext cx="3505200" cy="2171700"/>
+            <a:off x="8229600" y="3734562"/>
+            <a:ext cx="3505200" cy="2259616"/>
           </a:xfrm>
           <a:prstGeom prst="rect">
             <a:avLst/>
@@ -3130,14 +3155,14 @@
         </p:nvSpPr>
         <p:spPr>
           <a:xfrm>
-            <a:off x="8343900" y="3714750"/>
-            <a:ext cx="1181100" cy="320040"/>
+            <a:off x="8343900" y="3620262"/>
+            <a:ext cx="1257300" cy="342900"/>
           </a:xfrm>
           <a:prstGeom prst="rect">
             <a:avLst/>
           </a:prstGeom>
           <a:solidFill>
-            <a:srgbClr val="173C70"/>
+            <a:srgbClr val="235E96"/>
           </a:solidFill>
           <a:ln w="12700">
             <a:solidFill>
@@ -3157,8 +3182,8 @@
         </p:nvSpPr>
         <p:spPr>
           <a:xfrm>
-            <a:off x="8448675" y="3743325"/>
-            <a:ext cx="971550" cy="262890"/>
+            <a:off x="8448675" y="3648837"/>
+            <a:ext cx="1047750" cy="285750"/>
           </a:xfrm>
           <a:prstGeom prst="rect">
             <a:avLst/>
@@ -3172,12 +3197,12 @@
           <a:p>
             <a:pPr algn="l" indent="0" marL="0">
               <a:lnSpc>
-                <a:spcPts val="2070"/>
-              </a:lnSpc>
-              <a:buNone/>
-            </a:pPr>
-            <a:r>
-              <a:rPr lang="zh-CN" altLang="en-US" sz="1800" b="1" dirty="0">
+                <a:spcPts val="2242"/>
+              </a:lnSpc>
+              <a:buNone/>
+            </a:pPr>
+            <a:r>
+              <a:rPr lang="zh-CN" altLang="en-US" sz="1950" b="1" dirty="0">
                 <a:solidFill>
                   <a:srgbClr val="FFFFFF"/>
                 </a:solidFill>
@@ -3187,7 +3212,7 @@
               </a:rPr>
               <a:t>机制失配</a:t>
             </a:r>
-            <a:endParaRPr lang="zh-CN" sz="1800" dirty="0"/>
+            <a:endParaRPr lang="zh-CN" sz="1950" dirty="0"/>
           </a:p>
         </p:txBody>
       </p:sp>
@@ -3199,8 +3224,8 @@
         </p:nvSpPr>
         <p:spPr>
           <a:xfrm>
-            <a:off x="8362950" y="4177665"/>
-            <a:ext cx="3238500" cy="1727835"/>
+            <a:off x="8362950" y="4106037"/>
+            <a:ext cx="3238500" cy="1792891"/>
           </a:xfrm>
           <a:prstGeom prst="rect">
             <a:avLst/>
@@ -3214,12 +3239,12 @@
           <a:p>
             <a:pPr algn="l" indent="0" marL="0">
               <a:lnSpc>
-                <a:spcPts val="2139"/>
-              </a:lnSpc>
-              <a:buNone/>
-            </a:pPr>
-            <a:r>
-              <a:rPr lang="zh-CN" altLang="en-US" sz="1725" dirty="0">
+                <a:spcPts val="2232"/>
+              </a:lnSpc>
+              <a:buNone/>
+            </a:pPr>
+            <a:r>
+              <a:rPr lang="zh-CN" altLang="en-US" sz="1800" dirty="0">
                 <a:solidFill>
                   <a:srgbClr val="1C2430"/>
                 </a:solidFill>
@@ -3229,17 +3254,17 @@
               </a:rPr>
               <a:t>指出原有假设在哪个环境失效</a:t>
             </a:r>
-            <a:endParaRPr lang="zh-CN" sz="1725" dirty="0"/>
+            <a:endParaRPr lang="zh-CN" sz="1800" dirty="0"/>
           </a:p>
           <a:p>
             <a:pPr algn="l" indent="0" marL="0">
               <a:lnSpc>
-                <a:spcPts val="2139"/>
-              </a:lnSpc>
-              <a:buNone/>
-            </a:pPr>
-            <a:r>
-              <a:rPr lang="zh-CN" altLang="en-US" sz="1725" dirty="0">
+                <a:spcPts val="2232"/>
+              </a:lnSpc>
+              <a:buNone/>
+            </a:pPr>
+            <a:r>
+              <a:rPr lang="zh-CN" altLang="en-US" sz="1800" dirty="0">
                 <a:solidFill>
                   <a:srgbClr val="1C2430"/>
                 </a:solidFill>
@@ -3249,17 +3274,17 @@
               </a:rPr>
               <a:t>检查模型、工具与执行约束的变</a:t>
             </a:r>
-            <a:endParaRPr lang="zh-CN" sz="1725" dirty="0"/>
+            <a:endParaRPr lang="zh-CN" sz="1800" dirty="0"/>
           </a:p>
           <a:p>
             <a:pPr algn="l" indent="0" marL="0">
               <a:lnSpc>
-                <a:spcPts val="2139"/>
-              </a:lnSpc>
-              <a:buNone/>
-            </a:pPr>
-            <a:r>
-              <a:rPr lang="zh-CN" altLang="en-US" sz="1725" dirty="0">
+                <a:spcPts val="2232"/>
+              </a:lnSpc>
+              <a:buNone/>
+            </a:pPr>
+            <a:r>
+              <a:rPr lang="zh-CN" altLang="en-US" sz="1800" dirty="0">
                 <a:solidFill>
                   <a:srgbClr val="1C2430"/>
                 </a:solidFill>
@@ -3269,7 +3294,7 @@
               </a:rPr>
               <a:t>化</a:t>
             </a:r>
-            <a:endParaRPr lang="zh-CN" sz="1725" dirty="0"/>
+            <a:endParaRPr lang="zh-CN" sz="1800" dirty="0"/>
           </a:p>
         </p:txBody>
       </p:sp>
@@ -3281,7 +3306,7 @@
         </p:nvSpPr>
         <p:spPr>
           <a:xfrm>
-            <a:off x="457200" y="5010150"/>
+            <a:off x="457200" y="4964716"/>
             <a:ext cx="7448550" cy="323850"/>
           </a:xfrm>
           <a:prstGeom prst="rect">
@@ -3296,22 +3321,22 @@
           <a:p>
             <a:pPr algn="l" indent="0" marL="0">
               <a:lnSpc>
-                <a:spcPts val="2156"/>
-              </a:lnSpc>
-              <a:buNone/>
-            </a:pPr>
-            <a:r>
-              <a:rPr lang="zh-CN" altLang="en-US" sz="1875" b="1" dirty="0">
-                <a:solidFill>
-                  <a:srgbClr val="173C70"/>
-                </a:solidFill>
-                <a:latin typeface="Noto Sans CJK SC" pitchFamily="34" charset="0"/>
-                <a:ea typeface="Noto Sans CJK SC" pitchFamily="34" charset="-122"/>
-                <a:cs typeface="Noto Sans CJK SC" pitchFamily="34" charset="-120"/>
-              </a:rPr>
-              <a:t>可支持的迁移结论</a:t>
-            </a:r>
-            <a:endParaRPr lang="zh-CN" sz="1875" dirty="0"/>
+                <a:spcPts val="2242"/>
+              </a:lnSpc>
+              <a:buNone/>
+            </a:pPr>
+            <a:r>
+              <a:rPr lang="zh-CN" altLang="en-US" sz="1950" b="1" dirty="0">
+                <a:solidFill>
+                  <a:srgbClr val="146C63"/>
+                </a:solidFill>
+                <a:latin typeface="Noto Sans CJK SC" pitchFamily="34" charset="0"/>
+                <a:ea typeface="Noto Sans CJK SC" pitchFamily="34" charset="-122"/>
+                <a:cs typeface="Noto Sans CJK SC" pitchFamily="34" charset="-120"/>
+              </a:rPr>
+              <a:t>迁移结论</a:t>
+            </a:r>
+            <a:endParaRPr lang="zh-CN" sz="1950" dirty="0"/>
           </a:p>
         </p:txBody>
       </p:sp>
@@ -3323,8 +3348,8 @@
         </p:nvSpPr>
         <p:spPr>
           <a:xfrm>
-            <a:off x="457200" y="5391150"/>
-            <a:ext cx="7448550" cy="590550"/>
+            <a:off x="457200" y="5345716"/>
+            <a:ext cx="7448550" cy="630079"/>
           </a:xfrm>
           <a:prstGeom prst="rect">
             <a:avLst/>
@@ -3338,12 +3363,12 @@
           <a:p>
             <a:pPr algn="l" indent="0" marL="0">
               <a:lnSpc>
-                <a:spcPts val="2139"/>
-              </a:lnSpc>
-              <a:buNone/>
-            </a:pPr>
-            <a:r>
-              <a:rPr lang="zh-CN" altLang="en-US" sz="1725" dirty="0">
+                <a:spcPts val="2232"/>
+              </a:lnSpc>
+              <a:buNone/>
+            </a:pPr>
+            <a:r>
+              <a:rPr lang="zh-CN" altLang="en-US" sz="1800" dirty="0">
                 <a:solidFill>
                   <a:srgbClr val="1C2430"/>
                 </a:solidFill>
@@ -3353,17 +3378,17 @@
               </a:rPr>
               <a:t>结论限定在已测试的条件变化内</a:t>
             </a:r>
-            <a:endParaRPr lang="zh-CN" sz="1725" dirty="0"/>
+            <a:endParaRPr lang="zh-CN" sz="1800" dirty="0"/>
           </a:p>
           <a:p>
             <a:pPr algn="l" indent="0" marL="0">
               <a:lnSpc>
-                <a:spcPts val="2139"/>
-              </a:lnSpc>
-              <a:buNone/>
-            </a:pPr>
-            <a:r>
-              <a:rPr lang="zh-CN" altLang="en-US" sz="1725" dirty="0">
+                <a:spcPts val="2232"/>
+              </a:lnSpc>
+              <a:buNone/>
+            </a:pPr>
+            <a:r>
+              <a:rPr lang="zh-CN" altLang="en-US" sz="1800" dirty="0">
                 <a:solidFill>
                   <a:srgbClr val="1C2430"/>
                 </a:solidFill>
@@ -3373,7 +3398,7 @@
               </a:rPr>
               <a:t>独立报告未覆盖环境</a:t>
             </a:r>
-            <a:endParaRPr lang="zh-CN" sz="1725" dirty="0"/>
+            <a:endParaRPr lang="zh-CN" sz="1800" dirty="0"/>
           </a:p>
         </p:txBody>
       </p:sp>
@@ -3413,7 +3438,7 @@
                 <a:ea typeface="Noto Sans CJK SC" pitchFamily="34" charset="-122"/>
                 <a:cs typeface="Noto Sans CJK SC" pitchFamily="34" charset="-120"/>
               </a:rPr>
-              <a:t>T1 · 2026 · 待替换</a:t>
+              <a:t>T1 · 2026 · 书目占位；图表均为合成示例</a:t>
             </a:r>
             <a:endParaRPr lang="zh-CN" sz="1125" dirty="0"/>
           </a:p>
@@ -3522,14 +3547,14 @@
       </p:sp>
       <p:sp>
         <p:nvSpPr>
-          <p:cNvPr id="4" name="T39/kicker"/>
-          <p:cNvSpPr/>
-          <p:nvPr/>
-        </p:nvSpPr>
-        <p:spPr>
-          <a:xfrm>
-            <a:off x="457200" y="152400"/>
-            <a:ext cx="11277600" cy="190500"/>
+          <p:cNvPr id="4" name="T39/title"/>
+          <p:cNvSpPr/>
+          <p:nvPr/>
+        </p:nvSpPr>
+        <p:spPr>
+          <a:xfrm>
+            <a:off x="457200" y="209550"/>
+            <a:ext cx="11277600" cy="438150"/>
           </a:xfrm>
           <a:prstGeom prst="rect">
             <a:avLst/>
@@ -3543,35 +3568,201 @@
           <a:p>
             <a:pPr algn="l" indent="0" marL="0">
               <a:lnSpc>
-                <a:spcPts val="1320"/>
-              </a:lnSpc>
-              <a:buNone/>
-            </a:pPr>
-            <a:r>
-              <a:rPr lang="zh-CN" altLang="en-US" sz="1200" dirty="0">
-                <a:solidFill>
-                  <a:srgbClr val="515B68"/>
-                </a:solidFill>
-                <a:latin typeface="Noto Sans CJK SC" pitchFamily="34" charset="0"/>
-                <a:ea typeface="Noto Sans CJK SC" pitchFamily="34" charset="-122"/>
-                <a:cs typeface="Noto Sans CJK SC" pitchFamily="34" charset="-120"/>
-              </a:rPr>
-              <a:t>结构模板 / 占位说明与合成数据</a:t>
-            </a:r>
-            <a:endParaRPr lang="zh-CN" sz="1200" dirty="0"/>
+                <a:spcPts val="3360"/>
+              </a:lnSpc>
+              <a:buNone/>
+            </a:pPr>
+            <a:r>
+              <a:rPr lang="zh-CN" altLang="en-US" sz="3000" b="1" dirty="0">
+                <a:solidFill>
+                  <a:srgbClr val="1C2430"/>
+                </a:solidFill>
+                <a:latin typeface="Noto Sans CJK SC" pitchFamily="34" charset="0"/>
+                <a:ea typeface="Noto Sans CJK SC" pitchFamily="34" charset="-122"/>
+                <a:cs typeface="Noto Sans CJK SC" pitchFamily="34" charset="-120"/>
+              </a:rPr>
+              <a:t>测量偏倚与替代解释</a:t>
+            </a:r>
+            <a:endParaRPr lang="zh-CN" sz="3000" dirty="0"/>
           </a:p>
         </p:txBody>
       </p:sp>
       <p:sp>
         <p:nvSpPr>
-          <p:cNvPr id="5" name="T39/title"/>
-          <p:cNvSpPr/>
-          <p:nvPr/>
-        </p:nvSpPr>
-        <p:spPr>
-          <a:xfrm>
-            <a:off x="457200" y="381000"/>
-            <a:ext cx="11277600" cy="400050"/>
+          <p:cNvPr id="5" name="T39/header-rule"/>
+          <p:cNvSpPr/>
+          <p:nvPr/>
+        </p:nvSpPr>
+        <p:spPr>
+          <a:xfrm>
+            <a:off x="457200" y="752475"/>
+            <a:ext cx="11277600" cy="0"/>
+          </a:xfrm>
+          <a:prstGeom prst="line">
+            <a:avLst/>
+          </a:prstGeom>
+          <a:noFill/>
+          <a:ln w="10478">
+            <a:solidFill>
+              <a:srgbClr val="BEC8D4"/>
+            </a:solidFill>
+            <a:prstDash val="solid"/>
+          </a:ln>
+        </p:spPr>
+      </p:sp>
+      <p:sp>
+        <p:nvSpPr>
+          <p:cNvPr id="6" name="T39/header-accent"/>
+          <p:cNvSpPr/>
+          <p:nvPr/>
+        </p:nvSpPr>
+        <p:spPr>
+          <a:xfrm>
+            <a:off x="457200" y="752475"/>
+            <a:ext cx="704850" cy="0"/>
+          </a:xfrm>
+          <a:prstGeom prst="line">
+            <a:avLst/>
+          </a:prstGeom>
+          <a:noFill/>
+          <a:ln w="28575">
+            <a:solidFill>
+              <a:srgbClr val="173C70"/>
+            </a:solidFill>
+            <a:prstDash val="solid"/>
+          </a:ln>
+        </p:spPr>
+      </p:sp>
+      <p:sp>
+        <p:nvSpPr>
+          <p:cNvPr id="7" name="T39/edge:0"/>
+          <p:cNvSpPr/>
+          <p:nvPr/>
+        </p:nvSpPr>
+        <p:spPr>
+          <a:xfrm>
+            <a:off x="2819400" y="2017871"/>
+            <a:ext cx="628650" cy="0"/>
+          </a:xfrm>
+          <a:prstGeom prst="line">
+            <a:avLst/>
+          </a:prstGeom>
+          <a:noFill/>
+          <a:ln w="15240">
+            <a:solidFill>
+              <a:srgbClr val="355D88"/>
+            </a:solidFill>
+            <a:prstDash val="solid"/>
+            <a:tailEnd type="triangle"/>
+          </a:ln>
+        </p:spPr>
+      </p:sp>
+      <p:sp>
+        <p:nvSpPr>
+          <p:cNvPr id="8" name="T39/edge:1"/>
+          <p:cNvSpPr/>
+          <p:nvPr/>
+        </p:nvSpPr>
+        <p:spPr>
+          <a:xfrm>
+            <a:off x="5810250" y="2017871"/>
+            <a:ext cx="628650" cy="0"/>
+          </a:xfrm>
+          <a:prstGeom prst="line">
+            <a:avLst/>
+          </a:prstGeom>
+          <a:noFill/>
+          <a:ln w="15240">
+            <a:solidFill>
+              <a:srgbClr val="355D88"/>
+            </a:solidFill>
+            <a:prstDash val="solid"/>
+            <a:tailEnd type="triangle"/>
+          </a:ln>
+        </p:spPr>
+      </p:sp>
+      <p:sp>
+        <p:nvSpPr>
+          <p:cNvPr id="9" name="T39/edge:2"/>
+          <p:cNvSpPr/>
+          <p:nvPr/>
+        </p:nvSpPr>
+        <p:spPr>
+          <a:xfrm>
+            <a:off x="8801100" y="2017871"/>
+            <a:ext cx="628650" cy="0"/>
+          </a:xfrm>
+          <a:prstGeom prst="line">
+            <a:avLst/>
+          </a:prstGeom>
+          <a:noFill/>
+          <a:ln w="15240">
+            <a:solidFill>
+              <a:srgbClr val="355D88"/>
+            </a:solidFill>
+            <a:prstDash val="solid"/>
+            <a:tailEnd type="triangle"/>
+          </a:ln>
+        </p:spPr>
+      </p:sp>
+      <p:sp>
+        <p:nvSpPr>
+          <p:cNvPr id="10" name="T39/node:step-1:frame"/>
+          <p:cNvSpPr/>
+          <p:nvPr/>
+        </p:nvSpPr>
+        <p:spPr>
+          <a:xfrm>
+            <a:off x="457200" y="1365028"/>
+            <a:ext cx="2362200" cy="1305687"/>
+          </a:xfrm>
+          <a:prstGeom prst="rect">
+            <a:avLst/>
+          </a:prstGeom>
+          <a:solidFill>
+            <a:srgbClr val="EAF2FA"/>
+          </a:solidFill>
+          <a:ln w="11430">
+            <a:solidFill>
+              <a:srgbClr val="BEC8D4"/>
+            </a:solidFill>
+            <a:prstDash val="solid"/>
+          </a:ln>
+        </p:spPr>
+      </p:sp>
+      <p:sp>
+        <p:nvSpPr>
+          <p:cNvPr id="11" name="T39/node:step-1:heading-rule"/>
+          <p:cNvSpPr/>
+          <p:nvPr/>
+        </p:nvSpPr>
+        <p:spPr>
+          <a:xfrm>
+            <a:off x="457200" y="1365028"/>
+            <a:ext cx="2362200" cy="0"/>
+          </a:xfrm>
+          <a:prstGeom prst="line">
+            <a:avLst/>
+          </a:prstGeom>
+          <a:noFill/>
+          <a:ln w="19050">
+            <a:solidFill>
+              <a:srgbClr val="235E96"/>
+            </a:solidFill>
+            <a:prstDash val="solid"/>
+          </a:ln>
+        </p:spPr>
+      </p:sp>
+      <p:sp>
+        <p:nvSpPr>
+          <p:cNvPr id="12" name="T39/node:step-1:label"/>
+          <p:cNvSpPr/>
+          <p:nvPr/>
+        </p:nvSpPr>
+        <p:spPr>
+          <a:xfrm>
+            <a:off x="571500" y="1460278"/>
+            <a:ext cx="2133600" cy="266700"/>
           </a:xfrm>
           <a:prstGeom prst="rect">
             <a:avLst/>
@@ -3583,180 +3774,37 @@
           <a:bodyPr wrap="none" lIns="0" tIns="0" rIns="0" bIns="0" rtlCol="0" anchor="t"/>
           <a:lstStyle/>
           <a:p>
-            <a:pPr algn="l" indent="0" marL="0">
-              <a:lnSpc>
-                <a:spcPts val="2856"/>
-              </a:lnSpc>
-              <a:buNone/>
-            </a:pPr>
-            <a:r>
-              <a:rPr lang="zh-CN" altLang="en-US" sz="2550" b="1" dirty="0">
-                <a:solidFill>
-                  <a:srgbClr val="1C2430"/>
-                </a:solidFill>
-                <a:latin typeface="Noto Sans CJK SC" pitchFamily="34" charset="0"/>
-                <a:ea typeface="Noto Sans CJK SC" pitchFamily="34" charset="-122"/>
-                <a:cs typeface="Noto Sans CJK SC" pitchFamily="34" charset="-120"/>
-              </a:rPr>
-              <a:t>测量偏倚与替代解释</a:t>
-            </a:r>
-            <a:endParaRPr lang="zh-CN" sz="2550" dirty="0"/>
+            <a:pPr algn="ctr" indent="0" marL="0">
+              <a:lnSpc>
+                <a:spcPts val="2088"/>
+              </a:lnSpc>
+              <a:buNone/>
+            </a:pPr>
+            <a:r>
+              <a:rPr lang="zh-CN" altLang="en-US" sz="1800" b="1" dirty="0">
+                <a:solidFill>
+                  <a:srgbClr val="235E96"/>
+                </a:solidFill>
+                <a:latin typeface="Noto Sans CJK SC" pitchFamily="34" charset="0"/>
+                <a:ea typeface="Noto Sans CJK SC" pitchFamily="34" charset="-122"/>
+                <a:cs typeface="Noto Sans CJK SC" pitchFamily="34" charset="-120"/>
+              </a:rPr>
+              <a:t>真实状态</a:t>
+            </a:r>
+            <a:endParaRPr lang="zh-CN" sz="1800" dirty="0"/>
           </a:p>
         </p:txBody>
       </p:sp>
       <p:sp>
         <p:nvSpPr>
-          <p:cNvPr id="6" name="T39/header-rule"/>
-          <p:cNvSpPr/>
-          <p:nvPr/>
-        </p:nvSpPr>
-        <p:spPr>
-          <a:xfrm>
-            <a:off x="457200" y="876300"/>
-            <a:ext cx="11277600" cy="0"/>
-          </a:xfrm>
-          <a:prstGeom prst="line">
-            <a:avLst/>
-          </a:prstGeom>
-          <a:noFill/>
-          <a:ln w="11430">
-            <a:solidFill>
-              <a:srgbClr val="173C70"/>
-            </a:solidFill>
-            <a:prstDash val="solid"/>
-          </a:ln>
-        </p:spPr>
-      </p:sp>
-      <p:sp>
-        <p:nvSpPr>
-          <p:cNvPr id="7" name="T39/edge:0"/>
-          <p:cNvSpPr/>
-          <p:nvPr/>
-        </p:nvSpPr>
-        <p:spPr>
-          <a:xfrm>
-            <a:off x="2819400" y="2171700"/>
-            <a:ext cx="628650" cy="0"/>
-          </a:xfrm>
-          <a:prstGeom prst="line">
-            <a:avLst/>
-          </a:prstGeom>
-          <a:noFill/>
-          <a:ln w="15240">
-            <a:solidFill>
-              <a:srgbClr val="355D88"/>
-            </a:solidFill>
-            <a:prstDash val="solid"/>
-            <a:tailEnd type="triangle"/>
-          </a:ln>
-        </p:spPr>
-      </p:sp>
-      <p:sp>
-        <p:nvSpPr>
-          <p:cNvPr id="8" name="T39/edge:1"/>
-          <p:cNvSpPr/>
-          <p:nvPr/>
-        </p:nvSpPr>
-        <p:spPr>
-          <a:xfrm>
-            <a:off x="5810250" y="2171700"/>
-            <a:ext cx="628650" cy="0"/>
-          </a:xfrm>
-          <a:prstGeom prst="line">
-            <a:avLst/>
-          </a:prstGeom>
-          <a:noFill/>
-          <a:ln w="15240">
-            <a:solidFill>
-              <a:srgbClr val="355D88"/>
-            </a:solidFill>
-            <a:prstDash val="solid"/>
-            <a:tailEnd type="triangle"/>
-          </a:ln>
-        </p:spPr>
-      </p:sp>
-      <p:sp>
-        <p:nvSpPr>
-          <p:cNvPr id="9" name="T39/edge:2"/>
-          <p:cNvSpPr/>
-          <p:nvPr/>
-        </p:nvSpPr>
-        <p:spPr>
-          <a:xfrm>
-            <a:off x="8801100" y="2171700"/>
-            <a:ext cx="628650" cy="0"/>
-          </a:xfrm>
-          <a:prstGeom prst="line">
-            <a:avLst/>
-          </a:prstGeom>
-          <a:noFill/>
-          <a:ln w="15240">
-            <a:solidFill>
-              <a:srgbClr val="355D88"/>
-            </a:solidFill>
-            <a:prstDash val="solid"/>
-            <a:tailEnd type="triangle"/>
-          </a:ln>
-        </p:spPr>
-      </p:sp>
-      <p:sp>
-        <p:nvSpPr>
-          <p:cNvPr id="10" name="T39/node:step-1:frame"/>
-          <p:cNvSpPr/>
-          <p:nvPr/>
-        </p:nvSpPr>
-        <p:spPr>
-          <a:xfrm>
-            <a:off x="457200" y="1543050"/>
-            <a:ext cx="2362200" cy="1257300"/>
-          </a:xfrm>
-          <a:prstGeom prst="rect">
-            <a:avLst/>
-          </a:prstGeom>
-          <a:solidFill>
-            <a:srgbClr val="FFFFFF"/>
-          </a:solidFill>
-          <a:ln w="11430">
-            <a:solidFill>
-              <a:srgbClr val="BEC8D4"/>
-            </a:solidFill>
-            <a:prstDash val="solid"/>
-          </a:ln>
-        </p:spPr>
-      </p:sp>
-      <p:sp>
-        <p:nvSpPr>
-          <p:cNvPr id="11" name="T39/node:step-1:heading-rule"/>
-          <p:cNvSpPr/>
-          <p:nvPr/>
-        </p:nvSpPr>
-        <p:spPr>
-          <a:xfrm>
-            <a:off x="457200" y="1543050"/>
-            <a:ext cx="2362200" cy="0"/>
-          </a:xfrm>
-          <a:prstGeom prst="line">
-            <a:avLst/>
-          </a:prstGeom>
-          <a:noFill/>
-          <a:ln w="19050">
-            <a:solidFill>
-              <a:srgbClr val="173C70"/>
-            </a:solidFill>
-            <a:prstDash val="solid"/>
-          </a:ln>
-        </p:spPr>
-      </p:sp>
-      <p:sp>
-        <p:nvSpPr>
-          <p:cNvPr id="12" name="T39/node:step-1:label"/>
-          <p:cNvSpPr/>
-          <p:nvPr/>
-        </p:nvSpPr>
-        <p:spPr>
-          <a:xfrm>
-            <a:off x="571500" y="1638300"/>
-            <a:ext cx="2133600" cy="266700"/>
+          <p:cNvPr id="13" name="T39/node:step-1:detail"/>
+          <p:cNvSpPr/>
+          <p:nvPr/>
+        </p:nvSpPr>
+        <p:spPr>
+          <a:xfrm>
+            <a:off x="571500" y="1774603"/>
+            <a:ext cx="2133600" cy="810387"/>
           </a:xfrm>
           <a:prstGeom prst="rect">
             <a:avLst/>
@@ -3770,35 +3818,83 @@
           <a:p>
             <a:pPr algn="ctr" indent="0" marL="0">
               <a:lnSpc>
-                <a:spcPts val="2088"/>
-              </a:lnSpc>
-              <a:buNone/>
-            </a:pPr>
-            <a:r>
-              <a:rPr lang="zh-CN" altLang="en-US" sz="1800" b="1" dirty="0">
-                <a:solidFill>
-                  <a:srgbClr val="173C70"/>
-                </a:solidFill>
-                <a:latin typeface="Noto Sans CJK SC" pitchFamily="34" charset="0"/>
-                <a:ea typeface="Noto Sans CJK SC" pitchFamily="34" charset="-122"/>
-                <a:cs typeface="Noto Sans CJK SC" pitchFamily="34" charset="-120"/>
-              </a:rPr>
-              <a:t>真实状态</a:t>
-            </a:r>
-            <a:endParaRPr lang="zh-CN" sz="1800" dirty="0"/>
+                <a:spcPts val="1947"/>
+              </a:lnSpc>
+              <a:buNone/>
+            </a:pPr>
+            <a:r>
+              <a:rPr lang="zh-CN" altLang="en-US" sz="1650" dirty="0">
+                <a:solidFill>
+                  <a:srgbClr val="1C2430"/>
+                </a:solidFill>
+                <a:latin typeface="Noto Sans CJK SC" pitchFamily="34" charset="0"/>
+                <a:ea typeface="Noto Sans CJK SC" pitchFamily="34" charset="-122"/>
+                <a:cs typeface="Noto Sans CJK SC" pitchFamily="34" charset="-120"/>
+              </a:rPr>
+              <a:t>目标估计对象</a:t>
+            </a:r>
+            <a:endParaRPr lang="zh-CN" sz="1650" dirty="0"/>
           </a:p>
         </p:txBody>
       </p:sp>
       <p:sp>
         <p:nvSpPr>
-          <p:cNvPr id="13" name="T39/node:step-1:detail"/>
-          <p:cNvSpPr/>
-          <p:nvPr/>
-        </p:nvSpPr>
-        <p:spPr>
-          <a:xfrm>
-            <a:off x="571500" y="1952625"/>
-            <a:ext cx="2133600" cy="762000"/>
+          <p:cNvPr id="14" name="T39/node:step-2:frame"/>
+          <p:cNvSpPr/>
+          <p:nvPr/>
+        </p:nvSpPr>
+        <p:spPr>
+          <a:xfrm>
+            <a:off x="3448050" y="1365028"/>
+            <a:ext cx="2362200" cy="1305687"/>
+          </a:xfrm>
+          <a:prstGeom prst="rect">
+            <a:avLst/>
+          </a:prstGeom>
+          <a:solidFill>
+            <a:srgbClr val="EAF2FA"/>
+          </a:solidFill>
+          <a:ln w="11430">
+            <a:solidFill>
+              <a:srgbClr val="BEC8D4"/>
+            </a:solidFill>
+            <a:prstDash val="solid"/>
+          </a:ln>
+        </p:spPr>
+      </p:sp>
+      <p:sp>
+        <p:nvSpPr>
+          <p:cNvPr id="15" name="T39/node:step-2:heading-rule"/>
+          <p:cNvSpPr/>
+          <p:nvPr/>
+        </p:nvSpPr>
+        <p:spPr>
+          <a:xfrm>
+            <a:off x="3448050" y="1365028"/>
+            <a:ext cx="2362200" cy="0"/>
+          </a:xfrm>
+          <a:prstGeom prst="line">
+            <a:avLst/>
+          </a:prstGeom>
+          <a:noFill/>
+          <a:ln w="19050">
+            <a:solidFill>
+              <a:srgbClr val="235E96"/>
+            </a:solidFill>
+            <a:prstDash val="solid"/>
+          </a:ln>
+        </p:spPr>
+      </p:sp>
+      <p:sp>
+        <p:nvSpPr>
+          <p:cNvPr id="16" name="T39/node:step-2:label"/>
+          <p:cNvSpPr/>
+          <p:nvPr/>
+        </p:nvSpPr>
+        <p:spPr>
+          <a:xfrm>
+            <a:off x="3562350" y="1460278"/>
+            <a:ext cx="2133600" cy="266700"/>
           </a:xfrm>
           <a:prstGeom prst="rect">
             <a:avLst/>
@@ -3812,83 +3908,35 @@
           <a:p>
             <a:pPr algn="ctr" indent="0" marL="0">
               <a:lnSpc>
-                <a:spcPts val="1947"/>
-              </a:lnSpc>
-              <a:buNone/>
-            </a:pPr>
-            <a:r>
-              <a:rPr lang="zh-CN" altLang="en-US" sz="1650" dirty="0">
-                <a:solidFill>
-                  <a:srgbClr val="1C2430"/>
-                </a:solidFill>
-                <a:latin typeface="Noto Sans CJK SC" pitchFamily="34" charset="0"/>
-                <a:ea typeface="Noto Sans CJK SC" pitchFamily="34" charset="-122"/>
-                <a:cs typeface="Noto Sans CJK SC" pitchFamily="34" charset="-120"/>
-              </a:rPr>
-              <a:t>填写接口与条件</a:t>
-            </a:r>
-            <a:endParaRPr lang="zh-CN" sz="1650" dirty="0"/>
+                <a:spcPts val="2088"/>
+              </a:lnSpc>
+              <a:buNone/>
+            </a:pPr>
+            <a:r>
+              <a:rPr lang="zh-CN" altLang="en-US" sz="1800" b="1" dirty="0">
+                <a:solidFill>
+                  <a:srgbClr val="235E96"/>
+                </a:solidFill>
+                <a:latin typeface="Noto Sans CJK SC" pitchFamily="34" charset="0"/>
+                <a:ea typeface="Noto Sans CJK SC" pitchFamily="34" charset="-122"/>
+                <a:cs typeface="Noto Sans CJK SC" pitchFamily="34" charset="-120"/>
+              </a:rPr>
+              <a:t>测量与选择</a:t>
+            </a:r>
+            <a:endParaRPr lang="zh-CN" sz="1800" dirty="0"/>
           </a:p>
         </p:txBody>
       </p:sp>
       <p:sp>
         <p:nvSpPr>
-          <p:cNvPr id="14" name="T39/node:step-2:frame"/>
-          <p:cNvSpPr/>
-          <p:nvPr/>
-        </p:nvSpPr>
-        <p:spPr>
-          <a:xfrm>
-            <a:off x="3448050" y="1543050"/>
-            <a:ext cx="2362200" cy="1257300"/>
-          </a:xfrm>
-          <a:prstGeom prst="rect">
-            <a:avLst/>
-          </a:prstGeom>
-          <a:solidFill>
-            <a:srgbClr val="FFFFFF"/>
-          </a:solidFill>
-          <a:ln w="11430">
-            <a:solidFill>
-              <a:srgbClr val="BEC8D4"/>
-            </a:solidFill>
-            <a:prstDash val="solid"/>
-          </a:ln>
-        </p:spPr>
-      </p:sp>
-      <p:sp>
-        <p:nvSpPr>
-          <p:cNvPr id="15" name="T39/node:step-2:heading-rule"/>
-          <p:cNvSpPr/>
-          <p:nvPr/>
-        </p:nvSpPr>
-        <p:spPr>
-          <a:xfrm>
-            <a:off x="3448050" y="1543050"/>
-            <a:ext cx="2362200" cy="0"/>
-          </a:xfrm>
-          <a:prstGeom prst="line">
-            <a:avLst/>
-          </a:prstGeom>
-          <a:noFill/>
-          <a:ln w="19050">
-            <a:solidFill>
-              <a:srgbClr val="173C70"/>
-            </a:solidFill>
-            <a:prstDash val="solid"/>
-          </a:ln>
-        </p:spPr>
-      </p:sp>
-      <p:sp>
-        <p:nvSpPr>
-          <p:cNvPr id="16" name="T39/node:step-2:label"/>
-          <p:cNvSpPr/>
-          <p:nvPr/>
-        </p:nvSpPr>
-        <p:spPr>
-          <a:xfrm>
-            <a:off x="3562350" y="1638300"/>
-            <a:ext cx="2133600" cy="266700"/>
+          <p:cNvPr id="17" name="T39/node:step-2:detail"/>
+          <p:cNvSpPr/>
+          <p:nvPr/>
+        </p:nvSpPr>
+        <p:spPr>
+          <a:xfrm>
+            <a:off x="3562350" y="1774603"/>
+            <a:ext cx="2133600" cy="810387"/>
           </a:xfrm>
           <a:prstGeom prst="rect">
             <a:avLst/>
@@ -3902,35 +3950,83 @@
           <a:p>
             <a:pPr algn="ctr" indent="0" marL="0">
               <a:lnSpc>
-                <a:spcPts val="2088"/>
-              </a:lnSpc>
-              <a:buNone/>
-            </a:pPr>
-            <a:r>
-              <a:rPr lang="zh-CN" altLang="en-US" sz="1800" b="1" dirty="0">
-                <a:solidFill>
-                  <a:srgbClr val="173C70"/>
-                </a:solidFill>
-                <a:latin typeface="Noto Sans CJK SC" pitchFamily="34" charset="0"/>
-                <a:ea typeface="Noto Sans CJK SC" pitchFamily="34" charset="-122"/>
-                <a:cs typeface="Noto Sans CJK SC" pitchFamily="34" charset="-120"/>
-              </a:rPr>
-              <a:t>测量与选择</a:t>
-            </a:r>
-            <a:endParaRPr lang="zh-CN" sz="1800" dirty="0"/>
+                <a:spcPts val="1947"/>
+              </a:lnSpc>
+              <a:buNone/>
+            </a:pPr>
+            <a:r>
+              <a:rPr lang="zh-CN" altLang="en-US" sz="1650" dirty="0">
+                <a:solidFill>
+                  <a:srgbClr val="1C2430"/>
+                </a:solidFill>
+                <a:latin typeface="Noto Sans CJK SC" pitchFamily="34" charset="0"/>
+                <a:ea typeface="Noto Sans CJK SC" pitchFamily="34" charset="-122"/>
+                <a:cs typeface="Noto Sans CJK SC" pitchFamily="34" charset="-120"/>
+              </a:rPr>
+              <a:t>潜在系统性误差</a:t>
+            </a:r>
+            <a:endParaRPr lang="zh-CN" sz="1650" dirty="0"/>
           </a:p>
         </p:txBody>
       </p:sp>
       <p:sp>
         <p:nvSpPr>
-          <p:cNvPr id="17" name="T39/node:step-2:detail"/>
-          <p:cNvSpPr/>
-          <p:nvPr/>
-        </p:nvSpPr>
-        <p:spPr>
-          <a:xfrm>
-            <a:off x="3562350" y="1952625"/>
-            <a:ext cx="2133600" cy="762000"/>
+          <p:cNvPr id="18" name="T39/node:step-3:frame"/>
+          <p:cNvSpPr/>
+          <p:nvPr/>
+        </p:nvSpPr>
+        <p:spPr>
+          <a:xfrm>
+            <a:off x="6438900" y="1365028"/>
+            <a:ext cx="2362200" cy="1305687"/>
+          </a:xfrm>
+          <a:prstGeom prst="rect">
+            <a:avLst/>
+          </a:prstGeom>
+          <a:solidFill>
+            <a:srgbClr val="E9F4F0"/>
+          </a:solidFill>
+          <a:ln w="11430">
+            <a:solidFill>
+              <a:srgbClr val="BEC8D4"/>
+            </a:solidFill>
+            <a:prstDash val="solid"/>
+          </a:ln>
+        </p:spPr>
+      </p:sp>
+      <p:sp>
+        <p:nvSpPr>
+          <p:cNvPr id="19" name="T39/node:step-3:heading-rule"/>
+          <p:cNvSpPr/>
+          <p:nvPr/>
+        </p:nvSpPr>
+        <p:spPr>
+          <a:xfrm>
+            <a:off x="6438900" y="1365028"/>
+            <a:ext cx="2362200" cy="0"/>
+          </a:xfrm>
+          <a:prstGeom prst="line">
+            <a:avLst/>
+          </a:prstGeom>
+          <a:noFill/>
+          <a:ln w="19050">
+            <a:solidFill>
+              <a:srgbClr val="146C63"/>
+            </a:solidFill>
+            <a:prstDash val="solid"/>
+          </a:ln>
+        </p:spPr>
+      </p:sp>
+      <p:sp>
+        <p:nvSpPr>
+          <p:cNvPr id="20" name="T39/node:step-3:label"/>
+          <p:cNvSpPr/>
+          <p:nvPr/>
+        </p:nvSpPr>
+        <p:spPr>
+          <a:xfrm>
+            <a:off x="6553200" y="1460278"/>
+            <a:ext cx="2133600" cy="266700"/>
           </a:xfrm>
           <a:prstGeom prst="rect">
             <a:avLst/>
@@ -3944,83 +4040,35 @@
           <a:p>
             <a:pPr algn="ctr" indent="0" marL="0">
               <a:lnSpc>
-                <a:spcPts val="1947"/>
-              </a:lnSpc>
-              <a:buNone/>
-            </a:pPr>
-            <a:r>
-              <a:rPr lang="zh-CN" altLang="en-US" sz="1650" dirty="0">
-                <a:solidFill>
-                  <a:srgbClr val="1C2430"/>
-                </a:solidFill>
-                <a:latin typeface="Noto Sans CJK SC" pitchFamily="34" charset="0"/>
-                <a:ea typeface="Noto Sans CJK SC" pitchFamily="34" charset="-122"/>
-                <a:cs typeface="Noto Sans CJK SC" pitchFamily="34" charset="-120"/>
-              </a:rPr>
-              <a:t>填写接口与条件</a:t>
-            </a:r>
-            <a:endParaRPr lang="zh-CN" sz="1650" dirty="0"/>
+                <a:spcPts val="2088"/>
+              </a:lnSpc>
+              <a:buNone/>
+            </a:pPr>
+            <a:r>
+              <a:rPr lang="zh-CN" altLang="en-US" sz="1800" b="1" dirty="0">
+                <a:solidFill>
+                  <a:srgbClr val="146C63"/>
+                </a:solidFill>
+                <a:latin typeface="Noto Sans CJK SC" pitchFamily="34" charset="0"/>
+                <a:ea typeface="Noto Sans CJK SC" pitchFamily="34" charset="-122"/>
+                <a:cs typeface="Noto Sans CJK SC" pitchFamily="34" charset="-120"/>
+              </a:rPr>
+              <a:t>统计估计</a:t>
+            </a:r>
+            <a:endParaRPr lang="zh-CN" sz="1800" dirty="0"/>
           </a:p>
         </p:txBody>
       </p:sp>
       <p:sp>
         <p:nvSpPr>
-          <p:cNvPr id="18" name="T39/node:step-3:frame"/>
-          <p:cNvSpPr/>
-          <p:nvPr/>
-        </p:nvSpPr>
-        <p:spPr>
-          <a:xfrm>
-            <a:off x="6438900" y="1543050"/>
-            <a:ext cx="2362200" cy="1257300"/>
-          </a:xfrm>
-          <a:prstGeom prst="rect">
-            <a:avLst/>
-          </a:prstGeom>
-          <a:solidFill>
-            <a:srgbClr val="FFFFFF"/>
-          </a:solidFill>
-          <a:ln w="11430">
-            <a:solidFill>
-              <a:srgbClr val="BEC8D4"/>
-            </a:solidFill>
-            <a:prstDash val="solid"/>
-          </a:ln>
-        </p:spPr>
-      </p:sp>
-      <p:sp>
-        <p:nvSpPr>
-          <p:cNvPr id="19" name="T39/node:step-3:heading-rule"/>
-          <p:cNvSpPr/>
-          <p:nvPr/>
-        </p:nvSpPr>
-        <p:spPr>
-          <a:xfrm>
-            <a:off x="6438900" y="1543050"/>
-            <a:ext cx="2362200" cy="0"/>
-          </a:xfrm>
-          <a:prstGeom prst="line">
-            <a:avLst/>
-          </a:prstGeom>
-          <a:noFill/>
-          <a:ln w="19050">
-            <a:solidFill>
-              <a:srgbClr val="173C70"/>
-            </a:solidFill>
-            <a:prstDash val="solid"/>
-          </a:ln>
-        </p:spPr>
-      </p:sp>
-      <p:sp>
-        <p:nvSpPr>
-          <p:cNvPr id="20" name="T39/node:step-3:label"/>
-          <p:cNvSpPr/>
-          <p:nvPr/>
-        </p:nvSpPr>
-        <p:spPr>
-          <a:xfrm>
-            <a:off x="6553200" y="1638300"/>
-            <a:ext cx="2133600" cy="266700"/>
+          <p:cNvPr id="21" name="T39/node:step-3:detail"/>
+          <p:cNvSpPr/>
+          <p:nvPr/>
+        </p:nvSpPr>
+        <p:spPr>
+          <a:xfrm>
+            <a:off x="6553200" y="1774603"/>
+            <a:ext cx="2133600" cy="810387"/>
           </a:xfrm>
           <a:prstGeom prst="rect">
             <a:avLst/>
@@ -4034,35 +4082,83 @@
           <a:p>
             <a:pPr algn="ctr" indent="0" marL="0">
               <a:lnSpc>
-                <a:spcPts val="2088"/>
-              </a:lnSpc>
-              <a:buNone/>
-            </a:pPr>
-            <a:r>
-              <a:rPr lang="zh-CN" altLang="en-US" sz="1800" b="1" dirty="0">
-                <a:solidFill>
-                  <a:srgbClr val="173C70"/>
-                </a:solidFill>
-                <a:latin typeface="Noto Sans CJK SC" pitchFamily="34" charset="0"/>
-                <a:ea typeface="Noto Sans CJK SC" pitchFamily="34" charset="-122"/>
-                <a:cs typeface="Noto Sans CJK SC" pitchFamily="34" charset="-120"/>
-              </a:rPr>
-              <a:t>统计估计</a:t>
-            </a:r>
-            <a:endParaRPr lang="zh-CN" sz="1800" dirty="0"/>
+                <a:spcPts val="1947"/>
+              </a:lnSpc>
+              <a:buNone/>
+            </a:pPr>
+            <a:r>
+              <a:rPr lang="zh-CN" altLang="en-US" sz="1650" dirty="0">
+                <a:solidFill>
+                  <a:srgbClr val="1C2430"/>
+                </a:solidFill>
+                <a:latin typeface="Noto Sans CJK SC" pitchFamily="34" charset="0"/>
+                <a:ea typeface="Noto Sans CJK SC" pitchFamily="34" charset="-122"/>
+                <a:cs typeface="Noto Sans CJK SC" pitchFamily="34" charset="-120"/>
+              </a:rPr>
+              <a:t>实际分析单位</a:t>
+            </a:r>
+            <a:endParaRPr lang="zh-CN" sz="1650" dirty="0"/>
           </a:p>
         </p:txBody>
       </p:sp>
       <p:sp>
         <p:nvSpPr>
-          <p:cNvPr id="21" name="T39/node:step-3:detail"/>
-          <p:cNvSpPr/>
-          <p:nvPr/>
-        </p:nvSpPr>
-        <p:spPr>
-          <a:xfrm>
-            <a:off x="6553200" y="1952625"/>
-            <a:ext cx="2133600" cy="762000"/>
+          <p:cNvPr id="22" name="T39/node:step-4:frame"/>
+          <p:cNvSpPr/>
+          <p:nvPr/>
+        </p:nvSpPr>
+        <p:spPr>
+          <a:xfrm>
+            <a:off x="9429750" y="1365028"/>
+            <a:ext cx="2305050" cy="1305687"/>
+          </a:xfrm>
+          <a:prstGeom prst="rect">
+            <a:avLst/>
+          </a:prstGeom>
+          <a:solidFill>
+            <a:srgbClr val="EAF2FA"/>
+          </a:solidFill>
+          <a:ln w="11430">
+            <a:solidFill>
+              <a:srgbClr val="BEC8D4"/>
+            </a:solidFill>
+            <a:prstDash val="solid"/>
+          </a:ln>
+        </p:spPr>
+      </p:sp>
+      <p:sp>
+        <p:nvSpPr>
+          <p:cNvPr id="23" name="T39/node:step-4:heading-rule"/>
+          <p:cNvSpPr/>
+          <p:nvPr/>
+        </p:nvSpPr>
+        <p:spPr>
+          <a:xfrm>
+            <a:off x="9429750" y="1365028"/>
+            <a:ext cx="2305050" cy="0"/>
+          </a:xfrm>
+          <a:prstGeom prst="line">
+            <a:avLst/>
+          </a:prstGeom>
+          <a:noFill/>
+          <a:ln w="19050">
+            <a:solidFill>
+              <a:srgbClr val="235E96"/>
+            </a:solidFill>
+            <a:prstDash val="solid"/>
+          </a:ln>
+        </p:spPr>
+      </p:sp>
+      <p:sp>
+        <p:nvSpPr>
+          <p:cNvPr id="24" name="T39/node:step-4:label"/>
+          <p:cNvSpPr/>
+          <p:nvPr/>
+        </p:nvSpPr>
+        <p:spPr>
+          <a:xfrm>
+            <a:off x="9544050" y="1460278"/>
+            <a:ext cx="2076450" cy="266700"/>
           </a:xfrm>
           <a:prstGeom prst="rect">
             <a:avLst/>
@@ -4076,83 +4172,35 @@
           <a:p>
             <a:pPr algn="ctr" indent="0" marL="0">
               <a:lnSpc>
-                <a:spcPts val="1947"/>
-              </a:lnSpc>
-              <a:buNone/>
-            </a:pPr>
-            <a:r>
-              <a:rPr lang="zh-CN" altLang="en-US" sz="1650" dirty="0">
-                <a:solidFill>
-                  <a:srgbClr val="1C2430"/>
-                </a:solidFill>
-                <a:latin typeface="Noto Sans CJK SC" pitchFamily="34" charset="0"/>
-                <a:ea typeface="Noto Sans CJK SC" pitchFamily="34" charset="-122"/>
-                <a:cs typeface="Noto Sans CJK SC" pitchFamily="34" charset="-120"/>
-              </a:rPr>
-              <a:t>填写接口与条件</a:t>
-            </a:r>
-            <a:endParaRPr lang="zh-CN" sz="1650" dirty="0"/>
+                <a:spcPts val="2088"/>
+              </a:lnSpc>
+              <a:buNone/>
+            </a:pPr>
+            <a:r>
+              <a:rPr lang="zh-CN" altLang="en-US" sz="1800" b="1" dirty="0">
+                <a:solidFill>
+                  <a:srgbClr val="235E96"/>
+                </a:solidFill>
+                <a:latin typeface="Noto Sans CJK SC" pitchFamily="34" charset="0"/>
+                <a:ea typeface="Noto Sans CJK SC" pitchFamily="34" charset="-122"/>
+                <a:cs typeface="Noto Sans CJK SC" pitchFamily="34" charset="-120"/>
+              </a:rPr>
+              <a:t>研究结论</a:t>
+            </a:r>
+            <a:endParaRPr lang="zh-CN" sz="1800" dirty="0"/>
           </a:p>
         </p:txBody>
       </p:sp>
       <p:sp>
         <p:nvSpPr>
-          <p:cNvPr id="22" name="T39/node:step-4:frame"/>
-          <p:cNvSpPr/>
-          <p:nvPr/>
-        </p:nvSpPr>
-        <p:spPr>
-          <a:xfrm>
-            <a:off x="9429750" y="1543050"/>
-            <a:ext cx="2305050" cy="1257300"/>
-          </a:xfrm>
-          <a:prstGeom prst="rect">
-            <a:avLst/>
-          </a:prstGeom>
-          <a:solidFill>
-            <a:srgbClr val="FFFFFF"/>
-          </a:solidFill>
-          <a:ln w="11430">
-            <a:solidFill>
-              <a:srgbClr val="BEC8D4"/>
-            </a:solidFill>
-            <a:prstDash val="solid"/>
-          </a:ln>
-        </p:spPr>
-      </p:sp>
-      <p:sp>
-        <p:nvSpPr>
-          <p:cNvPr id="23" name="T39/node:step-4:heading-rule"/>
-          <p:cNvSpPr/>
-          <p:nvPr/>
-        </p:nvSpPr>
-        <p:spPr>
-          <a:xfrm>
-            <a:off x="9429750" y="1543050"/>
-            <a:ext cx="2305050" cy="0"/>
-          </a:xfrm>
-          <a:prstGeom prst="line">
-            <a:avLst/>
-          </a:prstGeom>
-          <a:noFill/>
-          <a:ln w="19050">
-            <a:solidFill>
-              <a:srgbClr val="173C70"/>
-            </a:solidFill>
-            <a:prstDash val="solid"/>
-          </a:ln>
-        </p:spPr>
-      </p:sp>
-      <p:sp>
-        <p:nvSpPr>
-          <p:cNvPr id="24" name="T39/node:step-4:label"/>
-          <p:cNvSpPr/>
-          <p:nvPr/>
-        </p:nvSpPr>
-        <p:spPr>
-          <a:xfrm>
-            <a:off x="9544050" y="1638300"/>
-            <a:ext cx="2076450" cy="266700"/>
+          <p:cNvPr id="25" name="T39/node:step-4:detail"/>
+          <p:cNvSpPr/>
+          <p:nvPr/>
+        </p:nvSpPr>
+        <p:spPr>
+          <a:xfrm>
+            <a:off x="9544050" y="1774603"/>
+            <a:ext cx="2076450" cy="810387"/>
           </a:xfrm>
           <a:prstGeom prst="rect">
             <a:avLst/>
@@ -4166,77 +4214,35 @@
           <a:p>
             <a:pPr algn="ctr" indent="0" marL="0">
               <a:lnSpc>
-                <a:spcPts val="2088"/>
-              </a:lnSpc>
-              <a:buNone/>
-            </a:pPr>
-            <a:r>
-              <a:rPr lang="zh-CN" altLang="en-US" sz="1800" b="1" dirty="0">
-                <a:solidFill>
-                  <a:srgbClr val="173C70"/>
-                </a:solidFill>
-                <a:latin typeface="Noto Sans CJK SC" pitchFamily="34" charset="0"/>
-                <a:ea typeface="Noto Sans CJK SC" pitchFamily="34" charset="-122"/>
-                <a:cs typeface="Noto Sans CJK SC" pitchFamily="34" charset="-120"/>
-              </a:rPr>
-              <a:t>研究结论</a:t>
-            </a:r>
-            <a:endParaRPr lang="zh-CN" sz="1800" dirty="0"/>
+                <a:spcPts val="1947"/>
+              </a:lnSpc>
+              <a:buNone/>
+            </a:pPr>
+            <a:r>
+              <a:rPr lang="zh-CN" altLang="en-US" sz="1650" dirty="0">
+                <a:solidFill>
+                  <a:srgbClr val="1C2430"/>
+                </a:solidFill>
+                <a:latin typeface="Noto Sans CJK SC" pitchFamily="34" charset="0"/>
+                <a:ea typeface="Noto Sans CJK SC" pitchFamily="34" charset="-122"/>
+                <a:cs typeface="Noto Sans CJK SC" pitchFamily="34" charset="-120"/>
+              </a:rPr>
+              <a:t>适用对象与范围</a:t>
+            </a:r>
+            <a:endParaRPr lang="zh-CN" sz="1650" dirty="0"/>
           </a:p>
         </p:txBody>
       </p:sp>
       <p:sp>
         <p:nvSpPr>
-          <p:cNvPr id="25" name="T39/node:step-4:detail"/>
-          <p:cNvSpPr/>
-          <p:nvPr/>
-        </p:nvSpPr>
-        <p:spPr>
-          <a:xfrm>
-            <a:off x="9544050" y="1952625"/>
-            <a:ext cx="2076450" cy="762000"/>
-          </a:xfrm>
-          <a:prstGeom prst="rect">
-            <a:avLst/>
-          </a:prstGeom>
-          <a:noFill/>
-          <a:ln/>
-        </p:spPr>
-        <p:txBody>
-          <a:bodyPr wrap="none" lIns="0" tIns="0" rIns="0" bIns="0" rtlCol="0" anchor="t"/>
-          <a:lstStyle/>
-          <a:p>
-            <a:pPr algn="ctr" indent="0" marL="0">
-              <a:lnSpc>
-                <a:spcPts val="1947"/>
-              </a:lnSpc>
-              <a:buNone/>
-            </a:pPr>
-            <a:r>
-              <a:rPr lang="zh-CN" altLang="en-US" sz="1650" dirty="0">
-                <a:solidFill>
-                  <a:srgbClr val="1C2430"/>
-                </a:solidFill>
-                <a:latin typeface="Noto Sans CJK SC" pitchFamily="34" charset="0"/>
-                <a:ea typeface="Noto Sans CJK SC" pitchFamily="34" charset="-122"/>
-                <a:cs typeface="Noto Sans CJK SC" pitchFamily="34" charset="-120"/>
-              </a:rPr>
-              <a:t>填写接口与条件</a:t>
-            </a:r>
-            <a:endParaRPr lang="zh-CN" sz="1650" dirty="0"/>
-          </a:p>
-        </p:txBody>
-      </p:sp>
-      <p:sp>
-        <p:nvSpPr>
           <p:cNvPr id="26" name="T39/card/region-1/frame"/>
           <p:cNvSpPr/>
           <p:nvPr/>
         </p:nvSpPr>
         <p:spPr>
           <a:xfrm>
-            <a:off x="457200" y="4210050"/>
-            <a:ext cx="5486400" cy="1809750"/>
+            <a:off x="457200" y="4130231"/>
+            <a:ext cx="5486400" cy="1883759"/>
           </a:xfrm>
           <a:prstGeom prst="rect">
             <a:avLst/>
@@ -4260,14 +4266,14 @@
         </p:nvSpPr>
         <p:spPr>
           <a:xfrm>
-            <a:off x="571500" y="4095750"/>
-            <a:ext cx="1181100" cy="320040"/>
+            <a:off x="571500" y="4015931"/>
+            <a:ext cx="1257300" cy="342900"/>
           </a:xfrm>
           <a:prstGeom prst="rect">
             <a:avLst/>
           </a:prstGeom>
           <a:solidFill>
-            <a:srgbClr val="903543"/>
+            <a:srgbClr val="A24736"/>
           </a:solidFill>
           <a:ln w="12700">
             <a:solidFill>
@@ -4287,8 +4293,8 @@
         </p:nvSpPr>
         <p:spPr>
           <a:xfrm>
-            <a:off x="676275" y="4124325"/>
-            <a:ext cx="971550" cy="262890"/>
+            <a:off x="676275" y="4044506"/>
+            <a:ext cx="1047750" cy="285750"/>
           </a:xfrm>
           <a:prstGeom prst="rect">
             <a:avLst/>
@@ -4302,12 +4308,12 @@
           <a:p>
             <a:pPr algn="l" indent="0" marL="0">
               <a:lnSpc>
-                <a:spcPts val="2070"/>
-              </a:lnSpc>
-              <a:buNone/>
-            </a:pPr>
-            <a:r>
-              <a:rPr lang="zh-CN" altLang="en-US" sz="1800" b="1" dirty="0">
+                <a:spcPts val="2242"/>
+              </a:lnSpc>
+              <a:buNone/>
+            </a:pPr>
+            <a:r>
+              <a:rPr lang="zh-CN" altLang="en-US" sz="1950" b="1" dirty="0">
                 <a:solidFill>
                   <a:srgbClr val="FFFFFF"/>
                 </a:solidFill>
@@ -4317,7 +4323,7 @@
               </a:rPr>
               <a:t>偏倚来源</a:t>
             </a:r>
-            <a:endParaRPr lang="zh-CN" sz="1800" dirty="0"/>
+            <a:endParaRPr lang="zh-CN" sz="1950" dirty="0"/>
           </a:p>
         </p:txBody>
       </p:sp>
@@ -4329,8 +4335,8 @@
         </p:nvSpPr>
         <p:spPr>
           <a:xfrm>
-            <a:off x="590550" y="4558665"/>
-            <a:ext cx="5219700" cy="1365885"/>
+            <a:off x="590550" y="4501706"/>
+            <a:ext cx="5219700" cy="1417034"/>
           </a:xfrm>
           <a:prstGeom prst="rect">
             <a:avLst/>
@@ -4344,12 +4350,12 @@
           <a:p>
             <a:pPr algn="l" indent="0" marL="0">
               <a:lnSpc>
-                <a:spcPts val="2139"/>
-              </a:lnSpc>
-              <a:buNone/>
-            </a:pPr>
-            <a:r>
-              <a:rPr lang="zh-CN" altLang="en-US" sz="1725" dirty="0">
+                <a:spcPts val="2232"/>
+              </a:lnSpc>
+              <a:buNone/>
+            </a:pPr>
+            <a:r>
+              <a:rPr lang="zh-CN" altLang="en-US" sz="1800" dirty="0">
                 <a:solidFill>
                   <a:srgbClr val="1C2430"/>
                 </a:solidFill>
@@ -4359,17 +4365,17 @@
               </a:rPr>
               <a:t>区分选择、测量和遗漏变量</a:t>
             </a:r>
-            <a:endParaRPr lang="zh-CN" sz="1725" dirty="0"/>
+            <a:endParaRPr lang="zh-CN" sz="1800" dirty="0"/>
           </a:p>
           <a:p>
             <a:pPr algn="l" indent="0" marL="0">
               <a:lnSpc>
-                <a:spcPts val="2139"/>
-              </a:lnSpc>
-              <a:buNone/>
-            </a:pPr>
-            <a:r>
-              <a:rPr lang="zh-CN" altLang="en-US" sz="1725" dirty="0">
+                <a:spcPts val="2232"/>
+              </a:lnSpc>
+              <a:buNone/>
+            </a:pPr>
+            <a:r>
+              <a:rPr lang="zh-CN" altLang="en-US" sz="1800" dirty="0">
                 <a:solidFill>
                   <a:srgbClr val="1C2430"/>
                 </a:solidFill>
@@ -4379,7 +4385,7 @@
               </a:rPr>
               <a:t>说明偏倚可能影响的方向与对象</a:t>
             </a:r>
-            <a:endParaRPr lang="zh-CN" sz="1725" dirty="0"/>
+            <a:endParaRPr lang="zh-CN" sz="1800" dirty="0"/>
           </a:p>
         </p:txBody>
       </p:sp>
@@ -4391,7 +4397,7 @@
         </p:nvSpPr>
         <p:spPr>
           <a:xfrm>
-            <a:off x="6248400" y="4457700"/>
+            <a:off x="6248400" y="4377881"/>
             <a:ext cx="5486400" cy="0"/>
           </a:xfrm>
           <a:prstGeom prst="line">
@@ -4414,7 +4420,7 @@
         </p:nvSpPr>
         <p:spPr>
           <a:xfrm>
-            <a:off x="6248400" y="4457700"/>
+            <a:off x="6248400" y="4377881"/>
             <a:ext cx="342900" cy="0"/>
           </a:xfrm>
           <a:prstGeom prst="line">
@@ -4423,7 +4429,7 @@
           <a:noFill/>
           <a:ln w="17145">
             <a:solidFill>
-              <a:srgbClr val="173C70"/>
+              <a:srgbClr val="235E96"/>
             </a:solidFill>
             <a:prstDash val="solid"/>
           </a:ln>
@@ -4437,7 +4443,7 @@
         </p:nvSpPr>
         <p:spPr>
           <a:xfrm>
-            <a:off x="6248400" y="4114800"/>
+            <a:off x="6248400" y="4034981"/>
             <a:ext cx="5486400" cy="323850"/>
           </a:xfrm>
           <a:prstGeom prst="rect">
@@ -4452,14 +4458,14 @@
           <a:p>
             <a:pPr algn="l" indent="0" marL="0">
               <a:lnSpc>
-                <a:spcPts val="2156"/>
-              </a:lnSpc>
-              <a:buNone/>
-            </a:pPr>
-            <a:r>
-              <a:rPr lang="zh-CN" altLang="en-US" sz="1875" b="1" dirty="0">
-                <a:solidFill>
-                  <a:srgbClr val="173C70"/>
+                <a:spcPts val="2242"/>
+              </a:lnSpc>
+              <a:buNone/>
+            </a:pPr>
+            <a:r>
+              <a:rPr lang="zh-CN" altLang="en-US" sz="1950" b="1" dirty="0">
+                <a:solidFill>
+                  <a:srgbClr val="235E96"/>
                 </a:solidFill>
                 <a:latin typeface="Noto Sans CJK SC" pitchFamily="34" charset="0"/>
                 <a:ea typeface="Noto Sans CJK SC" pitchFamily="34" charset="-122"/>
@@ -4467,7 +4473,7 @@
               </a:rPr>
               <a:t>排查与敏感性分析</a:t>
             </a:r>
-            <a:endParaRPr lang="zh-CN" sz="1875" dirty="0"/>
+            <a:endParaRPr lang="zh-CN" sz="1950" dirty="0"/>
           </a:p>
         </p:txBody>
       </p:sp>
@@ -4479,8 +4485,8 @@
         </p:nvSpPr>
         <p:spPr>
           <a:xfrm>
-            <a:off x="6248400" y="4591050"/>
-            <a:ext cx="5486400" cy="1390650"/>
+            <a:off x="6248400" y="4511231"/>
+            <a:ext cx="5486400" cy="1464659"/>
           </a:xfrm>
           <a:prstGeom prst="rect">
             <a:avLst/>
@@ -4569,7 +4575,7 @@
                 <a:ea typeface="Noto Sans CJK SC" pitchFamily="34" charset="-122"/>
                 <a:cs typeface="Noto Sans CJK SC" pitchFamily="34" charset="-120"/>
               </a:rPr>
-              <a:t>T1 · 2026 · 待替换</a:t>
+              <a:t>T1 · 2026 · 书目占位；图表均为合成示例</a:t>
             </a:r>
             <a:endParaRPr lang="zh-CN" sz="1125" dirty="0"/>
           </a:p>
@@ -4678,14 +4684,14 @@
       </p:sp>
       <p:sp>
         <p:nvSpPr>
-          <p:cNvPr id="4" name="T40/kicker"/>
-          <p:cNvSpPr/>
-          <p:nvPr/>
-        </p:nvSpPr>
-        <p:spPr>
-          <a:xfrm>
-            <a:off x="457200" y="152400"/>
-            <a:ext cx="11277600" cy="190500"/>
+          <p:cNvPr id="4" name="T40/title"/>
+          <p:cNvSpPr/>
+          <p:nvPr/>
+        </p:nvSpPr>
+        <p:spPr>
+          <a:xfrm>
+            <a:off x="457200" y="209550"/>
+            <a:ext cx="11277600" cy="438150"/>
           </a:xfrm>
           <a:prstGeom prst="rect">
             <a:avLst/>
@@ -4699,131 +4705,70 @@
           <a:p>
             <a:pPr algn="l" indent="0" marL="0">
               <a:lnSpc>
-                <a:spcPts val="1320"/>
-              </a:lnSpc>
-              <a:buNone/>
-            </a:pPr>
-            <a:r>
-              <a:rPr lang="zh-CN" altLang="en-US" sz="1200" dirty="0">
-                <a:solidFill>
-                  <a:srgbClr val="515B68"/>
-                </a:solidFill>
-                <a:latin typeface="Noto Sans CJK SC" pitchFamily="34" charset="0"/>
-                <a:ea typeface="Noto Sans CJK SC" pitchFamily="34" charset="-122"/>
-                <a:cs typeface="Noto Sans CJK SC" pitchFamily="34" charset="-120"/>
-              </a:rPr>
-              <a:t>结构模板 / 占位说明与合成数据</a:t>
-            </a:r>
-            <a:endParaRPr lang="zh-CN" sz="1200" dirty="0"/>
+                <a:spcPts val="3360"/>
+              </a:lnSpc>
+              <a:buNone/>
+            </a:pPr>
+            <a:r>
+              <a:rPr lang="zh-CN" altLang="en-US" sz="3000" b="1" dirty="0">
+                <a:solidFill>
+                  <a:srgbClr val="1C2430"/>
+                </a:solidFill>
+                <a:latin typeface="Noto Sans CJK SC" pitchFamily="34" charset="0"/>
+                <a:ea typeface="Noto Sans CJK SC" pitchFamily="34" charset="-122"/>
+                <a:cs typeface="Noto Sans CJK SC" pitchFamily="34" charset="-120"/>
+              </a:rPr>
+              <a:t>效度与解释边界</a:t>
+            </a:r>
+            <a:endParaRPr lang="zh-CN" sz="3000" dirty="0"/>
           </a:p>
         </p:txBody>
       </p:sp>
       <p:sp>
         <p:nvSpPr>
-          <p:cNvPr id="5" name="T40/title"/>
-          <p:cNvSpPr/>
-          <p:nvPr/>
-        </p:nvSpPr>
-        <p:spPr>
-          <a:xfrm>
-            <a:off x="457200" y="381000"/>
-            <a:ext cx="11277600" cy="400050"/>
-          </a:xfrm>
-          <a:prstGeom prst="rect">
-            <a:avLst/>
-          </a:prstGeom>
-          <a:noFill/>
-          <a:ln/>
-        </p:spPr>
-        <p:txBody>
-          <a:bodyPr wrap="none" lIns="0" tIns="0" rIns="0" bIns="0" rtlCol="0" anchor="t"/>
-          <a:lstStyle/>
-          <a:p>
-            <a:pPr algn="l" indent="0" marL="0">
-              <a:lnSpc>
-                <a:spcPts val="2856"/>
-              </a:lnSpc>
-              <a:buNone/>
-            </a:pPr>
-            <a:r>
-              <a:rPr lang="zh-CN" altLang="en-US" sz="2550" b="1" dirty="0">
-                <a:solidFill>
-                  <a:srgbClr val="1C2430"/>
-                </a:solidFill>
-                <a:latin typeface="Noto Sans CJK SC" pitchFamily="34" charset="0"/>
-                <a:ea typeface="Noto Sans CJK SC" pitchFamily="34" charset="-122"/>
-                <a:cs typeface="Noto Sans CJK SC" pitchFamily="34" charset="-120"/>
-              </a:rPr>
-              <a:t>效度与解释边界</a:t>
-            </a:r>
-            <a:endParaRPr lang="zh-CN" sz="2550" dirty="0"/>
-          </a:p>
-        </p:txBody>
-      </p:sp>
-      <p:sp>
-        <p:nvSpPr>
-          <p:cNvPr id="6" name="T40/header-rule"/>
-          <p:cNvSpPr/>
-          <p:nvPr/>
-        </p:nvSpPr>
-        <p:spPr>
-          <a:xfrm>
-            <a:off x="457200" y="876300"/>
+          <p:cNvPr id="5" name="T40/header-rule"/>
+          <p:cNvSpPr/>
+          <p:nvPr/>
+        </p:nvSpPr>
+        <p:spPr>
+          <a:xfrm>
+            <a:off x="457200" y="752475"/>
             <a:ext cx="11277600" cy="0"/>
           </a:xfrm>
           <a:prstGeom prst="line">
             <a:avLst/>
           </a:prstGeom>
           <a:noFill/>
-          <a:ln w="11430">
+          <a:ln w="10478">
+            <a:solidFill>
+              <a:srgbClr val="BEC8D4"/>
+            </a:solidFill>
+            <a:prstDash val="solid"/>
+          </a:ln>
+        </p:spPr>
+      </p:sp>
+      <p:sp>
+        <p:nvSpPr>
+          <p:cNvPr id="6" name="T40/header-accent"/>
+          <p:cNvSpPr/>
+          <p:nvPr/>
+        </p:nvSpPr>
+        <p:spPr>
+          <a:xfrm>
+            <a:off x="457200" y="752475"/>
+            <a:ext cx="704850" cy="0"/>
+          </a:xfrm>
+          <a:prstGeom prst="line">
+            <a:avLst/>
+          </a:prstGeom>
+          <a:noFill/>
+          <a:ln w="28575">
             <a:solidFill>
               <a:srgbClr val="173C70"/>
             </a:solidFill>
             <a:prstDash val="solid"/>
           </a:ln>
         </p:spPr>
-      </p:sp>
-      <p:sp>
-        <p:nvSpPr>
-          <p:cNvPr id="7" name="T40/takeaway"/>
-          <p:cNvSpPr/>
-          <p:nvPr/>
-        </p:nvSpPr>
-        <p:spPr>
-          <a:xfrm>
-            <a:off x="457200" y="5638800"/>
-            <a:ext cx="7943850" cy="419100"/>
-          </a:xfrm>
-          <a:prstGeom prst="rect">
-            <a:avLst/>
-          </a:prstGeom>
-          <a:noFill/>
-          <a:ln/>
-        </p:spPr>
-        <p:txBody>
-          <a:bodyPr wrap="none" lIns="0" tIns="0" rIns="0" bIns="0" rtlCol="0" anchor="t"/>
-          <a:lstStyle/>
-          <a:p>
-            <a:pPr algn="l" indent="0" marL="0">
-              <a:lnSpc>
-                <a:spcPts val="2160"/>
-              </a:lnSpc>
-              <a:buNone/>
-            </a:pPr>
-            <a:r>
-              <a:rPr lang="zh-CN" altLang="en-US" sz="1800" b="1" dirty="0">
-                <a:solidFill>
-                  <a:srgbClr val="173C70"/>
-                </a:solidFill>
-                <a:latin typeface="Noto Sans CJK SC" pitchFamily="34" charset="0"/>
-                <a:ea typeface="Noto Sans CJK SC" pitchFamily="34" charset="-122"/>
-                <a:cs typeface="Noto Sans CJK SC" pitchFamily="34" charset="-120"/>
-              </a:rPr>
-              <a:t>解释必须由本页证据支持，并保留样本、对照与适用条件。</a:t>
-            </a:r>
-            <a:endParaRPr lang="zh-CN" sz="1800" dirty="0"/>
-          </a:p>
-        </p:txBody>
       </p:sp>
       <p:graphicFrame>
         <p:nvGraphicFramePr>
@@ -4840,17 +4785,17 @@
           </p:nvPr>
         </p:nvGraphicFramePr>
         <p:xfrm>
-          <a:off x="457200" y="1409700"/>
-          <a:ext cx="7943850" cy="2403729"/>
+          <a:off x="457200" y="1068229"/>
+          <a:ext cx="11277600" cy="2403729"/>
         </p:xfrm>
         <a:graphic>
           <a:graphicData uri="http://schemas.openxmlformats.org/drawingml/2006/table">
             <a:tbl>
               <a:tblPr/>
               <a:tblGrid>
-                <a:gridCol w="2647950"/>
-                <a:gridCol w="2647950"/>
-                <a:gridCol w="2647950"/>
+                <a:gridCol w="3759200"/>
+                <a:gridCol w="3759200"/>
+                <a:gridCol w="3759200"/>
               </a:tblGrid>
               <a:tr h="400622">
                 <a:tc>
@@ -5842,14 +5787,14 @@
       </p:graphicFrame>
       <p:sp>
         <p:nvSpPr>
-          <p:cNvPr id="9" name="T40/table-caption"/>
-          <p:cNvSpPr/>
-          <p:nvPr/>
-        </p:nvSpPr>
-        <p:spPr>
-          <a:xfrm>
-            <a:off x="457200" y="3880104"/>
-            <a:ext cx="7943850" cy="209550"/>
+          <p:cNvPr id="8" name="T40/table-caption"/>
+          <p:cNvSpPr/>
+          <p:nvPr/>
+        </p:nvSpPr>
+        <p:spPr>
+          <a:xfrm>
+            <a:off x="457200" y="3538633"/>
+            <a:ext cx="11277600" cy="209550"/>
           </a:xfrm>
           <a:prstGeom prst="rect">
             <a:avLst/>
@@ -5884,168 +5829,14 @@
       </p:sp>
       <p:sp>
         <p:nvSpPr>
-          <p:cNvPr id="10" name="T40/card/region-1/base-rule"/>
-          <p:cNvSpPr/>
-          <p:nvPr/>
-        </p:nvSpPr>
-        <p:spPr>
-          <a:xfrm>
-            <a:off x="8724900" y="3505200"/>
-            <a:ext cx="3009900" cy="0"/>
-          </a:xfrm>
-          <a:prstGeom prst="line">
-            <a:avLst/>
-          </a:prstGeom>
-          <a:noFill/>
-          <a:ln w="10478">
-            <a:solidFill>
-              <a:srgbClr val="BEC8D4"/>
-            </a:solidFill>
-            <a:prstDash val="solid"/>
-          </a:ln>
-        </p:spPr>
-      </p:sp>
-      <p:sp>
-        <p:nvSpPr>
-          <p:cNvPr id="11" name="T40/card/region-1/side-mark"/>
-          <p:cNvSpPr/>
-          <p:nvPr/>
-        </p:nvSpPr>
-        <p:spPr>
-          <a:xfrm>
-            <a:off x="8724900" y="1428750"/>
-            <a:ext cx="47625" cy="295275"/>
-          </a:xfrm>
-          <a:prstGeom prst="rect">
-            <a:avLst/>
-          </a:prstGeom>
-          <a:solidFill>
-            <a:srgbClr val="173C70"/>
-          </a:solidFill>
-          <a:ln w="12700">
-            <a:solidFill>
-              <a:srgbClr val="FFFFFF">
-                <a:alpha val="0"/>
-              </a:srgbClr>
-            </a:solidFill>
-            <a:prstDash val="solid"/>
-          </a:ln>
-        </p:spPr>
-      </p:sp>
-      <p:sp>
-        <p:nvSpPr>
-          <p:cNvPr id="12" name="T40/card/region-1/title"/>
-          <p:cNvSpPr/>
-          <p:nvPr/>
-        </p:nvSpPr>
-        <p:spPr>
-          <a:xfrm>
-            <a:off x="8877300" y="1428750"/>
-            <a:ext cx="2857500" cy="304800"/>
-          </a:xfrm>
-          <a:prstGeom prst="rect">
-            <a:avLst/>
-          </a:prstGeom>
-          <a:noFill/>
-          <a:ln/>
-        </p:spPr>
-        <p:txBody>
-          <a:bodyPr wrap="none" lIns="0" tIns="0" rIns="0" bIns="0" rtlCol="0" anchor="t"/>
-          <a:lstStyle/>
-          <a:p>
-            <a:pPr algn="l" indent="0" marL="0">
-              <a:lnSpc>
-                <a:spcPts val="2070"/>
-              </a:lnSpc>
-              <a:buNone/>
-            </a:pPr>
-            <a:r>
-              <a:rPr lang="zh-CN" altLang="en-US" sz="1800" b="1" dirty="0">
-                <a:solidFill>
-                  <a:srgbClr val="173C70"/>
-                </a:solidFill>
-                <a:latin typeface="Noto Sans CJK SC" pitchFamily="34" charset="0"/>
-                <a:ea typeface="Noto Sans CJK SC" pitchFamily="34" charset="-122"/>
-                <a:cs typeface="Noto Sans CJK SC" pitchFamily="34" charset="-120"/>
-              </a:rPr>
-              <a:t>内部效度</a:t>
-            </a:r>
-            <a:endParaRPr lang="zh-CN" sz="1800" dirty="0"/>
-          </a:p>
-        </p:txBody>
-      </p:sp>
-      <p:sp>
-        <p:nvSpPr>
-          <p:cNvPr id="13" name="T40/card/region-1/body"/>
-          <p:cNvSpPr/>
-          <p:nvPr/>
-        </p:nvSpPr>
-        <p:spPr>
-          <a:xfrm>
-            <a:off x="8877300" y="1847850"/>
-            <a:ext cx="2857500" cy="1562100"/>
-          </a:xfrm>
-          <a:prstGeom prst="rect">
-            <a:avLst/>
-          </a:prstGeom>
-          <a:noFill/>
-          <a:ln/>
-        </p:spPr>
-        <p:txBody>
-          <a:bodyPr wrap="none" lIns="0" tIns="0" rIns="0" bIns="0" rtlCol="0" anchor="t"/>
-          <a:lstStyle/>
-          <a:p>
-            <a:pPr algn="l" indent="0" marL="0">
-              <a:lnSpc>
-                <a:spcPts val="2139"/>
-              </a:lnSpc>
-              <a:buNone/>
-            </a:pPr>
-            <a:r>
-              <a:rPr lang="zh-CN" altLang="en-US" sz="1725" dirty="0">
-                <a:solidFill>
-                  <a:srgbClr val="1C2430"/>
-                </a:solidFill>
-                <a:latin typeface="Noto Sans CJK SC" pitchFamily="34" charset="0"/>
-                <a:ea typeface="Noto Sans CJK SC" pitchFamily="34" charset="-122"/>
-                <a:cs typeface="Noto Sans CJK SC" pitchFamily="34" charset="-120"/>
-              </a:rPr>
-              <a:t>对照是否隔离了目标干预</a:t>
-            </a:r>
-            <a:endParaRPr lang="zh-CN" sz="1725" dirty="0"/>
-          </a:p>
-          <a:p>
-            <a:pPr algn="l" indent="0" marL="0">
-              <a:lnSpc>
-                <a:spcPts val="2139"/>
-              </a:lnSpc>
-              <a:buNone/>
-            </a:pPr>
-            <a:r>
-              <a:rPr lang="zh-CN" altLang="en-US" sz="1725" dirty="0">
-                <a:solidFill>
-                  <a:srgbClr val="1C2430"/>
-                </a:solidFill>
-                <a:latin typeface="Noto Sans CJK SC" pitchFamily="34" charset="0"/>
-                <a:ea typeface="Noto Sans CJK SC" pitchFamily="34" charset="-122"/>
-                <a:cs typeface="Noto Sans CJK SC" pitchFamily="34" charset="-120"/>
-              </a:rPr>
-              <a:t>检查混杂、泄漏与测量不一致</a:t>
-            </a:r>
-            <a:endParaRPr lang="zh-CN" sz="1725" dirty="0"/>
-          </a:p>
-        </p:txBody>
-      </p:sp>
-      <p:sp>
-        <p:nvSpPr>
-          <p:cNvPr id="14" name="T40/card/region-2/frame"/>
-          <p:cNvSpPr/>
-          <p:nvPr/>
-        </p:nvSpPr>
-        <p:spPr>
-          <a:xfrm>
-            <a:off x="8724900" y="3867150"/>
-            <a:ext cx="3009900" cy="2133600"/>
+          <p:cNvPr id="9" name="T40/card/region-1/frame"/>
+          <p:cNvSpPr/>
+          <p:nvPr/>
+        </p:nvSpPr>
+        <p:spPr>
+          <a:xfrm>
+            <a:off x="457200" y="3957733"/>
+            <a:ext cx="5467350" cy="1701356"/>
           </a:xfrm>
           <a:prstGeom prst="rect">
             <a:avLst/>
@@ -6063,20 +5854,20 @@
       </p:sp>
       <p:sp>
         <p:nvSpPr>
-          <p:cNvPr id="15" name="T40/card/region-2/tab"/>
-          <p:cNvSpPr/>
-          <p:nvPr/>
-        </p:nvSpPr>
-        <p:spPr>
-          <a:xfrm>
-            <a:off x="8839200" y="3752850"/>
-            <a:ext cx="1181100" cy="320040"/>
+          <p:cNvPr id="10" name="T40/card/region-1/heading-fill"/>
+          <p:cNvSpPr/>
+          <p:nvPr/>
+        </p:nvSpPr>
+        <p:spPr>
+          <a:xfrm>
+            <a:off x="466725" y="3967258"/>
+            <a:ext cx="5448300" cy="371475"/>
           </a:xfrm>
           <a:prstGeom prst="rect">
             <a:avLst/>
           </a:prstGeom>
           <a:solidFill>
-            <a:srgbClr val="173C70"/>
+            <a:srgbClr val="EAF2FA"/>
           </a:solidFill>
           <a:ln w="12700">
             <a:solidFill>
@@ -6090,14 +5881,37 @@
       </p:sp>
       <p:sp>
         <p:nvSpPr>
-          <p:cNvPr id="16" name="T40/card/region-2/title"/>
-          <p:cNvSpPr/>
-          <p:nvPr/>
-        </p:nvSpPr>
-        <p:spPr>
-          <a:xfrm>
-            <a:off x="8943975" y="3781425"/>
-            <a:ext cx="971550" cy="262890"/>
+          <p:cNvPr id="11" name="T40/card/region-1/heading-rule"/>
+          <p:cNvSpPr/>
+          <p:nvPr/>
+        </p:nvSpPr>
+        <p:spPr>
+          <a:xfrm>
+            <a:off x="457200" y="4338733"/>
+            <a:ext cx="5467350" cy="0"/>
+          </a:xfrm>
+          <a:prstGeom prst="line">
+            <a:avLst/>
+          </a:prstGeom>
+          <a:noFill/>
+          <a:ln w="9525">
+            <a:solidFill>
+              <a:srgbClr val="BEC8D4"/>
+            </a:solidFill>
+            <a:prstDash val="solid"/>
+          </a:ln>
+        </p:spPr>
+      </p:sp>
+      <p:sp>
+        <p:nvSpPr>
+          <p:cNvPr id="12" name="T40/card/region-1/title"/>
+          <p:cNvSpPr/>
+          <p:nvPr/>
+        </p:nvSpPr>
+        <p:spPr>
+          <a:xfrm>
+            <a:off x="581025" y="4005358"/>
+            <a:ext cx="5219700" cy="295275"/>
           </a:xfrm>
           <a:prstGeom prst="rect">
             <a:avLst/>
@@ -6111,35 +5925,35 @@
           <a:p>
             <a:pPr algn="l" indent="0" marL="0">
               <a:lnSpc>
-                <a:spcPts val="2070"/>
-              </a:lnSpc>
-              <a:buNone/>
-            </a:pPr>
-            <a:r>
-              <a:rPr lang="zh-CN" altLang="en-US" sz="1800" b="1" dirty="0">
-                <a:solidFill>
-                  <a:srgbClr val="FFFFFF"/>
-                </a:solidFill>
-                <a:latin typeface="Noto Sans CJK SC" pitchFamily="34" charset="0"/>
-                <a:ea typeface="Noto Sans CJK SC" pitchFamily="34" charset="-122"/>
-                <a:cs typeface="Noto Sans CJK SC" pitchFamily="34" charset="-120"/>
-              </a:rPr>
-              <a:t>外部效度</a:t>
-            </a:r>
-            <a:endParaRPr lang="zh-CN" sz="1800" dirty="0"/>
+                <a:spcPts val="2242"/>
+              </a:lnSpc>
+              <a:buNone/>
+            </a:pPr>
+            <a:r>
+              <a:rPr lang="zh-CN" altLang="en-US" sz="1950" b="1" dirty="0">
+                <a:solidFill>
+                  <a:srgbClr val="235E96"/>
+                </a:solidFill>
+                <a:latin typeface="Noto Sans CJK SC" pitchFamily="34" charset="0"/>
+                <a:ea typeface="Noto Sans CJK SC" pitchFamily="34" charset="-122"/>
+                <a:cs typeface="Noto Sans CJK SC" pitchFamily="34" charset="-120"/>
+              </a:rPr>
+              <a:t>内部效度</a:t>
+            </a:r>
+            <a:endParaRPr lang="zh-CN" sz="1950" dirty="0"/>
           </a:p>
         </p:txBody>
       </p:sp>
       <p:sp>
         <p:nvSpPr>
-          <p:cNvPr id="17" name="T40/card/region-2/body"/>
-          <p:cNvSpPr/>
-          <p:nvPr/>
-        </p:nvSpPr>
-        <p:spPr>
-          <a:xfrm>
-            <a:off x="8858250" y="4215765"/>
-            <a:ext cx="2743200" cy="1689735"/>
+          <p:cNvPr id="13" name="T40/card/region-1/body"/>
+          <p:cNvSpPr/>
+          <p:nvPr/>
+        </p:nvSpPr>
+        <p:spPr>
+          <a:xfrm>
+            <a:off x="590550" y="4443508"/>
+            <a:ext cx="5200650" cy="1120331"/>
           </a:xfrm>
           <a:prstGeom prst="rect">
             <a:avLst/>
@@ -6153,12 +5967,29 @@
           <a:p>
             <a:pPr algn="l" indent="0" marL="0">
               <a:lnSpc>
-                <a:spcPts val="2139"/>
-              </a:lnSpc>
-              <a:buNone/>
-            </a:pPr>
-            <a:r>
-              <a:rPr lang="zh-CN" altLang="en-US" sz="1725" dirty="0">
+                <a:spcPts val="2232"/>
+              </a:lnSpc>
+              <a:buNone/>
+            </a:pPr>
+            <a:r>
+              <a:rPr lang="zh-CN" altLang="en-US" sz="1800" b="1" dirty="0">
+                <a:solidFill>
+                  <a:srgbClr val="235E96"/>
+                </a:solidFill>
+                <a:latin typeface="Noto Sans CJK SC" pitchFamily="34" charset="0"/>
+                <a:ea typeface="Noto Sans CJK SC" pitchFamily="34" charset="-122"/>
+                <a:cs typeface="Noto Sans CJK SC" pitchFamily="34" charset="-120"/>
+              </a:rPr>
+              <a:t>对照</a:t>
+            </a:r>
+            <a:pPr algn="l" indent="0" marL="0">
+              <a:lnSpc>
+                <a:spcPts val="2232"/>
+              </a:lnSpc>
+              <a:buNone/>
+            </a:pPr>
+            <a:r>
+              <a:rPr lang="zh-CN" altLang="en-US" sz="1800" dirty="0">
                 <a:solidFill>
                   <a:srgbClr val="1C2430"/>
                 </a:solidFill>
@@ -6166,19 +5997,19 @@
                 <a:ea typeface="Noto Sans CJK SC" pitchFamily="34" charset="-122"/>
                 <a:cs typeface="Noto Sans CJK SC" pitchFamily="34" charset="-120"/>
               </a:rPr>
-              <a:t>研究样本代表哪些对象和条</a:t>
-            </a:r>
-            <a:endParaRPr lang="zh-CN" sz="1725" dirty="0"/>
+              <a:t>是否隔离了目标干预</a:t>
+            </a:r>
+            <a:endParaRPr lang="zh-CN" sz="1800" dirty="0"/>
           </a:p>
           <a:p>
             <a:pPr algn="l" indent="0" marL="0">
               <a:lnSpc>
-                <a:spcPts val="2139"/>
-              </a:lnSpc>
-              <a:buNone/>
-            </a:pPr>
-            <a:r>
-              <a:rPr lang="zh-CN" altLang="en-US" sz="1725" dirty="0">
+                <a:spcPts val="2232"/>
+              </a:lnSpc>
+              <a:buNone/>
+            </a:pPr>
+            <a:r>
+              <a:rPr lang="zh-CN" altLang="en-US" sz="1800" dirty="0">
                 <a:solidFill>
                   <a:srgbClr val="1C2430"/>
                 </a:solidFill>
@@ -6186,62 +6017,143 @@
                 <a:ea typeface="Noto Sans CJK SC" pitchFamily="34" charset="-122"/>
                 <a:cs typeface="Noto Sans CJK SC" pitchFamily="34" charset="-120"/>
               </a:rPr>
-              <a:t>件</a:t>
-            </a:r>
-            <a:endParaRPr lang="zh-CN" sz="1725" dirty="0"/>
-          </a:p>
-          <a:p>
-            <a:pPr algn="l" indent="0" marL="0">
-              <a:lnSpc>
-                <a:spcPts val="2139"/>
-              </a:lnSpc>
-              <a:buNone/>
-            </a:pPr>
-            <a:r>
-              <a:rPr lang="zh-CN" altLang="en-US" sz="1725" dirty="0">
-                <a:solidFill>
-                  <a:srgbClr val="1C2430"/>
-                </a:solidFill>
-                <a:latin typeface="Noto Sans CJK SC" pitchFamily="34" charset="0"/>
-                <a:ea typeface="Noto Sans CJK SC" pitchFamily="34" charset="-122"/>
-                <a:cs typeface="Noto Sans CJK SC" pitchFamily="34" charset="-120"/>
-              </a:rPr>
-              <a:t>明确跨地点、年份和管理制</a:t>
-            </a:r>
-            <a:endParaRPr lang="zh-CN" sz="1725" dirty="0"/>
-          </a:p>
-          <a:p>
-            <a:pPr algn="l" indent="0" marL="0">
-              <a:lnSpc>
-                <a:spcPts val="2139"/>
-              </a:lnSpc>
-              <a:buNone/>
-            </a:pPr>
-            <a:r>
-              <a:rPr lang="zh-CN" altLang="en-US" sz="1725" dirty="0">
-                <a:solidFill>
-                  <a:srgbClr val="1C2430"/>
-                </a:solidFill>
-                <a:latin typeface="Noto Sans CJK SC" pitchFamily="34" charset="0"/>
-                <a:ea typeface="Noto Sans CJK SC" pitchFamily="34" charset="-122"/>
-                <a:cs typeface="Noto Sans CJK SC" pitchFamily="34" charset="-120"/>
-              </a:rPr>
-              <a:t>度的限制</a:t>
-            </a:r>
-            <a:endParaRPr lang="zh-CN" sz="1725" dirty="0"/>
+              <a:t>检查混杂、泄漏与测量不一致</a:t>
+            </a:r>
+            <a:endParaRPr lang="zh-CN" sz="1800" dirty="0"/>
           </a:p>
         </p:txBody>
       </p:sp>
       <p:sp>
         <p:nvSpPr>
-          <p:cNvPr id="18" name="T40/sources"/>
-          <p:cNvSpPr/>
-          <p:nvPr/>
-        </p:nvSpPr>
-        <p:spPr>
-          <a:xfrm>
-            <a:off x="457200" y="6286500"/>
-            <a:ext cx="11277600" cy="228600"/>
+          <p:cNvPr id="14" name="T40/card/region-2/frame"/>
+          <p:cNvSpPr/>
+          <p:nvPr/>
+        </p:nvSpPr>
+        <p:spPr>
+          <a:xfrm>
+            <a:off x="6248400" y="3957733"/>
+            <a:ext cx="5486400" cy="1701356"/>
+          </a:xfrm>
+          <a:prstGeom prst="rect">
+            <a:avLst/>
+          </a:prstGeom>
+          <a:solidFill>
+            <a:srgbClr val="EAF2FA"/>
+          </a:solidFill>
+          <a:ln w="12383">
+            <a:solidFill>
+              <a:srgbClr val="235E96"/>
+            </a:solidFill>
+            <a:prstDash val="dash"/>
+          </a:ln>
+        </p:spPr>
+      </p:sp>
+      <p:sp>
+        <p:nvSpPr>
+          <p:cNvPr id="15" name="T40/card/region-2/corner-white"/>
+          <p:cNvSpPr/>
+          <p:nvPr/>
+        </p:nvSpPr>
+        <p:spPr>
+          <a:xfrm>
+            <a:off x="11468100" y="3957733"/>
+            <a:ext cx="266700" cy="266700"/>
+          </a:xfrm>
+          <a:prstGeom prst="rect">
+            <a:avLst/>
+          </a:prstGeom>
+          <a:solidFill>
+            <a:srgbClr val="FFFFFF"/>
+          </a:solidFill>
+          <a:ln w="12700">
+            <a:solidFill>
+              <a:srgbClr val="FFFFFF">
+                <a:alpha val="0"/>
+              </a:srgbClr>
+            </a:solidFill>
+            <a:prstDash val="solid"/>
+          </a:ln>
+        </p:spPr>
+      </p:sp>
+      <p:sp>
+        <p:nvSpPr>
+          <p:cNvPr id="16" name="T40/card/region-2/fold-diagonal"/>
+          <p:cNvSpPr/>
+          <p:nvPr/>
+        </p:nvSpPr>
+        <p:spPr>
+          <a:xfrm>
+            <a:off x="11468100" y="3957733"/>
+            <a:ext cx="266700" cy="266700"/>
+          </a:xfrm>
+          <a:prstGeom prst="line">
+            <a:avLst/>
+          </a:prstGeom>
+          <a:noFill/>
+          <a:ln w="13335">
+            <a:solidFill>
+              <a:srgbClr val="235E96"/>
+            </a:solidFill>
+            <a:prstDash val="solid"/>
+          </a:ln>
+        </p:spPr>
+      </p:sp>
+      <p:sp>
+        <p:nvSpPr>
+          <p:cNvPr id="17" name="T40/card/region-2/fold-left"/>
+          <p:cNvSpPr/>
+          <p:nvPr/>
+        </p:nvSpPr>
+        <p:spPr>
+          <a:xfrm>
+            <a:off x="11468100" y="3957733"/>
+            <a:ext cx="0" cy="266700"/>
+          </a:xfrm>
+          <a:prstGeom prst="line">
+            <a:avLst/>
+          </a:prstGeom>
+          <a:noFill/>
+          <a:ln w="13335">
+            <a:solidFill>
+              <a:srgbClr val="235E96"/>
+            </a:solidFill>
+            <a:prstDash val="solid"/>
+          </a:ln>
+        </p:spPr>
+      </p:sp>
+      <p:sp>
+        <p:nvSpPr>
+          <p:cNvPr id="18" name="T40/card/region-2/fold-bottom"/>
+          <p:cNvSpPr/>
+          <p:nvPr/>
+        </p:nvSpPr>
+        <p:spPr>
+          <a:xfrm>
+            <a:off x="11468100" y="4224433"/>
+            <a:ext cx="266700" cy="0"/>
+          </a:xfrm>
+          <a:prstGeom prst="line">
+            <a:avLst/>
+          </a:prstGeom>
+          <a:noFill/>
+          <a:ln w="13335">
+            <a:solidFill>
+              <a:srgbClr val="235E96"/>
+            </a:solidFill>
+            <a:prstDash val="solid"/>
+          </a:ln>
+        </p:spPr>
+      </p:sp>
+      <p:sp>
+        <p:nvSpPr>
+          <p:cNvPr id="19" name="T40/card/region-2/title"/>
+          <p:cNvSpPr/>
+          <p:nvPr/>
+        </p:nvSpPr>
+        <p:spPr>
+          <a:xfrm>
+            <a:off x="6438900" y="4119658"/>
+            <a:ext cx="4914900" cy="361950"/>
           </a:xfrm>
           <a:prstGeom prst="rect">
             <a:avLst/>
@@ -6255,6 +6167,152 @@
           <a:p>
             <a:pPr algn="l" indent="0" marL="0">
               <a:lnSpc>
+                <a:spcPts val="2242"/>
+              </a:lnSpc>
+              <a:buNone/>
+            </a:pPr>
+            <a:r>
+              <a:rPr lang="zh-CN" altLang="en-US" sz="1950" b="1" dirty="0">
+                <a:solidFill>
+                  <a:srgbClr val="235E96"/>
+                </a:solidFill>
+                <a:latin typeface="Noto Sans CJK SC" pitchFamily="34" charset="0"/>
+                <a:ea typeface="Noto Sans CJK SC" pitchFamily="34" charset="-122"/>
+                <a:cs typeface="Noto Sans CJK SC" pitchFamily="34" charset="-120"/>
+              </a:rPr>
+              <a:t>外部效度</a:t>
+            </a:r>
+            <a:endParaRPr lang="zh-CN" sz="1950" dirty="0"/>
+          </a:p>
+        </p:txBody>
+      </p:sp>
+      <p:sp>
+        <p:nvSpPr>
+          <p:cNvPr id="20" name="T40/card/region-2/body"/>
+          <p:cNvSpPr/>
+          <p:nvPr/>
+        </p:nvSpPr>
+        <p:spPr>
+          <a:xfrm>
+            <a:off x="6438900" y="4576858"/>
+            <a:ext cx="5105400" cy="891731"/>
+          </a:xfrm>
+          <a:prstGeom prst="rect">
+            <a:avLst/>
+          </a:prstGeom>
+          <a:noFill/>
+          <a:ln/>
+        </p:spPr>
+        <p:txBody>
+          <a:bodyPr wrap="none" lIns="0" tIns="0" rIns="0" bIns="0" rtlCol="0" anchor="t"/>
+          <a:lstStyle/>
+          <a:p>
+            <a:pPr algn="l" indent="0" marL="0">
+              <a:lnSpc>
+                <a:spcPts val="2232"/>
+              </a:lnSpc>
+              <a:buNone/>
+            </a:pPr>
+            <a:r>
+              <a:rPr lang="zh-CN" altLang="en-US" sz="1800" dirty="0">
+                <a:solidFill>
+                  <a:srgbClr val="1C2430"/>
+                </a:solidFill>
+                <a:latin typeface="Noto Sans CJK SC" pitchFamily="34" charset="0"/>
+                <a:ea typeface="Noto Sans CJK SC" pitchFamily="34" charset="-122"/>
+                <a:cs typeface="Noto Sans CJK SC" pitchFamily="34" charset="-120"/>
+              </a:rPr>
+              <a:t>研究样本代表哪些对象和条件</a:t>
+            </a:r>
+            <a:endParaRPr lang="zh-CN" sz="1800" dirty="0"/>
+          </a:p>
+          <a:p>
+            <a:pPr algn="l" indent="0" marL="0">
+              <a:lnSpc>
+                <a:spcPts val="2232"/>
+              </a:lnSpc>
+              <a:buNone/>
+            </a:pPr>
+            <a:r>
+              <a:rPr lang="zh-CN" altLang="en-US" sz="1800" dirty="0">
+                <a:solidFill>
+                  <a:srgbClr val="1C2430"/>
+                </a:solidFill>
+                <a:latin typeface="Noto Sans CJK SC" pitchFamily="34" charset="0"/>
+                <a:ea typeface="Noto Sans CJK SC" pitchFamily="34" charset="-122"/>
+                <a:cs typeface="Noto Sans CJK SC" pitchFamily="34" charset="-120"/>
+              </a:rPr>
+              <a:t>明确跨地点、年份和管理制度的限制</a:t>
+            </a:r>
+            <a:endParaRPr lang="zh-CN" sz="1800" dirty="0"/>
+          </a:p>
+        </p:txBody>
+      </p:sp>
+      <p:sp>
+        <p:nvSpPr>
+          <p:cNvPr id="21" name="T40/takeaway"/>
+          <p:cNvSpPr/>
+          <p:nvPr/>
+        </p:nvSpPr>
+        <p:spPr>
+          <a:xfrm>
+            <a:off x="457200" y="5773388"/>
+            <a:ext cx="11277600" cy="356045"/>
+          </a:xfrm>
+          <a:prstGeom prst="rect">
+            <a:avLst/>
+          </a:prstGeom>
+          <a:noFill/>
+          <a:ln/>
+        </p:spPr>
+        <p:txBody>
+          <a:bodyPr wrap="none" lIns="0" tIns="0" rIns="0" bIns="0" rtlCol="0" anchor="t"/>
+          <a:lstStyle/>
+          <a:p>
+            <a:pPr algn="l" indent="0" marL="0">
+              <a:lnSpc>
+                <a:spcPts val="2160"/>
+              </a:lnSpc>
+              <a:buNone/>
+            </a:pPr>
+            <a:r>
+              <a:rPr lang="zh-CN" altLang="en-US" sz="1800" b="1" dirty="0">
+                <a:solidFill>
+                  <a:srgbClr val="173C70"/>
+                </a:solidFill>
+                <a:latin typeface="Noto Sans CJK SC" pitchFamily="34" charset="0"/>
+                <a:ea typeface="Noto Sans CJK SC" pitchFamily="34" charset="-122"/>
+                <a:cs typeface="Noto Sans CJK SC" pitchFamily="34" charset="-120"/>
+              </a:rPr>
+              <a:t>解释必须由本页证据支持，并保留样本、对照与适用条件。</a:t>
+            </a:r>
+            <a:endParaRPr lang="zh-CN" sz="1800" dirty="0"/>
+          </a:p>
+        </p:txBody>
+      </p:sp>
+      <p:sp>
+        <p:nvSpPr>
+          <p:cNvPr id="22" name="T40/sources"/>
+          <p:cNvSpPr/>
+          <p:nvPr/>
+        </p:nvSpPr>
+        <p:spPr>
+          <a:xfrm>
+            <a:off x="457200" y="6286500"/>
+            <a:ext cx="11277600" cy="228600"/>
+          </a:xfrm>
+          <a:prstGeom prst="rect">
+            <a:avLst/>
+          </a:prstGeom>
+          <a:noFill/>
+          <a:ln/>
+        </p:spPr>
+        <p:txBody>
+          <a:bodyPr wrap="none" lIns="0" tIns="0" rIns="0" bIns="0" rtlCol="0" anchor="t"/>
+          <a:lstStyle/>
+          <a:p>
+            <a:pPr algn="l" indent="0" marL="0">
+              <a:lnSpc>
                 <a:spcPts val="1283"/>
               </a:lnSpc>
               <a:buNone/>
@@ -6268,7 +6326,7 @@
                 <a:ea typeface="Noto Sans CJK SC" pitchFamily="34" charset="-122"/>
                 <a:cs typeface="Noto Sans CJK SC" pitchFamily="34" charset="-120"/>
               </a:rPr>
-              <a:t>T1 · 2026 · 待替换</a:t>
+              <a:t>T1 · 2026 · 书目占位；图表均为合成示例</a:t>
             </a:r>
             <a:endParaRPr lang="zh-CN" sz="1125" dirty="0"/>
           </a:p>
@@ -6377,14 +6435,14 @@
       </p:sp>
       <p:sp>
         <p:nvSpPr>
-          <p:cNvPr id="4" name="T41/kicker"/>
-          <p:cNvSpPr/>
-          <p:nvPr/>
-        </p:nvSpPr>
-        <p:spPr>
-          <a:xfrm>
-            <a:off x="457200" y="152400"/>
-            <a:ext cx="11277600" cy="190500"/>
+          <p:cNvPr id="4" name="T41/title"/>
+          <p:cNvSpPr/>
+          <p:nvPr/>
+        </p:nvSpPr>
+        <p:spPr>
+          <a:xfrm>
+            <a:off x="457200" y="209550"/>
+            <a:ext cx="11277600" cy="438150"/>
           </a:xfrm>
           <a:prstGeom prst="rect">
             <a:avLst/>
@@ -6398,83 +6456,64 @@
           <a:p>
             <a:pPr algn="l" indent="0" marL="0">
               <a:lnSpc>
-                <a:spcPts val="1320"/>
-              </a:lnSpc>
-              <a:buNone/>
-            </a:pPr>
-            <a:r>
-              <a:rPr lang="zh-CN" altLang="en-US" sz="1200" dirty="0">
-                <a:solidFill>
-                  <a:srgbClr val="515B68"/>
-                </a:solidFill>
-                <a:latin typeface="Noto Sans CJK SC" pitchFamily="34" charset="0"/>
-                <a:ea typeface="Noto Sans CJK SC" pitchFamily="34" charset="-122"/>
-                <a:cs typeface="Noto Sans CJK SC" pitchFamily="34" charset="-120"/>
-              </a:rPr>
-              <a:t>结构模板 / 占位说明与合成数据</a:t>
-            </a:r>
-            <a:endParaRPr lang="zh-CN" sz="1200" dirty="0"/>
+                <a:spcPts val="3360"/>
+              </a:lnSpc>
+              <a:buNone/>
+            </a:pPr>
+            <a:r>
+              <a:rPr lang="zh-CN" altLang="en-US" sz="3000" b="1" dirty="0">
+                <a:solidFill>
+                  <a:srgbClr val="1C2430"/>
+                </a:solidFill>
+                <a:latin typeface="Noto Sans CJK SC" pitchFamily="34" charset="0"/>
+                <a:ea typeface="Noto Sans CJK SC" pitchFamily="34" charset="-122"/>
+                <a:cs typeface="Noto Sans CJK SC" pitchFamily="34" charset="-120"/>
+              </a:rPr>
+              <a:t>风险触发与干预条件</a:t>
+            </a:r>
+            <a:endParaRPr lang="zh-CN" sz="3000" dirty="0"/>
           </a:p>
         </p:txBody>
       </p:sp>
       <p:sp>
         <p:nvSpPr>
-          <p:cNvPr id="5" name="T41/title"/>
-          <p:cNvSpPr/>
-          <p:nvPr/>
-        </p:nvSpPr>
-        <p:spPr>
-          <a:xfrm>
-            <a:off x="457200" y="381000"/>
-            <a:ext cx="11277600" cy="400050"/>
-          </a:xfrm>
-          <a:prstGeom prst="rect">
-            <a:avLst/>
-          </a:prstGeom>
-          <a:noFill/>
-          <a:ln/>
-        </p:spPr>
-        <p:txBody>
-          <a:bodyPr wrap="none" lIns="0" tIns="0" rIns="0" bIns="0" rtlCol="0" anchor="t"/>
-          <a:lstStyle/>
-          <a:p>
-            <a:pPr algn="l" indent="0" marL="0">
-              <a:lnSpc>
-                <a:spcPts val="2856"/>
-              </a:lnSpc>
-              <a:buNone/>
-            </a:pPr>
-            <a:r>
-              <a:rPr lang="zh-CN" altLang="en-US" sz="2550" b="1" dirty="0">
-                <a:solidFill>
-                  <a:srgbClr val="1C2430"/>
-                </a:solidFill>
-                <a:latin typeface="Noto Sans CJK SC" pitchFamily="34" charset="0"/>
-                <a:ea typeface="Noto Sans CJK SC" pitchFamily="34" charset="-122"/>
-                <a:cs typeface="Noto Sans CJK SC" pitchFamily="34" charset="-120"/>
-              </a:rPr>
-              <a:t>风险触发与干预条件</a:t>
-            </a:r>
-            <a:endParaRPr lang="zh-CN" sz="2550" dirty="0"/>
-          </a:p>
-        </p:txBody>
-      </p:sp>
-      <p:sp>
-        <p:nvSpPr>
-          <p:cNvPr id="6" name="T41/header-rule"/>
-          <p:cNvSpPr/>
-          <p:nvPr/>
-        </p:nvSpPr>
-        <p:spPr>
-          <a:xfrm>
-            <a:off x="457200" y="876300"/>
+          <p:cNvPr id="5" name="T41/header-rule"/>
+          <p:cNvSpPr/>
+          <p:nvPr/>
+        </p:nvSpPr>
+        <p:spPr>
+          <a:xfrm>
+            <a:off x="457200" y="752475"/>
             <a:ext cx="11277600" cy="0"/>
           </a:xfrm>
           <a:prstGeom prst="line">
             <a:avLst/>
           </a:prstGeom>
           <a:noFill/>
-          <a:ln w="11430">
+          <a:ln w="10478">
+            <a:solidFill>
+              <a:srgbClr val="BEC8D4"/>
+            </a:solidFill>
+            <a:prstDash val="solid"/>
+          </a:ln>
+        </p:spPr>
+      </p:sp>
+      <p:sp>
+        <p:nvSpPr>
+          <p:cNvPr id="6" name="T41/header-accent"/>
+          <p:cNvSpPr/>
+          <p:nvPr/>
+        </p:nvSpPr>
+        <p:spPr>
+          <a:xfrm>
+            <a:off x="457200" y="752475"/>
+            <a:ext cx="704850" cy="0"/>
+          </a:xfrm>
+          <a:prstGeom prst="line">
+            <a:avLst/>
+          </a:prstGeom>
+          <a:noFill/>
+          <a:ln w="28575">
             <a:solidFill>
               <a:srgbClr val="173C70"/>
             </a:solidFill>
@@ -6490,8 +6529,8 @@
         </p:nvSpPr>
         <p:spPr>
           <a:xfrm>
-            <a:off x="457200" y="1352550"/>
-            <a:ext cx="7410450" cy="3371850"/>
+            <a:off x="457200" y="1167194"/>
+            <a:ext cx="7410450" cy="3501581"/>
           </a:xfrm>
           <a:prstGeom prst="rect">
             <a:avLst/>
@@ -6515,14 +6554,14 @@
         </p:nvSpPr>
         <p:spPr>
           <a:xfrm>
-            <a:off x="466725" y="1428750"/>
+            <a:off x="466725" y="1243394"/>
             <a:ext cx="47625" cy="276225"/>
           </a:xfrm>
           <a:prstGeom prst="rect">
             <a:avLst/>
           </a:prstGeom>
           <a:solidFill>
-            <a:srgbClr val="173C70"/>
+            <a:srgbClr val="235E96"/>
           </a:solidFill>
           <a:ln w="12700">
             <a:solidFill>
@@ -6542,8 +6581,8 @@
         </p:nvSpPr>
         <p:spPr>
           <a:xfrm>
-            <a:off x="609600" y="1409700"/>
-            <a:ext cx="7105650" cy="295275"/>
+            <a:off x="609600" y="1214819"/>
+            <a:ext cx="7105650" cy="304800"/>
           </a:xfrm>
           <a:prstGeom prst="rect">
             <a:avLst/>
@@ -6557,14 +6596,14 @@
           <a:p>
             <a:pPr algn="l" indent="0" marL="0">
               <a:lnSpc>
-                <a:spcPts val="2070"/>
-              </a:lnSpc>
-              <a:buNone/>
-            </a:pPr>
-            <a:r>
-              <a:rPr lang="zh-CN" altLang="en-US" sz="1800" b="1" dirty="0">
-                <a:solidFill>
-                  <a:srgbClr val="173C70"/>
+                <a:spcPts val="2242"/>
+              </a:lnSpc>
+              <a:buNone/>
+            </a:pPr>
+            <a:r>
+              <a:rPr lang="zh-CN" altLang="en-US" sz="1950" b="1" dirty="0">
+                <a:solidFill>
+                  <a:srgbClr val="235E96"/>
                 </a:solidFill>
                 <a:latin typeface="Noto Sans CJK SC" pitchFamily="34" charset="0"/>
                 <a:ea typeface="Noto Sans CJK SC" pitchFamily="34" charset="-122"/>
@@ -6572,7 +6611,7 @@
               </a:rPr>
               <a:t>触发、核验与记录</a:t>
             </a:r>
-            <a:endParaRPr lang="zh-CN" sz="1800" dirty="0"/>
+            <a:endParaRPr lang="zh-CN" sz="1950" dirty="0"/>
           </a:p>
         </p:txBody>
       </p:sp>
@@ -6584,7 +6623,7 @@
         </p:nvSpPr>
         <p:spPr>
           <a:xfrm>
-            <a:off x="2590800" y="2390775"/>
+            <a:off x="2590800" y="2245328"/>
             <a:ext cx="609600" cy="0"/>
           </a:xfrm>
           <a:prstGeom prst="line">
@@ -6608,7 +6647,7 @@
         </p:nvSpPr>
         <p:spPr>
           <a:xfrm>
-            <a:off x="5200650" y="2390775"/>
+            <a:off x="5200650" y="2245328"/>
             <a:ext cx="495300" cy="0"/>
           </a:xfrm>
           <a:prstGeom prst="line">
@@ -6632,8 +6671,8 @@
         </p:nvSpPr>
         <p:spPr>
           <a:xfrm>
-            <a:off x="6705600" y="2876550"/>
-            <a:ext cx="0" cy="438150"/>
+            <a:off x="6705600" y="2749772"/>
+            <a:ext cx="0" cy="455009"/>
           </a:xfrm>
           <a:prstGeom prst="line">
             <a:avLst/>
@@ -6655,7 +6694,7 @@
         </p:nvSpPr>
         <p:spPr>
           <a:xfrm flipH="1">
-            <a:off x="4200525" y="3314700"/>
+            <a:off x="4200525" y="3204782"/>
             <a:ext cx="2505075" cy="0"/>
           </a:xfrm>
           <a:prstGeom prst="line">
@@ -6678,8 +6717,8 @@
         </p:nvSpPr>
         <p:spPr>
           <a:xfrm>
-            <a:off x="4200525" y="3314700"/>
-            <a:ext cx="0" cy="438150"/>
+            <a:off x="4200525" y="3204782"/>
+            <a:ext cx="0" cy="455009"/>
           </a:xfrm>
           <a:prstGeom prst="line">
             <a:avLst/>
@@ -6702,7 +6741,7 @@
         </p:nvSpPr>
         <p:spPr>
           <a:xfrm flipH="1">
-            <a:off x="466725" y="4162425"/>
+            <a:off x="466725" y="4085130"/>
             <a:ext cx="2733675" cy="0"/>
           </a:xfrm>
           <a:prstGeom prst="line">
@@ -6725,8 +6764,8 @@
         </p:nvSpPr>
         <p:spPr>
           <a:xfrm flipV="1">
-            <a:off x="466725" y="2390775"/>
-            <a:ext cx="0" cy="1771650"/>
+            <a:off x="466725" y="2245328"/>
+            <a:ext cx="0" cy="1839801"/>
           </a:xfrm>
           <a:prstGeom prst="line">
             <a:avLst/>
@@ -6748,7 +6787,7 @@
         </p:nvSpPr>
         <p:spPr>
           <a:xfrm>
-            <a:off x="466725" y="2390775"/>
+            <a:off x="466725" y="2245328"/>
             <a:ext cx="123825" cy="0"/>
           </a:xfrm>
           <a:prstGeom prst="line">
@@ -6772,14 +6811,14 @@
         </p:nvSpPr>
         <p:spPr>
           <a:xfrm>
-            <a:off x="590550" y="1905000"/>
-            <a:ext cx="2000250" cy="971550"/>
+            <a:off x="590550" y="1740884"/>
+            <a:ext cx="2000250" cy="1008888"/>
           </a:xfrm>
           <a:prstGeom prst="rect">
             <a:avLst/>
           </a:prstGeom>
           <a:solidFill>
-            <a:srgbClr val="FFFFFF"/>
+            <a:srgbClr val="FAEEE8"/>
           </a:solidFill>
           <a:ln w="11430">
             <a:solidFill>
@@ -6797,7 +6836,7 @@
         </p:nvSpPr>
         <p:spPr>
           <a:xfrm>
-            <a:off x="590550" y="1905000"/>
+            <a:off x="590550" y="1740884"/>
             <a:ext cx="2000250" cy="0"/>
           </a:xfrm>
           <a:prstGeom prst="line">
@@ -6806,7 +6845,7 @@
           <a:noFill/>
           <a:ln w="19050">
             <a:solidFill>
-              <a:srgbClr val="173C70"/>
+              <a:srgbClr val="A24736"/>
             </a:solidFill>
             <a:prstDash val="solid"/>
           </a:ln>
@@ -6820,7 +6859,7 @@
         </p:nvSpPr>
         <p:spPr>
           <a:xfrm>
-            <a:off x="704850" y="2257425"/>
+            <a:off x="704850" y="2111978"/>
             <a:ext cx="1771650" cy="266700"/>
           </a:xfrm>
           <a:prstGeom prst="rect">
@@ -6842,7 +6881,7 @@
             <a:r>
               <a:rPr lang="zh-CN" altLang="en-US" sz="1800" b="1" dirty="0">
                 <a:solidFill>
-                  <a:srgbClr val="173C70"/>
+                  <a:srgbClr val="A24736"/>
                 </a:solidFill>
                 <a:latin typeface="Noto Sans CJK SC" pitchFamily="34" charset="0"/>
                 <a:ea typeface="Noto Sans CJK SC" pitchFamily="34" charset="-122"/>
@@ -6862,14 +6901,14 @@
         </p:nvSpPr>
         <p:spPr>
           <a:xfrm>
-            <a:off x="3200400" y="1905000"/>
-            <a:ext cx="2000250" cy="971550"/>
+            <a:off x="3200400" y="1740884"/>
+            <a:ext cx="2000250" cy="1008888"/>
           </a:xfrm>
           <a:prstGeom prst="rect">
             <a:avLst/>
           </a:prstGeom>
           <a:solidFill>
-            <a:srgbClr val="FFFFFF"/>
+            <a:srgbClr val="EAF2FA"/>
           </a:solidFill>
           <a:ln w="11430">
             <a:solidFill>
@@ -6887,7 +6926,7 @@
         </p:nvSpPr>
         <p:spPr>
           <a:xfrm>
-            <a:off x="3200400" y="1905000"/>
+            <a:off x="3200400" y="1740884"/>
             <a:ext cx="2000250" cy="0"/>
           </a:xfrm>
           <a:prstGeom prst="line">
@@ -6896,7 +6935,7 @@
           <a:noFill/>
           <a:ln w="19050">
             <a:solidFill>
-              <a:srgbClr val="173C70"/>
+              <a:srgbClr val="235E96"/>
             </a:solidFill>
             <a:prstDash val="solid"/>
           </a:ln>
@@ -6910,7 +6949,7 @@
         </p:nvSpPr>
         <p:spPr>
           <a:xfrm>
-            <a:off x="3314700" y="2257425"/>
+            <a:off x="3314700" y="2111978"/>
             <a:ext cx="1771650" cy="266700"/>
           </a:xfrm>
           <a:prstGeom prst="rect">
@@ -6932,7 +6971,7 @@
             <a:r>
               <a:rPr lang="zh-CN" altLang="en-US" sz="1800" b="1" dirty="0">
                 <a:solidFill>
-                  <a:srgbClr val="173C70"/>
+                  <a:srgbClr val="235E96"/>
                 </a:solidFill>
                 <a:latin typeface="Noto Sans CJK SC" pitchFamily="34" charset="0"/>
                 <a:ea typeface="Noto Sans CJK SC" pitchFamily="34" charset="-122"/>
@@ -6952,14 +6991,14 @@
         </p:nvSpPr>
         <p:spPr>
           <a:xfrm>
-            <a:off x="5695950" y="1905000"/>
-            <a:ext cx="2019300" cy="971550"/>
+            <a:off x="5695950" y="1740884"/>
+            <a:ext cx="2019300" cy="1008888"/>
           </a:xfrm>
           <a:prstGeom prst="rect">
             <a:avLst/>
           </a:prstGeom>
           <a:solidFill>
-            <a:srgbClr val="FFFFFF"/>
+            <a:srgbClr val="E9F4F0"/>
           </a:solidFill>
           <a:ln w="11430">
             <a:solidFill>
@@ -6977,7 +7016,7 @@
         </p:nvSpPr>
         <p:spPr>
           <a:xfrm>
-            <a:off x="5695950" y="1905000"/>
+            <a:off x="5695950" y="1740884"/>
             <a:ext cx="2019300" cy="0"/>
           </a:xfrm>
           <a:prstGeom prst="line">
@@ -6986,7 +7025,7 @@
           <a:noFill/>
           <a:ln w="19050">
             <a:solidFill>
-              <a:srgbClr val="173C70"/>
+              <a:srgbClr val="146C63"/>
             </a:solidFill>
             <a:prstDash val="solid"/>
           </a:ln>
@@ -7000,7 +7039,7 @@
         </p:nvSpPr>
         <p:spPr>
           <a:xfrm>
-            <a:off x="5810250" y="2257425"/>
+            <a:off x="5810250" y="2111978"/>
             <a:ext cx="1790700" cy="266700"/>
           </a:xfrm>
           <a:prstGeom prst="rect">
@@ -7022,7 +7061,7 @@
             <a:r>
               <a:rPr lang="zh-CN" altLang="en-US" sz="1800" b="1" dirty="0">
                 <a:solidFill>
-                  <a:srgbClr val="173C70"/>
+                  <a:srgbClr val="146C63"/>
                 </a:solidFill>
                 <a:latin typeface="Noto Sans CJK SC" pitchFamily="34" charset="0"/>
                 <a:ea typeface="Noto Sans CJK SC" pitchFamily="34" charset="-122"/>
@@ -7042,14 +7081,14 @@
         </p:nvSpPr>
         <p:spPr>
           <a:xfrm>
-            <a:off x="3200400" y="3752850"/>
-            <a:ext cx="2000250" cy="819150"/>
+            <a:off x="3200400" y="3659791"/>
+            <a:ext cx="2000250" cy="850678"/>
           </a:xfrm>
           <a:prstGeom prst="rect">
             <a:avLst/>
           </a:prstGeom>
           <a:solidFill>
-            <a:srgbClr val="FFFFFF"/>
+            <a:srgbClr val="EAF2FA"/>
           </a:solidFill>
           <a:ln w="11430">
             <a:solidFill>
@@ -7067,7 +7106,7 @@
         </p:nvSpPr>
         <p:spPr>
           <a:xfrm>
-            <a:off x="3200400" y="3752850"/>
+            <a:off x="3200400" y="3659791"/>
             <a:ext cx="2000250" cy="0"/>
           </a:xfrm>
           <a:prstGeom prst="line">
@@ -7076,7 +7115,7 @@
           <a:noFill/>
           <a:ln w="19050">
             <a:solidFill>
-              <a:srgbClr val="173C70"/>
+              <a:srgbClr val="235E96"/>
             </a:solidFill>
             <a:prstDash val="solid"/>
           </a:ln>
@@ -7090,7 +7129,7 @@
         </p:nvSpPr>
         <p:spPr>
           <a:xfrm>
-            <a:off x="3314700" y="4029075"/>
+            <a:off x="3314700" y="3951780"/>
             <a:ext cx="1771650" cy="266700"/>
           </a:xfrm>
           <a:prstGeom prst="rect">
@@ -7112,7 +7151,7 @@
             <a:r>
               <a:rPr lang="zh-CN" altLang="en-US" sz="1800" b="1" dirty="0">
                 <a:solidFill>
-                  <a:srgbClr val="173C70"/>
+                  <a:srgbClr val="235E96"/>
                 </a:solidFill>
                 <a:latin typeface="Noto Sans CJK SC" pitchFamily="34" charset="0"/>
                 <a:ea typeface="Noto Sans CJK SC" pitchFamily="34" charset="-122"/>
@@ -7132,8 +7171,8 @@
         </p:nvSpPr>
         <p:spPr>
           <a:xfrm>
-            <a:off x="8134350" y="1504950"/>
-            <a:ext cx="3600450" cy="1981200"/>
+            <a:off x="8134350" y="1321022"/>
+            <a:ext cx="3600450" cy="2061782"/>
           </a:xfrm>
           <a:prstGeom prst="rect">
             <a:avLst/>
@@ -7157,14 +7196,14 @@
         </p:nvSpPr>
         <p:spPr>
           <a:xfrm>
-            <a:off x="8248650" y="1390650"/>
-            <a:ext cx="1638300" cy="320040"/>
+            <a:off x="8248650" y="1206722"/>
+            <a:ext cx="1752600" cy="342900"/>
           </a:xfrm>
           <a:prstGeom prst="rect">
             <a:avLst/>
           </a:prstGeom>
           <a:solidFill>
-            <a:srgbClr val="903543"/>
+            <a:srgbClr val="A24736"/>
           </a:solidFill>
           <a:ln w="12700">
             <a:solidFill>
@@ -7184,8 +7223,8 @@
         </p:nvSpPr>
         <p:spPr>
           <a:xfrm>
-            <a:off x="8353425" y="1419225"/>
-            <a:ext cx="1428750" cy="262890"/>
+            <a:off x="8353425" y="1235297"/>
+            <a:ext cx="1543050" cy="285750"/>
           </a:xfrm>
           <a:prstGeom prst="rect">
             <a:avLst/>
@@ -7199,12 +7238,12 @@
           <a:p>
             <a:pPr algn="l" indent="0" marL="0">
               <a:lnSpc>
-                <a:spcPts val="2070"/>
-              </a:lnSpc>
-              <a:buNone/>
-            </a:pPr>
-            <a:r>
-              <a:rPr lang="zh-CN" altLang="en-US" sz="1800" b="1" dirty="0">
+                <a:spcPts val="2242"/>
+              </a:lnSpc>
+              <a:buNone/>
+            </a:pPr>
+            <a:r>
+              <a:rPr lang="zh-CN" altLang="en-US" sz="1950" b="1" dirty="0">
                 <a:solidFill>
                   <a:srgbClr val="FFFFFF"/>
                 </a:solidFill>
@@ -7214,7 +7253,7 @@
               </a:rPr>
               <a:t>风险触发条件</a:t>
             </a:r>
-            <a:endParaRPr lang="zh-CN" sz="1800" dirty="0"/>
+            <a:endParaRPr lang="zh-CN" sz="1950" dirty="0"/>
           </a:p>
         </p:txBody>
       </p:sp>
@@ -7226,8 +7265,8 @@
         </p:nvSpPr>
         <p:spPr>
           <a:xfrm>
-            <a:off x="8267700" y="1853565"/>
-            <a:ext cx="3333750" cy="1537335"/>
+            <a:off x="8267700" y="1692497"/>
+            <a:ext cx="3333750" cy="1595056"/>
           </a:xfrm>
           <a:prstGeom prst="rect">
             <a:avLst/>
@@ -7241,12 +7280,12 @@
           <a:p>
             <a:pPr algn="l" indent="0" marL="0">
               <a:lnSpc>
-                <a:spcPts val="2139"/>
-              </a:lnSpc>
-              <a:buNone/>
-            </a:pPr>
-            <a:r>
-              <a:rPr lang="zh-CN" altLang="en-US" sz="1725" dirty="0">
+                <a:spcPts val="2232"/>
+              </a:lnSpc>
+              <a:buNone/>
+            </a:pPr>
+            <a:r>
+              <a:rPr lang="zh-CN" altLang="en-US" sz="1800" dirty="0">
                 <a:solidFill>
                   <a:srgbClr val="1C2430"/>
                 </a:solidFill>
@@ -7254,19 +7293,33 @@
                 <a:ea typeface="Noto Sans CJK SC" pitchFamily="34" charset="-122"/>
                 <a:cs typeface="Noto Sans CJK SC" pitchFamily="34" charset="-120"/>
               </a:rPr>
-              <a:t>把失败或不确定性写成可监测信号</a:t>
-            </a:r>
-            <a:endParaRPr lang="zh-CN" sz="1725" dirty="0"/>
-          </a:p>
-          <a:p>
+              <a:t>把失败或</a:t>
+            </a:r>
             <a:pPr algn="l" indent="0" marL="0">
               <a:lnSpc>
-                <a:spcPts val="2139"/>
-              </a:lnSpc>
-              <a:buNone/>
-            </a:pPr>
-            <a:r>
-              <a:rPr lang="zh-CN" altLang="en-US" sz="1725" dirty="0">
+                <a:spcPts val="2232"/>
+              </a:lnSpc>
+              <a:buNone/>
+            </a:pPr>
+            <a:r>
+              <a:rPr lang="zh-CN" altLang="en-US" sz="1800" b="1" dirty="0">
+                <a:solidFill>
+                  <a:srgbClr val="A24736"/>
+                </a:solidFill>
+                <a:latin typeface="Noto Sans CJK SC" pitchFamily="34" charset="0"/>
+                <a:ea typeface="Noto Sans CJK SC" pitchFamily="34" charset="-122"/>
+                <a:cs typeface="Noto Sans CJK SC" pitchFamily="34" charset="-120"/>
+              </a:rPr>
+              <a:t>不确定性</a:t>
+            </a:r>
+            <a:pPr algn="l" indent="0" marL="0">
+              <a:lnSpc>
+                <a:spcPts val="2232"/>
+              </a:lnSpc>
+              <a:buNone/>
+            </a:pPr>
+            <a:r>
+              <a:rPr lang="zh-CN" altLang="en-US" sz="1800" dirty="0">
                 <a:solidFill>
                   <a:srgbClr val="1C2430"/>
                 </a:solidFill>
@@ -7274,9 +7327,49 @@
                 <a:ea typeface="Noto Sans CJK SC" pitchFamily="34" charset="-122"/>
                 <a:cs typeface="Noto Sans CJK SC" pitchFamily="34" charset="-120"/>
               </a:rPr>
+              <a:t>写成可监测信</a:t>
+            </a:r>
+            <a:endParaRPr lang="zh-CN" sz="1800" dirty="0"/>
+          </a:p>
+          <a:p>
+            <a:pPr algn="l" indent="0" marL="0">
+              <a:lnSpc>
+                <a:spcPts val="2232"/>
+              </a:lnSpc>
+              <a:buNone/>
+            </a:pPr>
+            <a:r>
+              <a:rPr lang="zh-CN" altLang="en-US" sz="1800" dirty="0">
+                <a:solidFill>
+                  <a:srgbClr val="1C2430"/>
+                </a:solidFill>
+                <a:latin typeface="Noto Sans CJK SC" pitchFamily="34" charset="0"/>
+                <a:ea typeface="Noto Sans CJK SC" pitchFamily="34" charset="-122"/>
+                <a:cs typeface="Noto Sans CJK SC" pitchFamily="34" charset="-120"/>
+              </a:rPr>
+              <a:t>号</a:t>
+            </a:r>
+            <a:endParaRPr lang="zh-CN" sz="1800" dirty="0"/>
+          </a:p>
+          <a:p>
+            <a:pPr algn="l" indent="0" marL="0">
+              <a:lnSpc>
+                <a:spcPts val="2232"/>
+              </a:lnSpc>
+              <a:buNone/>
+            </a:pPr>
+            <a:r>
+              <a:rPr lang="zh-CN" altLang="en-US" sz="1800" dirty="0">
+                <a:solidFill>
+                  <a:srgbClr val="1C2430"/>
+                </a:solidFill>
+                <a:latin typeface="Noto Sans CJK SC" pitchFamily="34" charset="0"/>
+                <a:ea typeface="Noto Sans CJK SC" pitchFamily="34" charset="-122"/>
+                <a:cs typeface="Noto Sans CJK SC" pitchFamily="34" charset="-120"/>
+              </a:rPr>
               <a:t>提前规定何时停止、复核或回退</a:t>
             </a:r>
-            <a:endParaRPr lang="zh-CN" sz="1725" dirty="0"/>
+            <a:endParaRPr lang="zh-CN" sz="1800" dirty="0"/>
           </a:p>
         </p:txBody>
       </p:sp>
@@ -7288,7 +7381,7 @@
         </p:nvSpPr>
         <p:spPr>
           <a:xfrm>
-            <a:off x="8134350" y="4076700"/>
+            <a:off x="8134350" y="3982212"/>
             <a:ext cx="3600450" cy="0"/>
           </a:xfrm>
           <a:prstGeom prst="line">
@@ -7311,7 +7404,7 @@
         </p:nvSpPr>
         <p:spPr>
           <a:xfrm>
-            <a:off x="8134350" y="4076700"/>
+            <a:off x="8134350" y="3982212"/>
             <a:ext cx="342900" cy="0"/>
           </a:xfrm>
           <a:prstGeom prst="line">
@@ -7320,7 +7413,7 @@
           <a:noFill/>
           <a:ln w="17145">
             <a:solidFill>
-              <a:srgbClr val="173C70"/>
+              <a:srgbClr val="235E96"/>
             </a:solidFill>
             <a:prstDash val="solid"/>
           </a:ln>
@@ -7334,7 +7427,7 @@
         </p:nvSpPr>
         <p:spPr>
           <a:xfrm>
-            <a:off x="8134350" y="3733800"/>
+            <a:off x="8134350" y="3639312"/>
             <a:ext cx="3600450" cy="323850"/>
           </a:xfrm>
           <a:prstGeom prst="rect">
@@ -7349,14 +7442,14 @@
           <a:p>
             <a:pPr algn="l" indent="0" marL="0">
               <a:lnSpc>
-                <a:spcPts val="2156"/>
-              </a:lnSpc>
-              <a:buNone/>
-            </a:pPr>
-            <a:r>
-              <a:rPr lang="zh-CN" altLang="en-US" sz="1875" b="1" dirty="0">
-                <a:solidFill>
-                  <a:srgbClr val="173C70"/>
+                <a:spcPts val="2242"/>
+              </a:lnSpc>
+              <a:buNone/>
+            </a:pPr>
+            <a:r>
+              <a:rPr lang="zh-CN" altLang="en-US" sz="1950" b="1" dirty="0">
+                <a:solidFill>
+                  <a:srgbClr val="235E96"/>
                 </a:solidFill>
                 <a:latin typeface="Noto Sans CJK SC" pitchFamily="34" charset="0"/>
                 <a:ea typeface="Noto Sans CJK SC" pitchFamily="34" charset="-122"/>
@@ -7364,7 +7457,7 @@
               </a:rPr>
               <a:t>人工与计算代价</a:t>
             </a:r>
-            <a:endParaRPr lang="zh-CN" sz="1875" dirty="0"/>
+            <a:endParaRPr lang="zh-CN" sz="1950" dirty="0"/>
           </a:p>
         </p:txBody>
       </p:sp>
@@ -7376,8 +7469,8 @@
         </p:nvSpPr>
         <p:spPr>
           <a:xfrm>
-            <a:off x="8134350" y="4210050"/>
-            <a:ext cx="3600450" cy="1752600"/>
+            <a:off x="8134350" y="4115562"/>
+            <a:ext cx="3600450" cy="1840516"/>
           </a:xfrm>
           <a:prstGeom prst="rect">
             <a:avLst/>
@@ -7438,7 +7531,7 @@
         </p:nvSpPr>
         <p:spPr>
           <a:xfrm>
-            <a:off x="457200" y="5010150"/>
+            <a:off x="457200" y="4964716"/>
             <a:ext cx="7410450" cy="323850"/>
           </a:xfrm>
           <a:prstGeom prst="rect">
@@ -7453,14 +7546,14 @@
           <a:p>
             <a:pPr algn="l" indent="0" marL="0">
               <a:lnSpc>
-                <a:spcPts val="2156"/>
-              </a:lnSpc>
-              <a:buNone/>
-            </a:pPr>
-            <a:r>
-              <a:rPr lang="zh-CN" altLang="en-US" sz="1875" b="1" dirty="0">
-                <a:solidFill>
-                  <a:srgbClr val="903543"/>
+                <a:spcPts val="2242"/>
+              </a:lnSpc>
+              <a:buNone/>
+            </a:pPr>
+            <a:r>
+              <a:rPr lang="zh-CN" altLang="en-US" sz="1950" b="1" dirty="0">
+                <a:solidFill>
+                  <a:srgbClr val="A24736"/>
                 </a:solidFill>
                 <a:latin typeface="Noto Sans CJK SC" pitchFamily="34" charset="0"/>
                 <a:ea typeface="Noto Sans CJK SC" pitchFamily="34" charset="-122"/>
@@ -7468,7 +7561,7 @@
               </a:rPr>
               <a:t>剩余风险</a:t>
             </a:r>
-            <a:endParaRPr lang="zh-CN" sz="1875" dirty="0"/>
+            <a:endParaRPr lang="zh-CN" sz="1950" dirty="0"/>
           </a:p>
         </p:txBody>
       </p:sp>
@@ -7480,8 +7573,8 @@
         </p:nvSpPr>
         <p:spPr>
           <a:xfrm>
-            <a:off x="457200" y="5391150"/>
-            <a:ext cx="7410450" cy="590550"/>
+            <a:off x="457200" y="5345716"/>
+            <a:ext cx="7410450" cy="630079"/>
           </a:xfrm>
           <a:prstGeom prst="rect">
             <a:avLst/>
@@ -7495,12 +7588,12 @@
           <a:p>
             <a:pPr algn="l" indent="0" marL="0">
               <a:lnSpc>
-                <a:spcPts val="2139"/>
-              </a:lnSpc>
-              <a:buNone/>
-            </a:pPr>
-            <a:r>
-              <a:rPr lang="zh-CN" altLang="en-US" sz="1725" dirty="0">
+                <a:spcPts val="2232"/>
+              </a:lnSpc>
+              <a:buNone/>
+            </a:pPr>
+            <a:r>
+              <a:rPr lang="zh-CN" altLang="en-US" sz="1800" dirty="0">
                 <a:solidFill>
                   <a:srgbClr val="1C2430"/>
                 </a:solidFill>
@@ -7510,17 +7603,17 @@
               </a:rPr>
               <a:t>列出核验后仍可能保留的错误</a:t>
             </a:r>
-            <a:endParaRPr lang="zh-CN" sz="1725" dirty="0"/>
+            <a:endParaRPr lang="zh-CN" sz="1800" dirty="0"/>
           </a:p>
           <a:p>
             <a:pPr algn="l" indent="0" marL="0">
               <a:lnSpc>
-                <a:spcPts val="2139"/>
-              </a:lnSpc>
-              <a:buNone/>
-            </a:pPr>
-            <a:r>
-              <a:rPr lang="zh-CN" altLang="en-US" sz="1725" dirty="0">
+                <a:spcPts val="2232"/>
+              </a:lnSpc>
+              <a:buNone/>
+            </a:pPr>
+            <a:r>
+              <a:rPr lang="zh-CN" altLang="en-US" sz="1800" dirty="0">
                 <a:solidFill>
                   <a:srgbClr val="1C2430"/>
                 </a:solidFill>
@@ -7530,7 +7623,7 @@
               </a:rPr>
               <a:t>据此限定自动执行的范围</a:t>
             </a:r>
-            <a:endParaRPr lang="zh-CN" sz="1725" dirty="0"/>
+            <a:endParaRPr lang="zh-CN" sz="1800" dirty="0"/>
           </a:p>
         </p:txBody>
       </p:sp>
@@ -7570,7 +7663,7 @@
                 <a:ea typeface="Noto Sans CJK SC" pitchFamily="34" charset="-122"/>
                 <a:cs typeface="Noto Sans CJK SC" pitchFamily="34" charset="-120"/>
               </a:rPr>
-              <a:t>T1 · 2026 · 待替换</a:t>
+              <a:t>T1 · 2026 · 书目占位；图表均为合成示例</a:t>
             </a:r>
             <a:endParaRPr lang="zh-CN" sz="1125" dirty="0"/>
           </a:p>
@@ -7679,14 +7772,14 @@
       </p:sp>
       <p:sp>
         <p:nvSpPr>
-          <p:cNvPr id="4" name="T42/kicker"/>
-          <p:cNvSpPr/>
-          <p:nvPr/>
-        </p:nvSpPr>
-        <p:spPr>
-          <a:xfrm>
-            <a:off x="457200" y="152400"/>
-            <a:ext cx="11277600" cy="190500"/>
+          <p:cNvPr id="4" name="T42/title"/>
+          <p:cNvSpPr/>
+          <p:nvPr/>
+        </p:nvSpPr>
+        <p:spPr>
+          <a:xfrm>
+            <a:off x="457200" y="209550"/>
+            <a:ext cx="11277600" cy="438150"/>
           </a:xfrm>
           <a:prstGeom prst="rect">
             <a:avLst/>
@@ -7700,35 +7793,81 @@
           <a:p>
             <a:pPr algn="l" indent="0" marL="0">
               <a:lnSpc>
-                <a:spcPts val="1320"/>
-              </a:lnSpc>
-              <a:buNone/>
-            </a:pPr>
-            <a:r>
-              <a:rPr lang="zh-CN" altLang="en-US" sz="1200" dirty="0">
-                <a:solidFill>
-                  <a:srgbClr val="515B68"/>
-                </a:solidFill>
-                <a:latin typeface="Noto Sans CJK SC" pitchFamily="34" charset="0"/>
-                <a:ea typeface="Noto Sans CJK SC" pitchFamily="34" charset="-122"/>
-                <a:cs typeface="Noto Sans CJK SC" pitchFamily="34" charset="-120"/>
-              </a:rPr>
-              <a:t>结构模板 / 占位说明与合成数据</a:t>
-            </a:r>
-            <a:endParaRPr lang="zh-CN" sz="1200" dirty="0"/>
+                <a:spcPts val="3360"/>
+              </a:lnSpc>
+              <a:buNone/>
+            </a:pPr>
+            <a:r>
+              <a:rPr lang="zh-CN" altLang="en-US" sz="3000" b="1" dirty="0">
+                <a:solidFill>
+                  <a:srgbClr val="1C2430"/>
+                </a:solidFill>
+                <a:latin typeface="Noto Sans CJK SC" pitchFamily="34" charset="0"/>
+                <a:ea typeface="Noto Sans CJK SC" pitchFamily="34" charset="-122"/>
+                <a:cs typeface="Noto Sans CJK SC" pitchFamily="34" charset="-120"/>
+              </a:rPr>
+              <a:t>复现材料与缺失信息</a:t>
+            </a:r>
+            <a:endParaRPr lang="zh-CN" sz="3000" dirty="0"/>
           </a:p>
         </p:txBody>
       </p:sp>
       <p:sp>
         <p:nvSpPr>
-          <p:cNvPr id="5" name="T42/title"/>
-          <p:cNvSpPr/>
-          <p:nvPr/>
-        </p:nvSpPr>
-        <p:spPr>
-          <a:xfrm>
-            <a:off x="457200" y="381000"/>
-            <a:ext cx="11277600" cy="400050"/>
+          <p:cNvPr id="5" name="T42/header-rule"/>
+          <p:cNvSpPr/>
+          <p:nvPr/>
+        </p:nvSpPr>
+        <p:spPr>
+          <a:xfrm>
+            <a:off x="457200" y="752475"/>
+            <a:ext cx="11277600" cy="0"/>
+          </a:xfrm>
+          <a:prstGeom prst="line">
+            <a:avLst/>
+          </a:prstGeom>
+          <a:noFill/>
+          <a:ln w="10478">
+            <a:solidFill>
+              <a:srgbClr val="BEC8D4"/>
+            </a:solidFill>
+            <a:prstDash val="solid"/>
+          </a:ln>
+        </p:spPr>
+      </p:sp>
+      <p:sp>
+        <p:nvSpPr>
+          <p:cNvPr id="6" name="T42/header-accent"/>
+          <p:cNvSpPr/>
+          <p:nvPr/>
+        </p:nvSpPr>
+        <p:spPr>
+          <a:xfrm>
+            <a:off x="457200" y="752475"/>
+            <a:ext cx="704850" cy="0"/>
+          </a:xfrm>
+          <a:prstGeom prst="line">
+            <a:avLst/>
+          </a:prstGeom>
+          <a:noFill/>
+          <a:ln w="28575">
+            <a:solidFill>
+              <a:srgbClr val="173C70"/>
+            </a:solidFill>
+            <a:prstDash val="solid"/>
+          </a:ln>
+        </p:spPr>
+      </p:sp>
+      <p:sp>
+        <p:nvSpPr>
+          <p:cNvPr id="7" name="T42/takeaway"/>
+          <p:cNvSpPr/>
+          <p:nvPr/>
+        </p:nvSpPr>
+        <p:spPr>
+          <a:xfrm>
+            <a:off x="457200" y="5657850"/>
+            <a:ext cx="6991350" cy="415481"/>
           </a:xfrm>
           <a:prstGeom prst="rect">
             <a:avLst/>
@@ -7742,58 +7881,155 @@
           <a:p>
             <a:pPr algn="l" indent="0" marL="0">
               <a:lnSpc>
-                <a:spcPts val="2856"/>
-              </a:lnSpc>
-              <a:buNone/>
-            </a:pPr>
-            <a:r>
-              <a:rPr lang="zh-CN" altLang="en-US" sz="2550" b="1" dirty="0">
-                <a:solidFill>
-                  <a:srgbClr val="1C2430"/>
-                </a:solidFill>
-                <a:latin typeface="Noto Sans CJK SC" pitchFamily="34" charset="0"/>
-                <a:ea typeface="Noto Sans CJK SC" pitchFamily="34" charset="-122"/>
-                <a:cs typeface="Noto Sans CJK SC" pitchFamily="34" charset="-120"/>
-              </a:rPr>
-              <a:t>复现材料与缺失信息</a:t>
-            </a:r>
-            <a:endParaRPr lang="zh-CN" sz="2550" dirty="0"/>
+                <a:spcPts val="2160"/>
+              </a:lnSpc>
+              <a:buNone/>
+            </a:pPr>
+            <a:r>
+              <a:rPr lang="zh-CN" altLang="en-US" sz="1800" b="1" dirty="0">
+                <a:solidFill>
+                  <a:srgbClr val="173C70"/>
+                </a:solidFill>
+                <a:latin typeface="Noto Sans CJK SC" pitchFamily="34" charset="0"/>
+                <a:ea typeface="Noto Sans CJK SC" pitchFamily="34" charset="-122"/>
+                <a:cs typeface="Noto Sans CJK SC" pitchFamily="34" charset="-120"/>
+              </a:rPr>
+              <a:t>解释必须由本页证据支持，并保留样本、对照与适用条件。</a:t>
+            </a:r>
+            <a:endParaRPr lang="zh-CN" sz="1800" dirty="0"/>
           </a:p>
         </p:txBody>
       </p:sp>
       <p:sp>
         <p:nvSpPr>
-          <p:cNvPr id="6" name="T42/header-rule"/>
-          <p:cNvSpPr/>
-          <p:nvPr/>
-        </p:nvSpPr>
-        <p:spPr>
-          <a:xfrm>
-            <a:off x="457200" y="876300"/>
-            <a:ext cx="11277600" cy="0"/>
+          <p:cNvPr id="8" name="T42/edge:0"/>
+          <p:cNvSpPr/>
+          <p:nvPr/>
+        </p:nvSpPr>
+        <p:spPr>
+          <a:xfrm>
+            <a:off x="2724150" y="1889189"/>
+            <a:ext cx="723900" cy="0"/>
           </a:xfrm>
           <a:prstGeom prst="line">
             <a:avLst/>
           </a:prstGeom>
           <a:noFill/>
+          <a:ln w="15240">
+            <a:solidFill>
+              <a:srgbClr val="355D88"/>
+            </a:solidFill>
+            <a:prstDash val="solid"/>
+            <a:tailEnd type="triangle"/>
+          </a:ln>
+        </p:spPr>
+      </p:sp>
+      <p:sp>
+        <p:nvSpPr>
+          <p:cNvPr id="9" name="T42/edge:1"/>
+          <p:cNvSpPr/>
+          <p:nvPr/>
+        </p:nvSpPr>
+        <p:spPr>
+          <a:xfrm>
+            <a:off x="4543425" y="2452973"/>
+            <a:ext cx="0" cy="1562957"/>
+          </a:xfrm>
+          <a:prstGeom prst="line">
+            <a:avLst/>
+          </a:prstGeom>
+          <a:noFill/>
+          <a:ln w="15240">
+            <a:solidFill>
+              <a:srgbClr val="355D88"/>
+            </a:solidFill>
+            <a:prstDash val="solid"/>
+            <a:tailEnd type="triangle"/>
+          </a:ln>
+        </p:spPr>
+      </p:sp>
+      <p:sp>
+        <p:nvSpPr>
+          <p:cNvPr id="10" name="T42/edge:2"/>
+          <p:cNvSpPr/>
+          <p:nvPr/>
+        </p:nvSpPr>
+        <p:spPr>
+          <a:xfrm flipH="1">
+            <a:off x="2724150" y="4579715"/>
+            <a:ext cx="723900" cy="0"/>
+          </a:xfrm>
+          <a:prstGeom prst="line">
+            <a:avLst/>
+          </a:prstGeom>
+          <a:noFill/>
+          <a:ln w="15240">
+            <a:solidFill>
+              <a:srgbClr val="355D88"/>
+            </a:solidFill>
+            <a:prstDash val="solid"/>
+            <a:tailEnd type="triangle"/>
+          </a:ln>
+        </p:spPr>
+      </p:sp>
+      <p:sp>
+        <p:nvSpPr>
+          <p:cNvPr id="11" name="T42/node:step-1:frame"/>
+          <p:cNvSpPr/>
+          <p:nvPr/>
+        </p:nvSpPr>
+        <p:spPr>
+          <a:xfrm>
+            <a:off x="533400" y="1325404"/>
+            <a:ext cx="2190750" cy="1127570"/>
+          </a:xfrm>
+          <a:prstGeom prst="rect">
+            <a:avLst/>
+          </a:prstGeom>
+          <a:solidFill>
+            <a:srgbClr val="F0F3F6"/>
+          </a:solidFill>
           <a:ln w="11430">
             <a:solidFill>
-              <a:srgbClr val="173C70"/>
-            </a:solidFill>
-            <a:prstDash val="solid"/>
-          </a:ln>
-        </p:spPr>
-      </p:sp>
-      <p:sp>
-        <p:nvSpPr>
-          <p:cNvPr id="7" name="T42/takeaway"/>
-          <p:cNvSpPr/>
-          <p:nvPr/>
-        </p:nvSpPr>
-        <p:spPr>
-          <a:xfrm>
-            <a:off x="457200" y="5676900"/>
-            <a:ext cx="6991350" cy="400050"/>
+              <a:srgbClr val="BEC8D4"/>
+            </a:solidFill>
+            <a:prstDash val="solid"/>
+          </a:ln>
+        </p:spPr>
+      </p:sp>
+      <p:sp>
+        <p:nvSpPr>
+          <p:cNvPr id="12" name="T42/node:step-1:heading-rule"/>
+          <p:cNvSpPr/>
+          <p:nvPr/>
+        </p:nvSpPr>
+        <p:spPr>
+          <a:xfrm>
+            <a:off x="533400" y="1325404"/>
+            <a:ext cx="2190750" cy="0"/>
+          </a:xfrm>
+          <a:prstGeom prst="line">
+            <a:avLst/>
+          </a:prstGeom>
+          <a:noFill/>
+          <a:ln w="19050">
+            <a:solidFill>
+              <a:srgbClr val="536A7A"/>
+            </a:solidFill>
+            <a:prstDash val="solid"/>
+          </a:ln>
+        </p:spPr>
+      </p:sp>
+      <p:sp>
+        <p:nvSpPr>
+          <p:cNvPr id="13" name="T42/node:step-1:label"/>
+          <p:cNvSpPr/>
+          <p:nvPr/>
+        </p:nvSpPr>
+        <p:spPr>
+          <a:xfrm>
+            <a:off x="647700" y="1420654"/>
+            <a:ext cx="1962150" cy="266700"/>
           </a:xfrm>
           <a:prstGeom prst="rect">
             <a:avLst/>
@@ -7805,22 +8041,22 @@
           <a:bodyPr wrap="none" lIns="0" tIns="0" rIns="0" bIns="0" rtlCol="0" anchor="t"/>
           <a:lstStyle/>
           <a:p>
-            <a:pPr algn="l" indent="0" marL="0">
-              <a:lnSpc>
-                <a:spcPts val="2160"/>
+            <a:pPr algn="ctr" indent="0" marL="0">
+              <a:lnSpc>
+                <a:spcPts val="2088"/>
               </a:lnSpc>
               <a:buNone/>
             </a:pPr>
             <a:r>
               <a:rPr lang="zh-CN" altLang="en-US" sz="1800" b="1" dirty="0">
                 <a:solidFill>
-                  <a:srgbClr val="173C70"/>
-                </a:solidFill>
-                <a:latin typeface="Noto Sans CJK SC" pitchFamily="34" charset="0"/>
-                <a:ea typeface="Noto Sans CJK SC" pitchFamily="34" charset="-122"/>
-                <a:cs typeface="Noto Sans CJK SC" pitchFamily="34" charset="-120"/>
-              </a:rPr>
-              <a:t>解释必须由本页证据支持，并保留样本、对照与适用条件。</a:t>
+                  <a:srgbClr val="536A7A"/>
+                </a:solidFill>
+                <a:latin typeface="Noto Sans CJK SC" pitchFamily="34" charset="0"/>
+                <a:ea typeface="Noto Sans CJK SC" pitchFamily="34" charset="-122"/>
+                <a:cs typeface="Noto Sans CJK SC" pitchFamily="34" charset="-120"/>
+              </a:rPr>
+              <a:t>数据与版本</a:t>
             </a:r>
             <a:endParaRPr lang="zh-CN" sz="1800" dirty="0"/>
           </a:p>
@@ -7828,134 +8064,14 @@
       </p:sp>
       <p:sp>
         <p:nvSpPr>
-          <p:cNvPr id="8" name="T42/edge:0"/>
-          <p:cNvSpPr/>
-          <p:nvPr/>
-        </p:nvSpPr>
-        <p:spPr>
-          <a:xfrm>
-            <a:off x="2724150" y="2047875"/>
-            <a:ext cx="723900" cy="0"/>
-          </a:xfrm>
-          <a:prstGeom prst="line">
-            <a:avLst/>
-          </a:prstGeom>
-          <a:noFill/>
-          <a:ln w="15240">
-            <a:solidFill>
-              <a:srgbClr val="355D88"/>
-            </a:solidFill>
-            <a:prstDash val="solid"/>
-            <a:tailEnd type="triangle"/>
-          </a:ln>
-        </p:spPr>
-      </p:sp>
-      <p:sp>
-        <p:nvSpPr>
-          <p:cNvPr id="9" name="T42/edge:1"/>
-          <p:cNvSpPr/>
-          <p:nvPr/>
-        </p:nvSpPr>
-        <p:spPr>
-          <a:xfrm>
-            <a:off x="4543425" y="2590800"/>
-            <a:ext cx="0" cy="1504950"/>
-          </a:xfrm>
-          <a:prstGeom prst="line">
-            <a:avLst/>
-          </a:prstGeom>
-          <a:noFill/>
-          <a:ln w="15240">
-            <a:solidFill>
-              <a:srgbClr val="355D88"/>
-            </a:solidFill>
-            <a:prstDash val="solid"/>
-            <a:tailEnd type="triangle"/>
-          </a:ln>
-        </p:spPr>
-      </p:sp>
-      <p:sp>
-        <p:nvSpPr>
-          <p:cNvPr id="10" name="T42/edge:2"/>
-          <p:cNvSpPr/>
-          <p:nvPr/>
-        </p:nvSpPr>
-        <p:spPr>
-          <a:xfrm flipH="1">
-            <a:off x="2724150" y="4638675"/>
-            <a:ext cx="723900" cy="0"/>
-          </a:xfrm>
-          <a:prstGeom prst="line">
-            <a:avLst/>
-          </a:prstGeom>
-          <a:noFill/>
-          <a:ln w="15240">
-            <a:solidFill>
-              <a:srgbClr val="355D88"/>
-            </a:solidFill>
-            <a:prstDash val="solid"/>
-            <a:tailEnd type="triangle"/>
-          </a:ln>
-        </p:spPr>
-      </p:sp>
-      <p:sp>
-        <p:nvSpPr>
-          <p:cNvPr id="11" name="T42/node:step-1:frame"/>
-          <p:cNvSpPr/>
-          <p:nvPr/>
-        </p:nvSpPr>
-        <p:spPr>
-          <a:xfrm>
-            <a:off x="533400" y="1504950"/>
-            <a:ext cx="2190750" cy="1085850"/>
-          </a:xfrm>
-          <a:prstGeom prst="rect">
-            <a:avLst/>
-          </a:prstGeom>
-          <a:solidFill>
-            <a:srgbClr val="FFFFFF"/>
-          </a:solidFill>
-          <a:ln w="11430">
-            <a:solidFill>
-              <a:srgbClr val="BEC8D4"/>
-            </a:solidFill>
-            <a:prstDash val="solid"/>
-          </a:ln>
-        </p:spPr>
-      </p:sp>
-      <p:sp>
-        <p:nvSpPr>
-          <p:cNvPr id="12" name="T42/node:step-1:heading-rule"/>
-          <p:cNvSpPr/>
-          <p:nvPr/>
-        </p:nvSpPr>
-        <p:spPr>
-          <a:xfrm>
-            <a:off x="533400" y="1504950"/>
-            <a:ext cx="2190750" cy="0"/>
-          </a:xfrm>
-          <a:prstGeom prst="line">
-            <a:avLst/>
-          </a:prstGeom>
-          <a:noFill/>
-          <a:ln w="19050">
-            <a:solidFill>
-              <a:srgbClr val="173C70"/>
-            </a:solidFill>
-            <a:prstDash val="solid"/>
-          </a:ln>
-        </p:spPr>
-      </p:sp>
-      <p:sp>
-        <p:nvSpPr>
-          <p:cNvPr id="13" name="T42/node:step-1:label"/>
-          <p:cNvSpPr/>
-          <p:nvPr/>
-        </p:nvSpPr>
-        <p:spPr>
-          <a:xfrm>
-            <a:off x="647700" y="1600200"/>
-            <a:ext cx="1962150" cy="266700"/>
+          <p:cNvPr id="14" name="T42/node:step-1:detail"/>
+          <p:cNvSpPr/>
+          <p:nvPr/>
+        </p:nvSpPr>
+        <p:spPr>
+          <a:xfrm>
+            <a:off x="647700" y="1734979"/>
+            <a:ext cx="1962150" cy="632269"/>
           </a:xfrm>
           <a:prstGeom prst="rect">
             <a:avLst/>
@@ -7969,35 +8085,83 @@
           <a:p>
             <a:pPr algn="ctr" indent="0" marL="0">
               <a:lnSpc>
-                <a:spcPts val="2088"/>
-              </a:lnSpc>
-              <a:buNone/>
-            </a:pPr>
-            <a:r>
-              <a:rPr lang="zh-CN" altLang="en-US" sz="1800" b="1" dirty="0">
-                <a:solidFill>
-                  <a:srgbClr val="173C70"/>
-                </a:solidFill>
-                <a:latin typeface="Noto Sans CJK SC" pitchFamily="34" charset="0"/>
-                <a:ea typeface="Noto Sans CJK SC" pitchFamily="34" charset="-122"/>
-                <a:cs typeface="Noto Sans CJK SC" pitchFamily="34" charset="-120"/>
-              </a:rPr>
-              <a:t>数据与版本</a:t>
-            </a:r>
-            <a:endParaRPr lang="zh-CN" sz="1800" dirty="0"/>
+                <a:spcPts val="1947"/>
+              </a:lnSpc>
+              <a:buNone/>
+            </a:pPr>
+            <a:r>
+              <a:rPr lang="zh-CN" altLang="en-US" sz="1650" dirty="0">
+                <a:solidFill>
+                  <a:srgbClr val="1C2430"/>
+                </a:solidFill>
+                <a:latin typeface="Noto Sans CJK SC" pitchFamily="34" charset="0"/>
+                <a:ea typeface="Noto Sans CJK SC" pitchFamily="34" charset="-122"/>
+                <a:cs typeface="Noto Sans CJK SC" pitchFamily="34" charset="-120"/>
+              </a:rPr>
+              <a:t>公开记录与许可</a:t>
+            </a:r>
+            <a:endParaRPr lang="zh-CN" sz="1650" dirty="0"/>
           </a:p>
         </p:txBody>
       </p:sp>
       <p:sp>
         <p:nvSpPr>
-          <p:cNvPr id="14" name="T42/node:step-1:detail"/>
-          <p:cNvSpPr/>
-          <p:nvPr/>
-        </p:nvSpPr>
-        <p:spPr>
-          <a:xfrm>
-            <a:off x="647700" y="1914525"/>
-            <a:ext cx="1962150" cy="590550"/>
+          <p:cNvPr id="15" name="T42/node:step-2:frame"/>
+          <p:cNvSpPr/>
+          <p:nvPr/>
+        </p:nvSpPr>
+        <p:spPr>
+          <a:xfrm>
+            <a:off x="3448050" y="1325404"/>
+            <a:ext cx="2190750" cy="1127570"/>
+          </a:xfrm>
+          <a:prstGeom prst="rect">
+            <a:avLst/>
+          </a:prstGeom>
+          <a:solidFill>
+            <a:srgbClr val="EAF2FA"/>
+          </a:solidFill>
+          <a:ln w="11430">
+            <a:solidFill>
+              <a:srgbClr val="BEC8D4"/>
+            </a:solidFill>
+            <a:prstDash val="solid"/>
+          </a:ln>
+        </p:spPr>
+      </p:sp>
+      <p:sp>
+        <p:nvSpPr>
+          <p:cNvPr id="16" name="T42/node:step-2:heading-rule"/>
+          <p:cNvSpPr/>
+          <p:nvPr/>
+        </p:nvSpPr>
+        <p:spPr>
+          <a:xfrm>
+            <a:off x="3448050" y="1325404"/>
+            <a:ext cx="2190750" cy="0"/>
+          </a:xfrm>
+          <a:prstGeom prst="line">
+            <a:avLst/>
+          </a:prstGeom>
+          <a:noFill/>
+          <a:ln w="19050">
+            <a:solidFill>
+              <a:srgbClr val="235E96"/>
+            </a:solidFill>
+            <a:prstDash val="solid"/>
+          </a:ln>
+        </p:spPr>
+      </p:sp>
+      <p:sp>
+        <p:nvSpPr>
+          <p:cNvPr id="17" name="T42/node:step-2:label"/>
+          <p:cNvSpPr/>
+          <p:nvPr/>
+        </p:nvSpPr>
+        <p:spPr>
+          <a:xfrm>
+            <a:off x="3562350" y="1420654"/>
+            <a:ext cx="1962150" cy="266700"/>
           </a:xfrm>
           <a:prstGeom prst="rect">
             <a:avLst/>
@@ -8011,83 +8175,35 @@
           <a:p>
             <a:pPr algn="ctr" indent="0" marL="0">
               <a:lnSpc>
-                <a:spcPts val="1947"/>
-              </a:lnSpc>
-              <a:buNone/>
-            </a:pPr>
-            <a:r>
-              <a:rPr lang="zh-CN" altLang="en-US" sz="1650" dirty="0">
-                <a:solidFill>
-                  <a:srgbClr val="1C2430"/>
-                </a:solidFill>
-                <a:latin typeface="Noto Sans CJK SC" pitchFamily="34" charset="0"/>
-                <a:ea typeface="Noto Sans CJK SC" pitchFamily="34" charset="-122"/>
-                <a:cs typeface="Noto Sans CJK SC" pitchFamily="34" charset="-120"/>
-              </a:rPr>
-              <a:t>填写接口与条件</a:t>
-            </a:r>
-            <a:endParaRPr lang="zh-CN" sz="1650" dirty="0"/>
+                <a:spcPts val="2088"/>
+              </a:lnSpc>
+              <a:buNone/>
+            </a:pPr>
+            <a:r>
+              <a:rPr lang="zh-CN" altLang="en-US" sz="1800" b="1" dirty="0">
+                <a:solidFill>
+                  <a:srgbClr val="235E96"/>
+                </a:solidFill>
+                <a:latin typeface="Noto Sans CJK SC" pitchFamily="34" charset="0"/>
+                <a:ea typeface="Noto Sans CJK SC" pitchFamily="34" charset="-122"/>
+                <a:cs typeface="Noto Sans CJK SC" pitchFamily="34" charset="-120"/>
+              </a:rPr>
+              <a:t>环境与依赖</a:t>
+            </a:r>
+            <a:endParaRPr lang="zh-CN" sz="1800" dirty="0"/>
           </a:p>
         </p:txBody>
       </p:sp>
       <p:sp>
         <p:nvSpPr>
-          <p:cNvPr id="15" name="T42/node:step-2:frame"/>
-          <p:cNvSpPr/>
-          <p:nvPr/>
-        </p:nvSpPr>
-        <p:spPr>
-          <a:xfrm>
-            <a:off x="3448050" y="1504950"/>
-            <a:ext cx="2190750" cy="1085850"/>
-          </a:xfrm>
-          <a:prstGeom prst="rect">
-            <a:avLst/>
-          </a:prstGeom>
-          <a:solidFill>
-            <a:srgbClr val="FFFFFF"/>
-          </a:solidFill>
-          <a:ln w="11430">
-            <a:solidFill>
-              <a:srgbClr val="BEC8D4"/>
-            </a:solidFill>
-            <a:prstDash val="solid"/>
-          </a:ln>
-        </p:spPr>
-      </p:sp>
-      <p:sp>
-        <p:nvSpPr>
-          <p:cNvPr id="16" name="T42/node:step-2:heading-rule"/>
-          <p:cNvSpPr/>
-          <p:nvPr/>
-        </p:nvSpPr>
-        <p:spPr>
-          <a:xfrm>
-            <a:off x="3448050" y="1504950"/>
-            <a:ext cx="2190750" cy="0"/>
-          </a:xfrm>
-          <a:prstGeom prst="line">
-            <a:avLst/>
-          </a:prstGeom>
-          <a:noFill/>
-          <a:ln w="19050">
-            <a:solidFill>
-              <a:srgbClr val="173C70"/>
-            </a:solidFill>
-            <a:prstDash val="solid"/>
-          </a:ln>
-        </p:spPr>
-      </p:sp>
-      <p:sp>
-        <p:nvSpPr>
-          <p:cNvPr id="17" name="T42/node:step-2:label"/>
-          <p:cNvSpPr/>
-          <p:nvPr/>
-        </p:nvSpPr>
-        <p:spPr>
-          <a:xfrm>
-            <a:off x="3562350" y="1600200"/>
-            <a:ext cx="1962150" cy="266700"/>
+          <p:cNvPr id="18" name="T42/node:step-2:detail"/>
+          <p:cNvSpPr/>
+          <p:nvPr/>
+        </p:nvSpPr>
+        <p:spPr>
+          <a:xfrm>
+            <a:off x="3562350" y="1734979"/>
+            <a:ext cx="1962150" cy="632269"/>
           </a:xfrm>
           <a:prstGeom prst="rect">
             <a:avLst/>
@@ -8101,35 +8217,83 @@
           <a:p>
             <a:pPr algn="ctr" indent="0" marL="0">
               <a:lnSpc>
-                <a:spcPts val="2088"/>
-              </a:lnSpc>
-              <a:buNone/>
-            </a:pPr>
-            <a:r>
-              <a:rPr lang="zh-CN" altLang="en-US" sz="1800" b="1" dirty="0">
-                <a:solidFill>
-                  <a:srgbClr val="173C70"/>
-                </a:solidFill>
-                <a:latin typeface="Noto Sans CJK SC" pitchFamily="34" charset="0"/>
-                <a:ea typeface="Noto Sans CJK SC" pitchFamily="34" charset="-122"/>
-                <a:cs typeface="Noto Sans CJK SC" pitchFamily="34" charset="-120"/>
-              </a:rPr>
-              <a:t>环境与依赖</a:t>
-            </a:r>
-            <a:endParaRPr lang="zh-CN" sz="1800" dirty="0"/>
+                <a:spcPts val="1947"/>
+              </a:lnSpc>
+              <a:buNone/>
+            </a:pPr>
+            <a:r>
+              <a:rPr lang="zh-CN" altLang="en-US" sz="1650" dirty="0">
+                <a:solidFill>
+                  <a:srgbClr val="1C2430"/>
+                </a:solidFill>
+                <a:latin typeface="Noto Sans CJK SC" pitchFamily="34" charset="0"/>
+                <a:ea typeface="Noto Sans CJK SC" pitchFamily="34" charset="-122"/>
+                <a:cs typeface="Noto Sans CJK SC" pitchFamily="34" charset="-120"/>
+              </a:rPr>
+              <a:t>可复现安装</a:t>
+            </a:r>
+            <a:endParaRPr lang="zh-CN" sz="1650" dirty="0"/>
           </a:p>
         </p:txBody>
       </p:sp>
       <p:sp>
         <p:nvSpPr>
-          <p:cNvPr id="18" name="T42/node:step-2:detail"/>
-          <p:cNvSpPr/>
-          <p:nvPr/>
-        </p:nvSpPr>
-        <p:spPr>
-          <a:xfrm>
-            <a:off x="3562350" y="1914525"/>
-            <a:ext cx="1962150" cy="590550"/>
+          <p:cNvPr id="19" name="T42/node:step-3:frame"/>
+          <p:cNvSpPr/>
+          <p:nvPr/>
+        </p:nvSpPr>
+        <p:spPr>
+          <a:xfrm>
+            <a:off x="3448050" y="4015931"/>
+            <a:ext cx="2190750" cy="1127570"/>
+          </a:xfrm>
+          <a:prstGeom prst="rect">
+            <a:avLst/>
+          </a:prstGeom>
+          <a:solidFill>
+            <a:srgbClr val="EAF2FA"/>
+          </a:solidFill>
+          <a:ln w="11430">
+            <a:solidFill>
+              <a:srgbClr val="BEC8D4"/>
+            </a:solidFill>
+            <a:prstDash val="solid"/>
+          </a:ln>
+        </p:spPr>
+      </p:sp>
+      <p:sp>
+        <p:nvSpPr>
+          <p:cNvPr id="20" name="T42/node:step-3:heading-rule"/>
+          <p:cNvSpPr/>
+          <p:nvPr/>
+        </p:nvSpPr>
+        <p:spPr>
+          <a:xfrm>
+            <a:off x="3448050" y="4015931"/>
+            <a:ext cx="2190750" cy="0"/>
+          </a:xfrm>
+          <a:prstGeom prst="line">
+            <a:avLst/>
+          </a:prstGeom>
+          <a:noFill/>
+          <a:ln w="19050">
+            <a:solidFill>
+              <a:srgbClr val="235E96"/>
+            </a:solidFill>
+            <a:prstDash val="solid"/>
+          </a:ln>
+        </p:spPr>
+      </p:sp>
+      <p:sp>
+        <p:nvSpPr>
+          <p:cNvPr id="21" name="T42/node:step-3:label"/>
+          <p:cNvSpPr/>
+          <p:nvPr/>
+        </p:nvSpPr>
+        <p:spPr>
+          <a:xfrm>
+            <a:off x="3562350" y="4111181"/>
+            <a:ext cx="1962150" cy="266700"/>
           </a:xfrm>
           <a:prstGeom prst="rect">
             <a:avLst/>
@@ -8143,83 +8307,35 @@
           <a:p>
             <a:pPr algn="ctr" indent="0" marL="0">
               <a:lnSpc>
-                <a:spcPts val="1947"/>
-              </a:lnSpc>
-              <a:buNone/>
-            </a:pPr>
-            <a:r>
-              <a:rPr lang="zh-CN" altLang="en-US" sz="1650" dirty="0">
-                <a:solidFill>
-                  <a:srgbClr val="1C2430"/>
-                </a:solidFill>
-                <a:latin typeface="Noto Sans CJK SC" pitchFamily="34" charset="0"/>
-                <a:ea typeface="Noto Sans CJK SC" pitchFamily="34" charset="-122"/>
-                <a:cs typeface="Noto Sans CJK SC" pitchFamily="34" charset="-120"/>
-              </a:rPr>
-              <a:t>填写接口与条件</a:t>
-            </a:r>
-            <a:endParaRPr lang="zh-CN" sz="1650" dirty="0"/>
+                <a:spcPts val="2088"/>
+              </a:lnSpc>
+              <a:buNone/>
+            </a:pPr>
+            <a:r>
+              <a:rPr lang="zh-CN" altLang="en-US" sz="1800" b="1" dirty="0">
+                <a:solidFill>
+                  <a:srgbClr val="235E96"/>
+                </a:solidFill>
+                <a:latin typeface="Noto Sans CJK SC" pitchFamily="34" charset="0"/>
+                <a:ea typeface="Noto Sans CJK SC" pitchFamily="34" charset="-122"/>
+                <a:cs typeface="Noto Sans CJK SC" pitchFamily="34" charset="-120"/>
+              </a:rPr>
+              <a:t>代码与参数</a:t>
+            </a:r>
+            <a:endParaRPr lang="zh-CN" sz="1800" dirty="0"/>
           </a:p>
         </p:txBody>
       </p:sp>
       <p:sp>
         <p:nvSpPr>
-          <p:cNvPr id="19" name="T42/node:step-3:frame"/>
-          <p:cNvSpPr/>
-          <p:nvPr/>
-        </p:nvSpPr>
-        <p:spPr>
-          <a:xfrm>
-            <a:off x="3448050" y="4095750"/>
-            <a:ext cx="2190750" cy="1085850"/>
-          </a:xfrm>
-          <a:prstGeom prst="rect">
-            <a:avLst/>
-          </a:prstGeom>
-          <a:solidFill>
-            <a:srgbClr val="FFFFFF"/>
-          </a:solidFill>
-          <a:ln w="11430">
-            <a:solidFill>
-              <a:srgbClr val="BEC8D4"/>
-            </a:solidFill>
-            <a:prstDash val="solid"/>
-          </a:ln>
-        </p:spPr>
-      </p:sp>
-      <p:sp>
-        <p:nvSpPr>
-          <p:cNvPr id="20" name="T42/node:step-3:heading-rule"/>
-          <p:cNvSpPr/>
-          <p:nvPr/>
-        </p:nvSpPr>
-        <p:spPr>
-          <a:xfrm>
-            <a:off x="3448050" y="4095750"/>
-            <a:ext cx="2190750" cy="0"/>
-          </a:xfrm>
-          <a:prstGeom prst="line">
-            <a:avLst/>
-          </a:prstGeom>
-          <a:noFill/>
-          <a:ln w="19050">
-            <a:solidFill>
-              <a:srgbClr val="173C70"/>
-            </a:solidFill>
-            <a:prstDash val="solid"/>
-          </a:ln>
-        </p:spPr>
-      </p:sp>
-      <p:sp>
-        <p:nvSpPr>
-          <p:cNvPr id="21" name="T42/node:step-3:label"/>
-          <p:cNvSpPr/>
-          <p:nvPr/>
-        </p:nvSpPr>
-        <p:spPr>
-          <a:xfrm>
-            <a:off x="3562350" y="4191000"/>
-            <a:ext cx="1962150" cy="266700"/>
+          <p:cNvPr id="22" name="T42/node:step-3:detail"/>
+          <p:cNvSpPr/>
+          <p:nvPr/>
+        </p:nvSpPr>
+        <p:spPr>
+          <a:xfrm>
+            <a:off x="3562350" y="4425506"/>
+            <a:ext cx="1962150" cy="632270"/>
           </a:xfrm>
           <a:prstGeom prst="rect">
             <a:avLst/>
@@ -8233,35 +8349,83 @@
           <a:p>
             <a:pPr algn="ctr" indent="0" marL="0">
               <a:lnSpc>
-                <a:spcPts val="2088"/>
-              </a:lnSpc>
-              <a:buNone/>
-            </a:pPr>
-            <a:r>
-              <a:rPr lang="zh-CN" altLang="en-US" sz="1800" b="1" dirty="0">
-                <a:solidFill>
-                  <a:srgbClr val="173C70"/>
-                </a:solidFill>
-                <a:latin typeface="Noto Sans CJK SC" pitchFamily="34" charset="0"/>
-                <a:ea typeface="Noto Sans CJK SC" pitchFamily="34" charset="-122"/>
-                <a:cs typeface="Noto Sans CJK SC" pitchFamily="34" charset="-120"/>
-              </a:rPr>
-              <a:t>代码与参数</a:t>
-            </a:r>
-            <a:endParaRPr lang="zh-CN" sz="1800" dirty="0"/>
+                <a:spcPts val="1947"/>
+              </a:lnSpc>
+              <a:buNone/>
+            </a:pPr>
+            <a:r>
+              <a:rPr lang="zh-CN" altLang="en-US" sz="1650" dirty="0">
+                <a:solidFill>
+                  <a:srgbClr val="1C2430"/>
+                </a:solidFill>
+                <a:latin typeface="Noto Sans CJK SC" pitchFamily="34" charset="0"/>
+                <a:ea typeface="Noto Sans CJK SC" pitchFamily="34" charset="-122"/>
+                <a:cs typeface="Noto Sans CJK SC" pitchFamily="34" charset="-120"/>
+              </a:rPr>
+              <a:t>固定程序和预算</a:t>
+            </a:r>
+            <a:endParaRPr lang="zh-CN" sz="1650" dirty="0"/>
           </a:p>
         </p:txBody>
       </p:sp>
       <p:sp>
         <p:nvSpPr>
-          <p:cNvPr id="22" name="T42/node:step-3:detail"/>
-          <p:cNvSpPr/>
-          <p:nvPr/>
-        </p:nvSpPr>
-        <p:spPr>
-          <a:xfrm>
-            <a:off x="3562350" y="4505325"/>
-            <a:ext cx="1962150" cy="590550"/>
+          <p:cNvPr id="23" name="T42/node:step-4:frame"/>
+          <p:cNvSpPr/>
+          <p:nvPr/>
+        </p:nvSpPr>
+        <p:spPr>
+          <a:xfrm>
+            <a:off x="533400" y="4015931"/>
+            <a:ext cx="2190750" cy="1127570"/>
+          </a:xfrm>
+          <a:prstGeom prst="rect">
+            <a:avLst/>
+          </a:prstGeom>
+          <a:solidFill>
+            <a:srgbClr val="E9F4F0"/>
+          </a:solidFill>
+          <a:ln w="11430">
+            <a:solidFill>
+              <a:srgbClr val="BEC8D4"/>
+            </a:solidFill>
+            <a:prstDash val="solid"/>
+          </a:ln>
+        </p:spPr>
+      </p:sp>
+      <p:sp>
+        <p:nvSpPr>
+          <p:cNvPr id="24" name="T42/node:step-4:heading-rule"/>
+          <p:cNvSpPr/>
+          <p:nvPr/>
+        </p:nvSpPr>
+        <p:spPr>
+          <a:xfrm>
+            <a:off x="533400" y="4015931"/>
+            <a:ext cx="2190750" cy="0"/>
+          </a:xfrm>
+          <a:prstGeom prst="line">
+            <a:avLst/>
+          </a:prstGeom>
+          <a:noFill/>
+          <a:ln w="19050">
+            <a:solidFill>
+              <a:srgbClr val="146C63"/>
+            </a:solidFill>
+            <a:prstDash val="solid"/>
+          </a:ln>
+        </p:spPr>
+      </p:sp>
+      <p:sp>
+        <p:nvSpPr>
+          <p:cNvPr id="25" name="T42/node:step-4:label"/>
+          <p:cNvSpPr/>
+          <p:nvPr/>
+        </p:nvSpPr>
+        <p:spPr>
+          <a:xfrm>
+            <a:off x="647700" y="4111181"/>
+            <a:ext cx="1962150" cy="266700"/>
           </a:xfrm>
           <a:prstGeom prst="rect">
             <a:avLst/>
@@ -8275,83 +8439,35 @@
           <a:p>
             <a:pPr algn="ctr" indent="0" marL="0">
               <a:lnSpc>
-                <a:spcPts val="1947"/>
-              </a:lnSpc>
-              <a:buNone/>
-            </a:pPr>
-            <a:r>
-              <a:rPr lang="zh-CN" altLang="en-US" sz="1650" dirty="0">
-                <a:solidFill>
-                  <a:srgbClr val="1C2430"/>
-                </a:solidFill>
-                <a:latin typeface="Noto Sans CJK SC" pitchFamily="34" charset="0"/>
-                <a:ea typeface="Noto Sans CJK SC" pitchFamily="34" charset="-122"/>
-                <a:cs typeface="Noto Sans CJK SC" pitchFamily="34" charset="-120"/>
-              </a:rPr>
-              <a:t>填写接口与条件</a:t>
-            </a:r>
-            <a:endParaRPr lang="zh-CN" sz="1650" dirty="0"/>
+                <a:spcPts val="2088"/>
+              </a:lnSpc>
+              <a:buNone/>
+            </a:pPr>
+            <a:r>
+              <a:rPr lang="zh-CN" altLang="en-US" sz="1800" b="1" dirty="0">
+                <a:solidFill>
+                  <a:srgbClr val="146C63"/>
+                </a:solidFill>
+                <a:latin typeface="Noto Sans CJK SC" pitchFamily="34" charset="0"/>
+                <a:ea typeface="Noto Sans CJK SC" pitchFamily="34" charset="-122"/>
+                <a:cs typeface="Noto Sans CJK SC" pitchFamily="34" charset="-120"/>
+              </a:rPr>
+              <a:t>输出与核验</a:t>
+            </a:r>
+            <a:endParaRPr lang="zh-CN" sz="1800" dirty="0"/>
           </a:p>
         </p:txBody>
       </p:sp>
       <p:sp>
         <p:nvSpPr>
-          <p:cNvPr id="23" name="T42/node:step-4:frame"/>
-          <p:cNvSpPr/>
-          <p:nvPr/>
-        </p:nvSpPr>
-        <p:spPr>
-          <a:xfrm>
-            <a:off x="533400" y="4095750"/>
-            <a:ext cx="2190750" cy="1085850"/>
-          </a:xfrm>
-          <a:prstGeom prst="rect">
-            <a:avLst/>
-          </a:prstGeom>
-          <a:solidFill>
-            <a:srgbClr val="FFFFFF"/>
-          </a:solidFill>
-          <a:ln w="11430">
-            <a:solidFill>
-              <a:srgbClr val="BEC8D4"/>
-            </a:solidFill>
-            <a:prstDash val="solid"/>
-          </a:ln>
-        </p:spPr>
-      </p:sp>
-      <p:sp>
-        <p:nvSpPr>
-          <p:cNvPr id="24" name="T42/node:step-4:heading-rule"/>
-          <p:cNvSpPr/>
-          <p:nvPr/>
-        </p:nvSpPr>
-        <p:spPr>
-          <a:xfrm>
-            <a:off x="533400" y="4095750"/>
-            <a:ext cx="2190750" cy="0"/>
-          </a:xfrm>
-          <a:prstGeom prst="line">
-            <a:avLst/>
-          </a:prstGeom>
-          <a:noFill/>
-          <a:ln w="19050">
-            <a:solidFill>
-              <a:srgbClr val="173C70"/>
-            </a:solidFill>
-            <a:prstDash val="solid"/>
-          </a:ln>
-        </p:spPr>
-      </p:sp>
-      <p:sp>
-        <p:nvSpPr>
-          <p:cNvPr id="25" name="T42/node:step-4:label"/>
-          <p:cNvSpPr/>
-          <p:nvPr/>
-        </p:nvSpPr>
-        <p:spPr>
-          <a:xfrm>
-            <a:off x="647700" y="4191000"/>
-            <a:ext cx="1962150" cy="266700"/>
+          <p:cNvPr id="26" name="T42/node:step-4:detail"/>
+          <p:cNvSpPr/>
+          <p:nvPr/>
+        </p:nvSpPr>
+        <p:spPr>
+          <a:xfrm>
+            <a:off x="647700" y="4425506"/>
+            <a:ext cx="1962150" cy="632270"/>
           </a:xfrm>
           <a:prstGeom prst="rect">
             <a:avLst/>
@@ -8365,256 +8481,35 @@
           <a:p>
             <a:pPr algn="ctr" indent="0" marL="0">
               <a:lnSpc>
-                <a:spcPts val="2088"/>
-              </a:lnSpc>
-              <a:buNone/>
-            </a:pPr>
-            <a:r>
-              <a:rPr lang="zh-CN" altLang="en-US" sz="1800" b="1" dirty="0">
-                <a:solidFill>
-                  <a:srgbClr val="173C70"/>
-                </a:solidFill>
-                <a:latin typeface="Noto Sans CJK SC" pitchFamily="34" charset="0"/>
-                <a:ea typeface="Noto Sans CJK SC" pitchFamily="34" charset="-122"/>
-                <a:cs typeface="Noto Sans CJK SC" pitchFamily="34" charset="-120"/>
-              </a:rPr>
-              <a:t>输出与核验</a:t>
-            </a:r>
-            <a:endParaRPr lang="zh-CN" sz="1800" dirty="0"/>
+                <a:spcPts val="1947"/>
+              </a:lnSpc>
+              <a:buNone/>
+            </a:pPr>
+            <a:r>
+              <a:rPr lang="zh-CN" altLang="en-US" sz="1650" dirty="0">
+                <a:solidFill>
+                  <a:srgbClr val="1C2430"/>
+                </a:solidFill>
+                <a:latin typeface="Noto Sans CJK SC" pitchFamily="34" charset="0"/>
+                <a:ea typeface="Noto Sans CJK SC" pitchFamily="34" charset="-122"/>
+                <a:cs typeface="Noto Sans CJK SC" pitchFamily="34" charset="-120"/>
+              </a:rPr>
+              <a:t>原图、数据与来源</a:t>
+            </a:r>
+            <a:endParaRPr lang="zh-CN" sz="1650" dirty="0"/>
           </a:p>
         </p:txBody>
       </p:sp>
       <p:sp>
         <p:nvSpPr>
-          <p:cNvPr id="26" name="T42/node:step-4:detail"/>
-          <p:cNvSpPr/>
-          <p:nvPr/>
-        </p:nvSpPr>
-        <p:spPr>
-          <a:xfrm>
-            <a:off x="647700" y="4505325"/>
-            <a:ext cx="1962150" cy="590550"/>
-          </a:xfrm>
-          <a:prstGeom prst="rect">
-            <a:avLst/>
-          </a:prstGeom>
-          <a:noFill/>
-          <a:ln/>
-        </p:spPr>
-        <p:txBody>
-          <a:bodyPr wrap="none" lIns="0" tIns="0" rIns="0" bIns="0" rtlCol="0" anchor="t"/>
-          <a:lstStyle/>
-          <a:p>
-            <a:pPr algn="ctr" indent="0" marL="0">
-              <a:lnSpc>
-                <a:spcPts val="1947"/>
-              </a:lnSpc>
-              <a:buNone/>
-            </a:pPr>
-            <a:r>
-              <a:rPr lang="zh-CN" altLang="en-US" sz="1650" dirty="0">
-                <a:solidFill>
-                  <a:srgbClr val="1C2430"/>
-                </a:solidFill>
-                <a:latin typeface="Noto Sans CJK SC" pitchFamily="34" charset="0"/>
-                <a:ea typeface="Noto Sans CJK SC" pitchFamily="34" charset="-122"/>
-                <a:cs typeface="Noto Sans CJK SC" pitchFamily="34" charset="-120"/>
-              </a:rPr>
-              <a:t>填写接口与条件</a:t>
-            </a:r>
-            <a:endParaRPr lang="zh-CN" sz="1650" dirty="0"/>
-          </a:p>
-        </p:txBody>
-      </p:sp>
-      <p:sp>
-        <p:nvSpPr>
           <p:cNvPr id="27" name="T42/card/region-1/frame"/>
           <p:cNvSpPr/>
           <p:nvPr/>
         </p:nvSpPr>
         <p:spPr>
           <a:xfrm>
-            <a:off x="7753350" y="1390650"/>
-            <a:ext cx="3981450" cy="2133600"/>
-          </a:xfrm>
-          <a:prstGeom prst="rect">
-            <a:avLst/>
-          </a:prstGeom>
-          <a:solidFill>
-            <a:srgbClr val="FFFFFF"/>
-          </a:solidFill>
-          <a:ln w="10478">
-            <a:solidFill>
-              <a:srgbClr val="BEC8D4"/>
-            </a:solidFill>
-            <a:prstDash val="solid"/>
-          </a:ln>
-        </p:spPr>
-      </p:sp>
-      <p:sp>
-        <p:nvSpPr>
-          <p:cNvPr id="28" name="T42/card/region-1/heading-fill"/>
-          <p:cNvSpPr/>
-          <p:nvPr/>
-        </p:nvSpPr>
-        <p:spPr>
-          <a:xfrm>
-            <a:off x="7762875" y="1400175"/>
-            <a:ext cx="3962400" cy="371475"/>
-          </a:xfrm>
-          <a:prstGeom prst="rect">
-            <a:avLst/>
-          </a:prstGeom>
-          <a:solidFill>
-            <a:srgbClr val="EEF3F8"/>
-          </a:solidFill>
-          <a:ln w="12700">
-            <a:solidFill>
-              <a:srgbClr val="FFFFFF">
-                <a:alpha val="0"/>
-              </a:srgbClr>
-            </a:solidFill>
-            <a:prstDash val="solid"/>
-          </a:ln>
-        </p:spPr>
-      </p:sp>
-      <p:sp>
-        <p:nvSpPr>
-          <p:cNvPr id="29" name="T42/card/region-1/heading-rule"/>
-          <p:cNvSpPr/>
-          <p:nvPr/>
-        </p:nvSpPr>
-        <p:spPr>
-          <a:xfrm>
-            <a:off x="7753350" y="1771650"/>
-            <a:ext cx="3981450" cy="0"/>
-          </a:xfrm>
-          <a:prstGeom prst="line">
-            <a:avLst/>
-          </a:prstGeom>
-          <a:noFill/>
-          <a:ln w="9525">
-            <a:solidFill>
-              <a:srgbClr val="BEC8D4"/>
-            </a:solidFill>
-            <a:prstDash val="solid"/>
-          </a:ln>
-        </p:spPr>
-      </p:sp>
-      <p:sp>
-        <p:nvSpPr>
-          <p:cNvPr id="30" name="T42/card/region-1/title"/>
-          <p:cNvSpPr/>
-          <p:nvPr/>
-        </p:nvSpPr>
-        <p:spPr>
-          <a:xfrm>
-            <a:off x="7877175" y="1447800"/>
-            <a:ext cx="3733800" cy="276225"/>
-          </a:xfrm>
-          <a:prstGeom prst="rect">
-            <a:avLst/>
-          </a:prstGeom>
-          <a:noFill/>
-          <a:ln/>
-        </p:spPr>
-        <p:txBody>
-          <a:bodyPr wrap="none" lIns="0" tIns="0" rIns="0" bIns="0" rtlCol="0" anchor="t"/>
-          <a:lstStyle/>
-          <a:p>
-            <a:pPr algn="l" indent="0" marL="0">
-              <a:lnSpc>
-                <a:spcPts val="2070"/>
-              </a:lnSpc>
-              <a:buNone/>
-            </a:pPr>
-            <a:r>
-              <a:rPr lang="zh-CN" altLang="en-US" sz="1800" b="1" dirty="0">
-                <a:solidFill>
-                  <a:srgbClr val="173C70"/>
-                </a:solidFill>
-                <a:latin typeface="Noto Sans CJK SC" pitchFamily="34" charset="0"/>
-                <a:ea typeface="Noto Sans CJK SC" pitchFamily="34" charset="-122"/>
-                <a:cs typeface="Noto Sans CJK SC" pitchFamily="34" charset="-120"/>
-              </a:rPr>
-              <a:t>已公开材料</a:t>
-            </a:r>
-            <a:endParaRPr lang="zh-CN" sz="1800" dirty="0"/>
-          </a:p>
-        </p:txBody>
-      </p:sp>
-      <p:sp>
-        <p:nvSpPr>
-          <p:cNvPr id="31" name="T42/card/region-1/body"/>
-          <p:cNvSpPr/>
-          <p:nvPr/>
-        </p:nvSpPr>
-        <p:spPr>
-          <a:xfrm>
-            <a:off x="7886700" y="1885950"/>
-            <a:ext cx="3714750" cy="1543050"/>
-          </a:xfrm>
-          <a:prstGeom prst="rect">
-            <a:avLst/>
-          </a:prstGeom>
-          <a:noFill/>
-          <a:ln/>
-        </p:spPr>
-        <p:txBody>
-          <a:bodyPr wrap="none" lIns="0" tIns="0" rIns="0" bIns="0" rtlCol="0" anchor="t"/>
-          <a:lstStyle/>
-          <a:p>
-            <a:pPr algn="l" indent="0" marL="0">
-              <a:lnSpc>
-                <a:spcPts val="2139"/>
-              </a:lnSpc>
-              <a:buNone/>
-            </a:pPr>
-            <a:r>
-              <a:rPr lang="zh-CN" altLang="en-US" sz="1725" dirty="0">
-                <a:solidFill>
-                  <a:srgbClr val="1C2430"/>
-                </a:solidFill>
-                <a:latin typeface="Noto Sans CJK SC" pitchFamily="34" charset="0"/>
-                <a:ea typeface="Noto Sans CJK SC" pitchFamily="34" charset="-122"/>
-                <a:cs typeface="Noto Sans CJK SC" pitchFamily="34" charset="-120"/>
-              </a:rPr>
-              <a:t>逐项记录数据、代码和环境版本</a:t>
-            </a:r>
-            <a:endParaRPr lang="zh-CN" sz="1725" dirty="0"/>
-          </a:p>
-          <a:p>
-            <a:pPr algn="l" indent="0" marL="0">
-              <a:lnSpc>
-                <a:spcPts val="2139"/>
-              </a:lnSpc>
-              <a:buNone/>
-            </a:pPr>
-            <a:r>
-              <a:rPr lang="zh-CN" altLang="en-US" sz="1725" dirty="0">
-                <a:solidFill>
-                  <a:srgbClr val="1C2430"/>
-                </a:solidFill>
-                <a:latin typeface="Noto Sans CJK SC" pitchFamily="34" charset="0"/>
-                <a:ea typeface="Noto Sans CJK SC" pitchFamily="34" charset="-122"/>
-                <a:cs typeface="Noto Sans CJK SC" pitchFamily="34" charset="-120"/>
-              </a:rPr>
-              <a:t>用最小实验核查能否恢复原结果</a:t>
-            </a:r>
-            <a:endParaRPr lang="zh-CN" sz="1725" dirty="0"/>
-          </a:p>
-        </p:txBody>
-      </p:sp>
-      <p:sp>
-        <p:nvSpPr>
-          <p:cNvPr id="32" name="T42/card/region-2/frame"/>
-          <p:cNvSpPr/>
-          <p:nvPr/>
-        </p:nvSpPr>
-        <p:spPr>
-          <a:xfrm>
-            <a:off x="7753350" y="3771900"/>
-            <a:ext cx="3981450" cy="2228850"/>
+            <a:off x="7753350" y="1368647"/>
+            <a:ext cx="3981450" cy="2053781"/>
           </a:xfrm>
           <a:prstGeom prst="rect">
             <a:avLst/>
@@ -8624,22 +8519,22 @@
           </a:solidFill>
           <a:ln w="14288">
             <a:solidFill>
-              <a:srgbClr val="903543"/>
-            </a:solidFill>
-            <a:prstDash val="dash"/>
-          </a:ln>
-        </p:spPr>
-      </p:sp>
-      <p:sp>
-        <p:nvSpPr>
-          <p:cNvPr id="33" name="T42/card/region-2/corner-white"/>
-          <p:cNvSpPr/>
-          <p:nvPr/>
-        </p:nvSpPr>
-        <p:spPr>
-          <a:xfrm>
-            <a:off x="11468100" y="3771900"/>
-            <a:ext cx="266700" cy="266700"/>
+              <a:srgbClr val="536A7A"/>
+            </a:solidFill>
+            <a:prstDash val="solid"/>
+          </a:ln>
+        </p:spPr>
+      </p:sp>
+      <p:sp>
+        <p:nvSpPr>
+          <p:cNvPr id="28" name="T42/card/region-1/title-cutout"/>
+          <p:cNvSpPr/>
+          <p:nvPr/>
+        </p:nvSpPr>
+        <p:spPr>
+          <a:xfrm>
+            <a:off x="7886700" y="1216247"/>
+            <a:ext cx="1304925" cy="323850"/>
           </a:xfrm>
           <a:prstGeom prst="rect">
             <a:avLst/>
@@ -8659,83 +8554,37 @@
       </p:sp>
       <p:sp>
         <p:nvSpPr>
-          <p:cNvPr id="34" name="T42/card/region-2/fold-diagonal"/>
-          <p:cNvSpPr/>
-          <p:nvPr/>
-        </p:nvSpPr>
-        <p:spPr>
-          <a:xfrm>
-            <a:off x="11468100" y="3771900"/>
-            <a:ext cx="266700" cy="266700"/>
+          <p:cNvPr id="29" name="T42/card/region-1/base-rule"/>
+          <p:cNvSpPr/>
+          <p:nvPr/>
+        </p:nvSpPr>
+        <p:spPr>
+          <a:xfrm>
+            <a:off x="7943850" y="3270028"/>
+            <a:ext cx="333375" cy="0"/>
           </a:xfrm>
           <a:prstGeom prst="line">
             <a:avLst/>
           </a:prstGeom>
           <a:noFill/>
-          <a:ln w="13335">
-            <a:solidFill>
-              <a:srgbClr val="903543"/>
-            </a:solidFill>
-            <a:prstDash val="solid"/>
-          </a:ln>
-        </p:spPr>
-      </p:sp>
-      <p:sp>
-        <p:nvSpPr>
-          <p:cNvPr id="35" name="T42/card/region-2/fold-left"/>
-          <p:cNvSpPr/>
-          <p:nvPr/>
-        </p:nvSpPr>
-        <p:spPr>
-          <a:xfrm>
-            <a:off x="11468100" y="3771900"/>
-            <a:ext cx="0" cy="266700"/>
-          </a:xfrm>
-          <a:prstGeom prst="line">
-            <a:avLst/>
-          </a:prstGeom>
-          <a:noFill/>
-          <a:ln w="13335">
-            <a:solidFill>
-              <a:srgbClr val="903543"/>
-            </a:solidFill>
-            <a:prstDash val="solid"/>
-          </a:ln>
-        </p:spPr>
-      </p:sp>
-      <p:sp>
-        <p:nvSpPr>
-          <p:cNvPr id="36" name="T42/card/region-2/fold-bottom"/>
-          <p:cNvSpPr/>
-          <p:nvPr/>
-        </p:nvSpPr>
-        <p:spPr>
-          <a:xfrm>
-            <a:off x="11468100" y="4038600"/>
-            <a:ext cx="266700" cy="0"/>
-          </a:xfrm>
-          <a:prstGeom prst="line">
-            <a:avLst/>
-          </a:prstGeom>
-          <a:noFill/>
-          <a:ln w="13335">
-            <a:solidFill>
-              <a:srgbClr val="903543"/>
-            </a:solidFill>
-            <a:prstDash val="solid"/>
-          </a:ln>
-        </p:spPr>
-      </p:sp>
-      <p:sp>
-        <p:nvSpPr>
-          <p:cNvPr id="37" name="T42/card/region-2/title"/>
-          <p:cNvSpPr/>
-          <p:nvPr/>
-        </p:nvSpPr>
-        <p:spPr>
-          <a:xfrm>
-            <a:off x="7943850" y="3933825"/>
-            <a:ext cx="3409950" cy="361950"/>
+          <a:ln w="28575">
+            <a:solidFill>
+              <a:srgbClr val="536A7A"/>
+            </a:solidFill>
+            <a:prstDash val="solid"/>
+          </a:ln>
+        </p:spPr>
+      </p:sp>
+      <p:sp>
+        <p:nvSpPr>
+          <p:cNvPr id="30" name="T42/card/region-1/title"/>
+          <p:cNvSpPr/>
+          <p:nvPr/>
+        </p:nvSpPr>
+        <p:spPr>
+          <a:xfrm>
+            <a:off x="7943850" y="1225772"/>
+            <a:ext cx="3600450" cy="361950"/>
           </a:xfrm>
           <a:prstGeom prst="rect">
             <a:avLst/>
@@ -8749,35 +8598,35 @@
           <a:p>
             <a:pPr algn="l" indent="0" marL="0">
               <a:lnSpc>
-                <a:spcPts val="2070"/>
-              </a:lnSpc>
-              <a:buNone/>
-            </a:pPr>
-            <a:r>
-              <a:rPr lang="zh-CN" altLang="en-US" sz="1800" b="1" dirty="0">
-                <a:solidFill>
-                  <a:srgbClr val="903543"/>
-                </a:solidFill>
-                <a:latin typeface="Noto Sans CJK SC" pitchFamily="34" charset="0"/>
-                <a:ea typeface="Noto Sans CJK SC" pitchFamily="34" charset="-122"/>
-                <a:cs typeface="Noto Sans CJK SC" pitchFamily="34" charset="-120"/>
-              </a:rPr>
-              <a:t>缺失与重建条件</a:t>
-            </a:r>
-            <a:endParaRPr lang="zh-CN" sz="1800" dirty="0"/>
+                <a:spcPts val="2242"/>
+              </a:lnSpc>
+              <a:buNone/>
+            </a:pPr>
+            <a:r>
+              <a:rPr lang="zh-CN" altLang="en-US" sz="1950" b="1" dirty="0">
+                <a:solidFill>
+                  <a:srgbClr val="536A7A"/>
+                </a:solidFill>
+                <a:latin typeface="Noto Sans CJK SC" pitchFamily="34" charset="0"/>
+                <a:ea typeface="Noto Sans CJK SC" pitchFamily="34" charset="-122"/>
+                <a:cs typeface="Noto Sans CJK SC" pitchFamily="34" charset="-120"/>
+              </a:rPr>
+              <a:t>已公开材料</a:t>
+            </a:r>
+            <a:endParaRPr lang="zh-CN" sz="1950" dirty="0"/>
           </a:p>
         </p:txBody>
       </p:sp>
       <p:sp>
         <p:nvSpPr>
-          <p:cNvPr id="38" name="T42/card/region-2/body"/>
-          <p:cNvSpPr/>
-          <p:nvPr/>
-        </p:nvSpPr>
-        <p:spPr>
-          <a:xfrm>
-            <a:off x="7943850" y="4391025"/>
-            <a:ext cx="3600450" cy="1419225"/>
+          <p:cNvPr id="31" name="T42/card/region-1/body"/>
+          <p:cNvSpPr/>
+          <p:nvPr/>
+        </p:nvSpPr>
+        <p:spPr>
+          <a:xfrm>
+            <a:off x="7943850" y="1759172"/>
+            <a:ext cx="3600450" cy="1472756"/>
           </a:xfrm>
           <a:prstGeom prst="rect">
             <a:avLst/>
@@ -8791,12 +8640,12 @@
           <a:p>
             <a:pPr algn="l" indent="0" marL="0">
               <a:lnSpc>
-                <a:spcPts val="2178"/>
-              </a:lnSpc>
-              <a:buNone/>
-            </a:pPr>
-            <a:r>
-              <a:rPr lang="zh-CN" altLang="en-US" sz="1650" dirty="0">
+                <a:spcPts val="2232"/>
+              </a:lnSpc>
+              <a:buNone/>
+            </a:pPr>
+            <a:r>
+              <a:rPr lang="zh-CN" altLang="en-US" sz="1800" dirty="0">
                 <a:solidFill>
                   <a:srgbClr val="1C2430"/>
                 </a:solidFill>
@@ -8804,19 +8653,19 @@
                 <a:ea typeface="Noto Sans CJK SC" pitchFamily="34" charset="-122"/>
                 <a:cs typeface="Noto Sans CJK SC" pitchFamily="34" charset="-120"/>
               </a:rPr>
-              <a:t>定位缺失参数、数据或执行步骤</a:t>
-            </a:r>
-            <a:endParaRPr lang="zh-CN" sz="1650" dirty="0"/>
+              <a:t>逐项记录数据、代码和环境版本</a:t>
+            </a:r>
+            <a:endParaRPr lang="zh-CN" sz="1800" dirty="0"/>
           </a:p>
           <a:p>
             <a:pPr algn="l" indent="0" marL="0">
               <a:lnSpc>
-                <a:spcPts val="2178"/>
-              </a:lnSpc>
-              <a:buNone/>
-            </a:pPr>
-            <a:r>
-              <a:rPr lang="zh-CN" altLang="en-US" sz="1650" dirty="0">
+                <a:spcPts val="2232"/>
+              </a:lnSpc>
+              <a:buNone/>
+            </a:pPr>
+            <a:r>
+              <a:rPr lang="zh-CN" altLang="en-US" sz="1800" dirty="0">
                 <a:solidFill>
                   <a:srgbClr val="1C2430"/>
                 </a:solidFill>
@@ -8824,22 +8673,143 @@
                 <a:ea typeface="Noto Sans CJK SC" pitchFamily="34" charset="-122"/>
                 <a:cs typeface="Noto Sans CJK SC" pitchFamily="34" charset="-120"/>
               </a:rPr>
-              <a:t>记录重建假设及其可能影响</a:t>
-            </a:r>
-            <a:endParaRPr lang="zh-CN" sz="1650" dirty="0"/>
+              <a:t>用最小实验核查能否恢复原结果</a:t>
+            </a:r>
+            <a:endParaRPr lang="zh-CN" sz="1800" dirty="0"/>
           </a:p>
         </p:txBody>
       </p:sp>
       <p:sp>
         <p:nvSpPr>
-          <p:cNvPr id="39" name="T42/sources"/>
-          <p:cNvSpPr/>
-          <p:nvPr/>
-        </p:nvSpPr>
-        <p:spPr>
-          <a:xfrm>
-            <a:off x="457200" y="6286500"/>
-            <a:ext cx="11277600" cy="228600"/>
+          <p:cNvPr id="32" name="T42/card/region-2/frame"/>
+          <p:cNvSpPr/>
+          <p:nvPr/>
+        </p:nvSpPr>
+        <p:spPr>
+          <a:xfrm>
+            <a:off x="7753350" y="3679603"/>
+            <a:ext cx="3981450" cy="2314575"/>
+          </a:xfrm>
+          <a:prstGeom prst="rect">
+            <a:avLst/>
+          </a:prstGeom>
+          <a:solidFill>
+            <a:srgbClr val="FAEEE8"/>
+          </a:solidFill>
+          <a:ln w="12383">
+            <a:solidFill>
+              <a:srgbClr val="A24736"/>
+            </a:solidFill>
+            <a:prstDash val="dash"/>
+          </a:ln>
+        </p:spPr>
+      </p:sp>
+      <p:sp>
+        <p:nvSpPr>
+          <p:cNvPr id="33" name="T42/card/region-2/corner-white"/>
+          <p:cNvSpPr/>
+          <p:nvPr/>
+        </p:nvSpPr>
+        <p:spPr>
+          <a:xfrm>
+            <a:off x="11468100" y="3679603"/>
+            <a:ext cx="266700" cy="266700"/>
+          </a:xfrm>
+          <a:prstGeom prst="rect">
+            <a:avLst/>
+          </a:prstGeom>
+          <a:solidFill>
+            <a:srgbClr val="FFFFFF"/>
+          </a:solidFill>
+          <a:ln w="12700">
+            <a:solidFill>
+              <a:srgbClr val="FFFFFF">
+                <a:alpha val="0"/>
+              </a:srgbClr>
+            </a:solidFill>
+            <a:prstDash val="solid"/>
+          </a:ln>
+        </p:spPr>
+      </p:sp>
+      <p:sp>
+        <p:nvSpPr>
+          <p:cNvPr id="34" name="T42/card/region-2/fold-diagonal"/>
+          <p:cNvSpPr/>
+          <p:nvPr/>
+        </p:nvSpPr>
+        <p:spPr>
+          <a:xfrm>
+            <a:off x="11468100" y="3679603"/>
+            <a:ext cx="266700" cy="266700"/>
+          </a:xfrm>
+          <a:prstGeom prst="line">
+            <a:avLst/>
+          </a:prstGeom>
+          <a:noFill/>
+          <a:ln w="13335">
+            <a:solidFill>
+              <a:srgbClr val="A24736"/>
+            </a:solidFill>
+            <a:prstDash val="solid"/>
+          </a:ln>
+        </p:spPr>
+      </p:sp>
+      <p:sp>
+        <p:nvSpPr>
+          <p:cNvPr id="35" name="T42/card/region-2/fold-left"/>
+          <p:cNvSpPr/>
+          <p:nvPr/>
+        </p:nvSpPr>
+        <p:spPr>
+          <a:xfrm>
+            <a:off x="11468100" y="3679603"/>
+            <a:ext cx="0" cy="266700"/>
+          </a:xfrm>
+          <a:prstGeom prst="line">
+            <a:avLst/>
+          </a:prstGeom>
+          <a:noFill/>
+          <a:ln w="13335">
+            <a:solidFill>
+              <a:srgbClr val="A24736"/>
+            </a:solidFill>
+            <a:prstDash val="solid"/>
+          </a:ln>
+        </p:spPr>
+      </p:sp>
+      <p:sp>
+        <p:nvSpPr>
+          <p:cNvPr id="36" name="T42/card/region-2/fold-bottom"/>
+          <p:cNvSpPr/>
+          <p:nvPr/>
+        </p:nvSpPr>
+        <p:spPr>
+          <a:xfrm>
+            <a:off x="11468100" y="3946303"/>
+            <a:ext cx="266700" cy="0"/>
+          </a:xfrm>
+          <a:prstGeom prst="line">
+            <a:avLst/>
+          </a:prstGeom>
+          <a:noFill/>
+          <a:ln w="13335">
+            <a:solidFill>
+              <a:srgbClr val="A24736"/>
+            </a:solidFill>
+            <a:prstDash val="solid"/>
+          </a:ln>
+        </p:spPr>
+      </p:sp>
+      <p:sp>
+        <p:nvSpPr>
+          <p:cNvPr id="37" name="T42/card/region-2/title"/>
+          <p:cNvSpPr/>
+          <p:nvPr/>
+        </p:nvSpPr>
+        <p:spPr>
+          <a:xfrm>
+            <a:off x="7943850" y="3841528"/>
+            <a:ext cx="3409950" cy="361950"/>
           </a:xfrm>
           <a:prstGeom prst="rect">
             <a:avLst/>
@@ -8853,6 +8823,110 @@
           <a:p>
             <a:pPr algn="l" indent="0" marL="0">
               <a:lnSpc>
+                <a:spcPts val="2242"/>
+              </a:lnSpc>
+              <a:buNone/>
+            </a:pPr>
+            <a:r>
+              <a:rPr lang="zh-CN" altLang="en-US" sz="1950" b="1" dirty="0">
+                <a:solidFill>
+                  <a:srgbClr val="A24736"/>
+                </a:solidFill>
+                <a:latin typeface="Noto Sans CJK SC" pitchFamily="34" charset="0"/>
+                <a:ea typeface="Noto Sans CJK SC" pitchFamily="34" charset="-122"/>
+                <a:cs typeface="Noto Sans CJK SC" pitchFamily="34" charset="-120"/>
+              </a:rPr>
+              <a:t>缺失与重建条件</a:t>
+            </a:r>
+            <a:endParaRPr lang="zh-CN" sz="1950" dirty="0"/>
+          </a:p>
+        </p:txBody>
+      </p:sp>
+      <p:sp>
+        <p:nvSpPr>
+          <p:cNvPr id="38" name="T42/card/region-2/body"/>
+          <p:cNvSpPr/>
+          <p:nvPr/>
+        </p:nvSpPr>
+        <p:spPr>
+          <a:xfrm>
+            <a:off x="7943850" y="4298728"/>
+            <a:ext cx="3600450" cy="1504950"/>
+          </a:xfrm>
+          <a:prstGeom prst="rect">
+            <a:avLst/>
+          </a:prstGeom>
+          <a:noFill/>
+          <a:ln/>
+        </p:spPr>
+        <p:txBody>
+          <a:bodyPr wrap="none" lIns="0" tIns="0" rIns="0" bIns="0" rtlCol="0" anchor="t"/>
+          <a:lstStyle/>
+          <a:p>
+            <a:pPr algn="l" indent="0" marL="0">
+              <a:lnSpc>
+                <a:spcPts val="2232"/>
+              </a:lnSpc>
+              <a:buNone/>
+            </a:pPr>
+            <a:r>
+              <a:rPr lang="zh-CN" altLang="en-US" sz="1800" dirty="0">
+                <a:solidFill>
+                  <a:srgbClr val="1C2430"/>
+                </a:solidFill>
+                <a:latin typeface="Noto Sans CJK SC" pitchFamily="34" charset="0"/>
+                <a:ea typeface="Noto Sans CJK SC" pitchFamily="34" charset="-122"/>
+                <a:cs typeface="Noto Sans CJK SC" pitchFamily="34" charset="-120"/>
+              </a:rPr>
+              <a:t>定位缺失参数、数据或执行步骤</a:t>
+            </a:r>
+            <a:endParaRPr lang="zh-CN" sz="1800" dirty="0"/>
+          </a:p>
+          <a:p>
+            <a:pPr algn="l" indent="0" marL="0">
+              <a:lnSpc>
+                <a:spcPts val="2232"/>
+              </a:lnSpc>
+              <a:buNone/>
+            </a:pPr>
+            <a:r>
+              <a:rPr lang="zh-CN" altLang="en-US" sz="1800" dirty="0">
+                <a:solidFill>
+                  <a:srgbClr val="1C2430"/>
+                </a:solidFill>
+                <a:latin typeface="Noto Sans CJK SC" pitchFamily="34" charset="0"/>
+                <a:ea typeface="Noto Sans CJK SC" pitchFamily="34" charset="-122"/>
+                <a:cs typeface="Noto Sans CJK SC" pitchFamily="34" charset="-120"/>
+              </a:rPr>
+              <a:t>记录重建假设及其可能影响</a:t>
+            </a:r>
+            <a:endParaRPr lang="zh-CN" sz="1800" dirty="0"/>
+          </a:p>
+        </p:txBody>
+      </p:sp>
+      <p:sp>
+        <p:nvSpPr>
+          <p:cNvPr id="39" name="T42/sources"/>
+          <p:cNvSpPr/>
+          <p:nvPr/>
+        </p:nvSpPr>
+        <p:spPr>
+          <a:xfrm>
+            <a:off x="457200" y="6286500"/>
+            <a:ext cx="11277600" cy="228600"/>
+          </a:xfrm>
+          <a:prstGeom prst="rect">
+            <a:avLst/>
+          </a:prstGeom>
+          <a:noFill/>
+          <a:ln/>
+        </p:spPr>
+        <p:txBody>
+          <a:bodyPr wrap="none" lIns="0" tIns="0" rIns="0" bIns="0" rtlCol="0" anchor="t"/>
+          <a:lstStyle/>
+          <a:p>
+            <a:pPr algn="l" indent="0" marL="0">
+              <a:lnSpc>
                 <a:spcPts val="1283"/>
               </a:lnSpc>
               <a:buNone/>
@@ -8866,7 +8940,7 @@
                 <a:ea typeface="Noto Sans CJK SC" pitchFamily="34" charset="-122"/>
                 <a:cs typeface="Noto Sans CJK SC" pitchFamily="34" charset="-120"/>
               </a:rPr>
-              <a:t>T1 · 2026 · 待替换</a:t>
+              <a:t>T1 · 2026 · 书目占位；图表均为合成示例</a:t>
             </a:r>
             <a:endParaRPr lang="zh-CN" sz="1125" dirty="0"/>
           </a:p>
